--- a/assets/downloads/Recht-Medizinisch-Einstieg.pptx
+++ b/assets/downloads/Recht-Medizinisch-Einstieg.pptx
@@ -2,29 +2,28 @@
 <file path=ppt/presentation.xml><?xml version="1.0" encoding="utf-8"?>
 <p:presentation xmlns:p="http://schemas.openxmlformats.org/presentationml/2006/main">
   <p:sldMasterIdLst>
-    <p:sldMasterId xmlns:r="http://schemas.openxmlformats.org/officeDocument/2006/relationships" id="2147483648" r:id="Ra3b208b9f94a4234"/>
+    <p:sldMasterId xmlns:r="http://schemas.openxmlformats.org/officeDocument/2006/relationships" id="2147483648" r:id="R6d542e0918d44275"/>
   </p:sldMasterIdLst>
   <p:notesMasterIdLst>
-    <p:notesMasterId xmlns:r="http://schemas.openxmlformats.org/officeDocument/2006/relationships" r:id="R7015823b6aba49a5"/>
+    <p:notesMasterId xmlns:r="http://schemas.openxmlformats.org/officeDocument/2006/relationships" r:id="R888205ab39ef4a93"/>
   </p:notesMasterIdLst>
   <p:sldIdLst>
-    <p:sldId xmlns:r="http://schemas.openxmlformats.org/officeDocument/2006/relationships" id="256" r:id="Re456b5ec85fa453b"/>
-    <p:sldId xmlns:r="http://schemas.openxmlformats.org/officeDocument/2006/relationships" id="257" r:id="Rae900d278e6e44d6"/>
-    <p:sldId xmlns:r="http://schemas.openxmlformats.org/officeDocument/2006/relationships" id="258" r:id="Ra945f296bca14810"/>
-    <p:sldId xmlns:r="http://schemas.openxmlformats.org/officeDocument/2006/relationships" id="259" r:id="Rb9eafeb971ce4700"/>
-    <p:sldId xmlns:r="http://schemas.openxmlformats.org/officeDocument/2006/relationships" id="260" r:id="R4cbd359180714523"/>
-    <p:sldId xmlns:r="http://schemas.openxmlformats.org/officeDocument/2006/relationships" id="261" r:id="Rea1328e8ecd64e37"/>
-    <p:sldId xmlns:r="http://schemas.openxmlformats.org/officeDocument/2006/relationships" id="262" r:id="R7016ae594c864f9b"/>
-    <p:sldId xmlns:r="http://schemas.openxmlformats.org/officeDocument/2006/relationships" id="263" r:id="Ra69536004d18445e"/>
-    <p:sldId xmlns:r="http://schemas.openxmlformats.org/officeDocument/2006/relationships" id="264" r:id="R058723d1686d40a7"/>
-    <p:sldId xmlns:r="http://schemas.openxmlformats.org/officeDocument/2006/relationships" id="265" r:id="R33f9f2acfaf7457a"/>
-    <p:sldId xmlns:r="http://schemas.openxmlformats.org/officeDocument/2006/relationships" id="266" r:id="R398138063aea4f76"/>
-    <p:sldId xmlns:r="http://schemas.openxmlformats.org/officeDocument/2006/relationships" id="267" r:id="Rd789c618ad0049f4"/>
-    <p:sldId xmlns:r="http://schemas.openxmlformats.org/officeDocument/2006/relationships" id="268" r:id="Rde09baf297294c9e"/>
-    <p:sldId xmlns:r="http://schemas.openxmlformats.org/officeDocument/2006/relationships" id="269" r:id="R7e69abfa06e34b27"/>
-    <p:sldId xmlns:r="http://schemas.openxmlformats.org/officeDocument/2006/relationships" id="270" r:id="R02f20015edd24196"/>
-    <p:sldId xmlns:r="http://schemas.openxmlformats.org/officeDocument/2006/relationships" id="271" r:id="Rb7acb6ee1ac74a32"/>
-    <p:sldId xmlns:r="http://schemas.openxmlformats.org/officeDocument/2006/relationships" id="272" r:id="Re090639d81524d2d"/>
+    <p:sldId xmlns:r="http://schemas.openxmlformats.org/officeDocument/2006/relationships" id="256" r:id="R4b265174374d4121"/>
+    <p:sldId xmlns:r="http://schemas.openxmlformats.org/officeDocument/2006/relationships" id="257" r:id="R27b045d260144e96"/>
+    <p:sldId xmlns:r="http://schemas.openxmlformats.org/officeDocument/2006/relationships" id="258" r:id="R5aab7c57442a4287"/>
+    <p:sldId xmlns:r="http://schemas.openxmlformats.org/officeDocument/2006/relationships" id="259" r:id="R4d485444591343c4"/>
+    <p:sldId xmlns:r="http://schemas.openxmlformats.org/officeDocument/2006/relationships" id="260" r:id="R8757bc79a23c4f21"/>
+    <p:sldId xmlns:r="http://schemas.openxmlformats.org/officeDocument/2006/relationships" id="261" r:id="R2d898e55f640403a"/>
+    <p:sldId xmlns:r="http://schemas.openxmlformats.org/officeDocument/2006/relationships" id="262" r:id="R1ff5a35088a94102"/>
+    <p:sldId xmlns:r="http://schemas.openxmlformats.org/officeDocument/2006/relationships" id="263" r:id="R504c5031b9374f28"/>
+    <p:sldId xmlns:r="http://schemas.openxmlformats.org/officeDocument/2006/relationships" id="264" r:id="R578c65d4e05242e7"/>
+    <p:sldId xmlns:r="http://schemas.openxmlformats.org/officeDocument/2006/relationships" id="265" r:id="Rc2ac4e5b86264e86"/>
+    <p:sldId xmlns:r="http://schemas.openxmlformats.org/officeDocument/2006/relationships" id="266" r:id="Rfdb6c0b1814e410d"/>
+    <p:sldId xmlns:r="http://schemas.openxmlformats.org/officeDocument/2006/relationships" id="267" r:id="Re2086f6fdb0045bd"/>
+    <p:sldId xmlns:r="http://schemas.openxmlformats.org/officeDocument/2006/relationships" id="268" r:id="Ra41e29d6ff89422c"/>
+    <p:sldId xmlns:r="http://schemas.openxmlformats.org/officeDocument/2006/relationships" id="269" r:id="R6ab1adc6a7804984"/>
+    <p:sldId xmlns:r="http://schemas.openxmlformats.org/officeDocument/2006/relationships" id="270" r:id="R7281596a6a5f493d"/>
+    <p:sldId xmlns:r="http://schemas.openxmlformats.org/officeDocument/2006/relationships" id="271" r:id="Rb02ddfac17f44fc7"/>
   </p:sldIdLst>
   <p:sldSz cx="12192000" cy="6858000"/>
   <p:notesSz cx="6858000" cy="9144000"/>
@@ -598,7 +597,7 @@
           <a:lstStyle xmlns:a="http://schemas.openxmlformats.org/drawingml/2006/main"/>
           <a:p xmlns:a="http://schemas.openxmlformats.org/drawingml/2006/main">
             <a:r>
-              <a:t>Quelle: AG Hersbruck, Beschl. v. 16.10.1992 – XVII 1556/92, NJW 1992, 3245; veröffentlichter Beschlusstext geprüft am 09.09.2026 · https://beck-online.beck.de/Bcid/Y-300-Z-NJW-B-1992-S-3245-N-1</a:t>
+              <a:t>Quelle: AG Hersbruck, Beschl. v. 16.10.1992 – XVII 1556/92 · https://beck-online.beck.de/Bcid/Y-300-Z-NJW-B-1992-S-3245-N-1 · Kritische Einordnung: Neue Kriminalpolitik 1993, 9–11 · https://doi.org/10.5771/0934-9200-1993-1-9</a:t>
             </a:r>
           </a:p>
         </p:txBody>
@@ -738,7 +737,7 @@
           <a:lstStyle xmlns:a="http://schemas.openxmlformats.org/drawingml/2006/main"/>
           <a:p xmlns:a="http://schemas.openxmlformats.org/drawingml/2006/main">
             <a:r>
-              <a:t>Quelle: AG Hersbruck, Beschl. v. 16.10.1992 – XVII 1556/92 · https://beck-online.beck.de/Bcid/Y-300-Z-NJW-B-1992-S-3245-N-1 · Kritische Einordnung: Neue Kriminalpolitik 1993, 9–11 · https://doi.org/10.5771/0934-9200-1993-1-9</a:t>
+              <a:t>Heutiger Rechtsrahmen: § 1870 BGB und § 1874 Abs. 2 BGB. Amtliche Gesetzestexte: https://www.gesetze-im-internet.de/bgb/__1870.html und https://www.gesetze-im-internet.de/bgb/__1874.html · geprüft am 08.09.2026. Diese Normen belegen die heutige Rechtslage; sie sind kein Beleg für die historische Entscheidung.</a:t>
             </a:r>
           </a:p>
         </p:txBody>
@@ -878,7 +877,7 @@
           <a:lstStyle xmlns:a="http://schemas.openxmlformats.org/drawingml/2006/main"/>
           <a:p xmlns:a="http://schemas.openxmlformats.org/drawingml/2006/main">
             <a:r>
-              <a:t>Heutiger Rechtsrahmen: § 1870 BGB und § 1874 Abs. 2 BGB. Amtliche Gesetzestexte: https://www.gesetze-im-internet.de/bgb/__1870.html und https://www.gesetze-im-internet.de/bgb/__1874.html · geprüft am 08.09.2026. Diese Normen belegen die heutige Rechtslage; sie sind kein Beleg für die historische Entscheidung.</a:t>
+              <a:t>Quelle: Recht Medizinisch, Kurzvisite „Der Erlanger Baby-Fall“, Apple Podcasts/Spotify, 22.06.2026 · SPIEGEL-Link in der Episodenbeschreibung · https://podcasts.apple.com/us/podcast/recht-medizinisch/id1896818482</a:t>
             </a:r>
           </a:p>
         </p:txBody>
@@ -948,76 +947,6 @@
           <a:lstStyle xmlns:a="http://schemas.openxmlformats.org/drawingml/2006/main"/>
           <a:p xmlns:a="http://schemas.openxmlformats.org/drawingml/2006/main">
             <a:r>
-              <a:t>Quelle: Recht Medizinisch, Kurzvisite „Der Erlanger Baby-Fall“, Apple Podcasts/Spotify, 22.06.2026 · SPIEGEL-Link in der Episodenbeschreibung · https://podcasts.apple.com/us/podcast/recht-medizinisch/id1896818482</a:t>
-            </a:r>
-          </a:p>
-        </p:txBody>
-      </p:sp>
-      <p:sp>
-        <p:nvSpPr>
-          <p:cNvPr id="4" name="Slide Number Placeholder 3"/>
-          <p:cNvSpPr>
-            <a:spLocks xmlns:a="http://schemas.openxmlformats.org/drawingml/2006/main" noGrp="1"/>
-          </p:cNvSpPr>
-          <p:nvPr>
-            <p:ph type="sldNum" idx="5"/>
-          </p:nvPr>
-        </p:nvSpPr>
-        <p:spPr/>
-        <p:txBody>
-          <a:bodyPr xmlns:a="http://schemas.openxmlformats.org/drawingml/2006/main"/>
-          <a:lstStyle xmlns:a="http://schemas.openxmlformats.org/drawingml/2006/main"/>
-          <a:p xmlns:a="http://schemas.openxmlformats.org/drawingml/2006/main"/>
-        </p:txBody>
-      </p:sp>
-    </p:spTree>
-  </p:cSld>
-  <p:clrMapOvr>
-    <a:masterClrMapping xmlns:a="http://schemas.openxmlformats.org/drawingml/2006/main"/>
-  </p:clrMapOvr>
-</p:notes>
-</file>
-
-<file path=ppt/notesSlides/notesSlide17.xml><?xml version="1.0" encoding="utf-8"?>
-<p:notes xmlns:p="http://schemas.openxmlformats.org/presentationml/2006/main">
-  <p:cSld>
-    <p:spTree>
-      <p:nvGrpSpPr>
-        <p:cNvPr id="1" name=""/>
-        <p:cNvGrpSpPr/>
-        <p:nvPr/>
-      </p:nvGrpSpPr>
-      <p:grpSpPr>
-        <a:xfrm xmlns:a="http://schemas.openxmlformats.org/drawingml/2006/main"/>
-      </p:grpSpPr>
-      <p:sp>
-        <p:nvSpPr>
-          <p:cNvPr id="2" name="Slide Image Placeholder 1"/>
-          <p:cNvSpPr>
-            <a:spLocks xmlns:a="http://schemas.openxmlformats.org/drawingml/2006/main" noGrp="1"/>
-          </p:cNvSpPr>
-          <p:nvPr>
-            <p:ph type="sldImg" idx="0"/>
-          </p:nvPr>
-        </p:nvSpPr>
-        <p:spPr/>
-      </p:sp>
-      <p:sp>
-        <p:nvSpPr>
-          <p:cNvPr id="3" name="Notes Placeholder 2"/>
-          <p:cNvSpPr>
-            <a:spLocks xmlns:a="http://schemas.openxmlformats.org/drawingml/2006/main" noGrp="1"/>
-          </p:cNvSpPr>
-          <p:nvPr>
-            <p:ph type="body" idx="1"/>
-          </p:nvPr>
-        </p:nvSpPr>
-        <p:spPr/>
-        <p:txBody>
-          <a:bodyPr xmlns:a="http://schemas.openxmlformats.org/drawingml/2006/main"/>
-          <a:lstStyle xmlns:a="http://schemas.openxmlformats.org/drawingml/2006/main"/>
-          <a:p xmlns:a="http://schemas.openxmlformats.org/drawingml/2006/main">
-            <a:r>
               <a:t>Quelle: Recht Medizinisch · allgemeine Lernfassung</a:t>
             </a:r>
           </a:p>
@@ -1438,7 +1367,7 @@
           <a:lstStyle xmlns:a="http://schemas.openxmlformats.org/drawingml/2006/main"/>
           <a:p xmlns:a="http://schemas.openxmlformats.org/drawingml/2006/main">
             <a:r>
-              <a:t>Quelle: AG Hersbruck, Beschl. v. 16.10.1992 – XVII 1556/92, NJW 1992, 3245 · BVerfG, Urt. v. 28.05.1993 – 2 BvF 2/90 · https://beck-online.beck.de/Bcid/Y-300-Z-NJW-B-1992-S-3245-N-1 · https://www.bundesverfassungsgericht.de</a:t>
+              <a:t>Quelle: Recht Medizinisch · allgemeine Lernfassung. Zur Todesfeststellung: Bundesärztekammer, Richtlinie zum irreversiblen Hirnfunktionsausfall, Fünfte Fortschreibung (2022), geprüft 07.09.2026 · https://www.wbbaek.de/richtlinien-leitlinien/irreversibler-hirnfunktionsausfall</a:t>
             </a:r>
           </a:p>
         </p:txBody>
@@ -1578,7 +1507,7 @@
           <a:lstStyle xmlns:a="http://schemas.openxmlformats.org/drawingml/2006/main"/>
           <a:p xmlns:a="http://schemas.openxmlformats.org/drawingml/2006/main">
             <a:r>
-              <a:t>Quelle: Recht Medizinisch · allgemeine Lernfassung. Zur Todesfeststellung: Bundesärztekammer, Richtlinie zum irreversiblen Hirnfunktionsausfall, Fünfte Fortschreibung (2022), geprüft 07.09.2026 · https://www.wbbaek.de/richtlinien-leitlinien/irreversibler-hirnfunktionsausfall</a:t>
+              <a:t>Quelle: AG Hersbruck, Beschl. v. 16.10.1992 – XVII 1556/92, NJW 1992, 3245; veröffentlichter Beschlusstext geprüft am 09.09.2026 · https://beck-online.beck.de/Bcid/Y-300-Z-NJW-B-1992-S-3245-N-1</a:t>
             </a:r>
           </a:p>
         </p:txBody>
@@ -1625,7 +1554,7 @@
           <p:cNvPr id="3" name="Title">
             <a:extLst xmlns:a="http://schemas.openxmlformats.org/drawingml/2006/main">
               <a:ext uri="{FF2B5EF4-FFF2-40B4-BE49-F238E27FC236}">
-                <a16:creationId xmlns:a16="http://schemas.microsoft.com/office/drawing/2014/main" id="{EDD7D865-D0BD-451F-B74D-0BE658F2166A}"/>
+                <a16:creationId xmlns:a16="http://schemas.microsoft.com/office/drawing/2014/main" id="{C5BE70ED-36EC-440D-BAF0-F3F8BD125807}"/>
               </a:ext>
             </a:extLst>
           </p:cNvPr>
@@ -1772,7 +1701,7 @@
           <p:cNvPr id="2" name="Subtitle">
             <a:extLst xmlns:a="http://schemas.openxmlformats.org/drawingml/2006/main">
               <a:ext uri="{FF2B5EF4-FFF2-40B4-BE49-F238E27FC236}">
-                <a16:creationId xmlns:a16="http://schemas.microsoft.com/office/drawing/2014/main" id="{36AB7424-9C5D-4844-B881-EFC12FFB46E6}"/>
+                <a16:creationId xmlns:a16="http://schemas.microsoft.com/office/drawing/2014/main" id="{2FFC0BBC-3E1B-40EF-9CA7-2FDA6AB84362}"/>
               </a:ext>
             </a:extLst>
           </p:cNvPr>
@@ -1936,7 +1865,7 @@
           <p:cNvPr id="2" name="Section title">
             <a:extLst xmlns:a="http://schemas.openxmlformats.org/drawingml/2006/main">
               <a:ext uri="{FF2B5EF4-FFF2-40B4-BE49-F238E27FC236}">
-                <a16:creationId xmlns:a16="http://schemas.microsoft.com/office/drawing/2014/main" id="{39088E8D-3DAF-4857-8EC0-B69F4425FF03}"/>
+                <a16:creationId xmlns:a16="http://schemas.microsoft.com/office/drawing/2014/main" id="{FBE87BB5-1194-4AF1-9E67-35360C4A31D0}"/>
               </a:ext>
             </a:extLst>
           </p:cNvPr>
@@ -2100,7 +2029,7 @@
           <p:cNvPr id="3" name="Title">
             <a:extLst xmlns:a="http://schemas.openxmlformats.org/drawingml/2006/main">
               <a:ext uri="{FF2B5EF4-FFF2-40B4-BE49-F238E27FC236}">
-                <a16:creationId xmlns:a16="http://schemas.microsoft.com/office/drawing/2014/main" id="{7FFA1474-D450-40B3-97DB-F692D2BDE648}"/>
+                <a16:creationId xmlns:a16="http://schemas.microsoft.com/office/drawing/2014/main" id="{4862168A-F245-4680-8FF3-18F78B4CD5B7}"/>
               </a:ext>
             </a:extLst>
           </p:cNvPr>
@@ -2247,7 +2176,7 @@
           <p:cNvPr id="2" name="Body">
             <a:extLst xmlns:a="http://schemas.openxmlformats.org/drawingml/2006/main">
               <a:ext uri="{FF2B5EF4-FFF2-40B4-BE49-F238E27FC236}">
-                <a16:creationId xmlns:a16="http://schemas.microsoft.com/office/drawing/2014/main" id="{B286D88B-C6A4-4003-A448-5229205FD255}"/>
+                <a16:creationId xmlns:a16="http://schemas.microsoft.com/office/drawing/2014/main" id="{374E6805-DE33-465F-9E30-87F1E639C66E}"/>
               </a:ext>
             </a:extLst>
           </p:cNvPr>
@@ -2411,7 +2340,7 @@
           <p:cNvPr id="4" name="Title">
             <a:extLst xmlns:a="http://schemas.openxmlformats.org/drawingml/2006/main">
               <a:ext uri="{FF2B5EF4-FFF2-40B4-BE49-F238E27FC236}">
-                <a16:creationId xmlns:a16="http://schemas.microsoft.com/office/drawing/2014/main" id="{68083D65-2AE4-423B-A31C-7BE382B01D7F}"/>
+                <a16:creationId xmlns:a16="http://schemas.microsoft.com/office/drawing/2014/main" id="{6685EB8A-9AB2-449B-9C51-0CFAA0F7F58E}"/>
               </a:ext>
             </a:extLst>
           </p:cNvPr>
@@ -2558,7 +2487,7 @@
           <p:cNvPr id="2" name="Left column">
             <a:extLst xmlns:a="http://schemas.openxmlformats.org/drawingml/2006/main">
               <a:ext uri="{FF2B5EF4-FFF2-40B4-BE49-F238E27FC236}">
-                <a16:creationId xmlns:a16="http://schemas.microsoft.com/office/drawing/2014/main" id="{2B81E500-1AB9-4CD5-B303-DFD3FC95251A}"/>
+                <a16:creationId xmlns:a16="http://schemas.microsoft.com/office/drawing/2014/main" id="{DABA0C45-0515-4CCD-8256-1ED46F4CA329}"/>
               </a:ext>
             </a:extLst>
           </p:cNvPr>
@@ -2705,7 +2634,7 @@
           <p:cNvPr id="3" name="Right column">
             <a:extLst xmlns:a="http://schemas.openxmlformats.org/drawingml/2006/main">
               <a:ext uri="{FF2B5EF4-FFF2-40B4-BE49-F238E27FC236}">
-                <a16:creationId xmlns:a16="http://schemas.microsoft.com/office/drawing/2014/main" id="{AE91E624-72EF-4F0E-9E20-C3752183A191}"/>
+                <a16:creationId xmlns:a16="http://schemas.microsoft.com/office/drawing/2014/main" id="{49552EE8-B3E9-4825-8985-CBC3F0A55B1B}"/>
               </a:ext>
             </a:extLst>
           </p:cNvPr>
@@ -2869,7 +2798,7 @@
           <p:cNvPr id="3" name="Title">
             <a:extLst xmlns:a="http://schemas.openxmlformats.org/drawingml/2006/main">
               <a:ext uri="{FF2B5EF4-FFF2-40B4-BE49-F238E27FC236}">
-                <a16:creationId xmlns:a16="http://schemas.microsoft.com/office/drawing/2014/main" id="{6EED97EC-F19E-49A8-90EE-71EFD9DD5735}"/>
+                <a16:creationId xmlns:a16="http://schemas.microsoft.com/office/drawing/2014/main" id="{C6624F7E-8C86-449E-BF6F-7C411793130D}"/>
               </a:ext>
             </a:extLst>
           </p:cNvPr>
@@ -3016,7 +2945,7 @@
           <p:cNvPr id="2" name="Left column">
             <a:extLst xmlns:a="http://schemas.openxmlformats.org/drawingml/2006/main">
               <a:ext uri="{FF2B5EF4-FFF2-40B4-BE49-F238E27FC236}">
-                <a16:creationId xmlns:a16="http://schemas.microsoft.com/office/drawing/2014/main" id="{4D25BA3F-E1E0-44FA-A5A2-CEA50147C243}"/>
+                <a16:creationId xmlns:a16="http://schemas.microsoft.com/office/drawing/2014/main" id="{FA75A8E3-80E5-4296-BDA6-B09014293F1A}"/>
               </a:ext>
             </a:extLst>
           </p:cNvPr>
@@ -3201,12 +3130,12 @@
   </p:cSld>
   <p:clrMap bg1="lt1" tx1="dk1" bg2="lt2" tx2="dk2" accent1="accent1" accent2="accent2" accent3="accent3" accent4="accent4" accent5="accent5" accent6="accent6" hlink="hlink" folHlink="folHlink"/>
   <p:sldLayoutIdLst>
-    <p:sldLayoutId xmlns:r="http://schemas.openxmlformats.org/officeDocument/2006/relationships" id="2147483649" r:id="Rfd9622ac4d764a79"/>
-    <p:sldLayoutId xmlns:r="http://schemas.openxmlformats.org/officeDocument/2006/relationships" id="2147483650" r:id="R47722c8be90a4cd1"/>
-    <p:sldLayoutId xmlns:r="http://schemas.openxmlformats.org/officeDocument/2006/relationships" id="2147483651" r:id="R6b5598a915c54279"/>
-    <p:sldLayoutId xmlns:r="http://schemas.openxmlformats.org/officeDocument/2006/relationships" id="2147483652" r:id="Rfc131ee5d6694551"/>
-    <p:sldLayoutId xmlns:r="http://schemas.openxmlformats.org/officeDocument/2006/relationships" id="2147483653" r:id="Rf4e8ef5f1ab24007"/>
-    <p:sldLayoutId xmlns:r="http://schemas.openxmlformats.org/officeDocument/2006/relationships" id="2147483654" r:id="R69fdd9b2947740c7"/>
+    <p:sldLayoutId xmlns:r="http://schemas.openxmlformats.org/officeDocument/2006/relationships" id="2147483649" r:id="Raf4bc2c7dbb94302"/>
+    <p:sldLayoutId xmlns:r="http://schemas.openxmlformats.org/officeDocument/2006/relationships" id="2147483650" r:id="R9b8f4baf747c4044"/>
+    <p:sldLayoutId xmlns:r="http://schemas.openxmlformats.org/officeDocument/2006/relationships" id="2147483651" r:id="R3b88c9c568d84f9a"/>
+    <p:sldLayoutId xmlns:r="http://schemas.openxmlformats.org/officeDocument/2006/relationships" id="2147483652" r:id="R29e45884299247fc"/>
+    <p:sldLayoutId xmlns:r="http://schemas.openxmlformats.org/officeDocument/2006/relationships" id="2147483653" r:id="R8fea4fc49fde4cf1"/>
+    <p:sldLayoutId xmlns:r="http://schemas.openxmlformats.org/officeDocument/2006/relationships" id="2147483654" r:id="Rf5f0f0e9c4db4ffc"/>
   </p:sldLayoutIdLst>
   <p:txStyles>
     <p:titleStyle>
@@ -3757,7 +3686,7 @@
           <p:cNvPr id="6" name="">
             <a:extLst xmlns:a="http://schemas.openxmlformats.org/drawingml/2006/main">
               <a:ext uri="{FF2B5EF4-FFF2-40B4-BE49-F238E27FC236}">
-                <a16:creationId xmlns:a16="http://schemas.microsoft.com/office/drawing/2014/main" id="{43770EDA-A104-4CAE-A337-135A33FBC8C8}"/>
+                <a16:creationId xmlns:a16="http://schemas.microsoft.com/office/drawing/2014/main" id="{8E12FF33-398B-41EC-A1FF-229FA82A3432}"/>
               </a:ext>
             </a:extLst>
           </p:cNvPr>
@@ -3814,7 +3743,7 @@
           <p:cNvPr id="2" name="">
             <a:extLst xmlns:a="http://schemas.openxmlformats.org/drawingml/2006/main">
               <a:ext uri="{FF2B5EF4-FFF2-40B4-BE49-F238E27FC236}">
-                <a16:creationId xmlns:a16="http://schemas.microsoft.com/office/drawing/2014/main" id="{84979435-0801-47D4-853F-AF3D078EC379}"/>
+                <a16:creationId xmlns:a16="http://schemas.microsoft.com/office/drawing/2014/main" id="{781CF71D-9482-4E87-859D-1FE473C2AB27}"/>
               </a:ext>
             </a:extLst>
           </p:cNvPr>
@@ -3894,7 +3823,7 @@
           <p:cNvPr id="3" name="">
             <a:extLst xmlns:a="http://schemas.openxmlformats.org/drawingml/2006/main">
               <a:ext uri="{FF2B5EF4-FFF2-40B4-BE49-F238E27FC236}">
-                <a16:creationId xmlns:a16="http://schemas.microsoft.com/office/drawing/2014/main" id="{D6185BAB-65D3-49F6-BCBA-EECB0DE9ADA0}"/>
+                <a16:creationId xmlns:a16="http://schemas.microsoft.com/office/drawing/2014/main" id="{8C7DD958-A3A9-494C-9129-30C77416E559}"/>
               </a:ext>
             </a:extLst>
           </p:cNvPr>
@@ -3955,7 +3884,7 @@
           <p:nvPr/>
         </p:nvPicPr>
         <p:blipFill>
-          <a:blip xmlns:r="http://schemas.openxmlformats.org/officeDocument/2006/relationships" xmlns:a="http://schemas.openxmlformats.org/drawingml/2006/main" r:embed="R61064a454b9a4a0e"/>
+          <a:blip xmlns:r="http://schemas.openxmlformats.org/officeDocument/2006/relationships" xmlns:a="http://schemas.openxmlformats.org/drawingml/2006/main" r:embed="Rf3d0034453274b4a"/>
           <a:stretch xmlns:a="http://schemas.openxmlformats.org/drawingml/2006/main"/>
         </p:blipFill>
         <p:spPr>
@@ -3973,7 +3902,7 @@
           <p:cNvPr id="5" name="">
             <a:extLst xmlns:a="http://schemas.openxmlformats.org/drawingml/2006/main">
               <a:ext uri="{FF2B5EF4-FFF2-40B4-BE49-F238E27FC236}">
-                <a16:creationId xmlns:a16="http://schemas.microsoft.com/office/drawing/2014/main" id="{59074E6F-6C7F-47ED-B181-9DD47F56D2C4}"/>
+                <a16:creationId xmlns:a16="http://schemas.microsoft.com/office/drawing/2014/main" id="{69D32AA6-35A9-4A81-AF0B-98E784DFFA93}"/>
               </a:ext>
             </a:extLst>
           </p:cNvPr>
@@ -4028,7 +3957,7 @@
     </p:spTree>
     <p:extLst>
       <p:ext uri="{BB962C8B-B14F-4D97-AF65-F5344CB8AC3E}">
-        <p14:creationId xmlns:p14="http://schemas.microsoft.com/office/powerpoint/2010/main" val="1859943558"/>
+        <p14:creationId xmlns:p14="http://schemas.microsoft.com/office/powerpoint/2010/main" val="270346980"/>
       </p:ext>
     </p:extLst>
   </p:cSld>
@@ -4056,10 +3985,10 @@
       </p:grpSpPr>
       <p:sp>
         <p:nvSpPr>
-          <p:cNvPr id="13" name="">
-            <a:extLst xmlns:a="http://schemas.openxmlformats.org/drawingml/2006/main">
-              <a:ext uri="{FF2B5EF4-FFF2-40B4-BE49-F238E27FC236}">
-                <a16:creationId xmlns:a16="http://schemas.microsoft.com/office/drawing/2014/main" id="{2819B7C2-3647-41ED-A2B0-617BB57E0393}"/>
+          <p:cNvPr id="9" name="">
+            <a:extLst xmlns:a="http://schemas.openxmlformats.org/drawingml/2006/main">
+              <a:ext uri="{FF2B5EF4-FFF2-40B4-BE49-F238E27FC236}">
+                <a16:creationId xmlns:a16="http://schemas.microsoft.com/office/drawing/2014/main" id="{1564F907-D5B9-4959-A8EB-40B9F8CEAC94}"/>
               </a:ext>
             </a:extLst>
           </p:cNvPr>
@@ -4116,7 +4045,7 @@
           <p:cNvPr id="2" name="">
             <a:extLst xmlns:a="http://schemas.openxmlformats.org/drawingml/2006/main">
               <a:ext uri="{FF2B5EF4-FFF2-40B4-BE49-F238E27FC236}">
-                <a16:creationId xmlns:a16="http://schemas.microsoft.com/office/drawing/2014/main" id="{7B51352B-49D3-43AF-87C7-9F3621E88831}"/>
+                <a16:creationId xmlns:a16="http://schemas.microsoft.com/office/drawing/2014/main" id="{C776B3BC-6B78-48F5-A952-1A0522E88A3F}"/>
               </a:ext>
             </a:extLst>
           </p:cNvPr>
@@ -4173,7 +4102,7 @@
           <p:cNvPr id="3" name="">
             <a:extLst xmlns:a="http://schemas.openxmlformats.org/drawingml/2006/main">
               <a:ext uri="{FF2B5EF4-FFF2-40B4-BE49-F238E27FC236}">
-                <a16:creationId xmlns:a16="http://schemas.microsoft.com/office/drawing/2014/main" id="{5E24AFB1-565F-4C01-89F5-30F241CC5BBC}"/>
+                <a16:creationId xmlns:a16="http://schemas.microsoft.com/office/drawing/2014/main" id="{6A6E4742-1826-4BF4-A279-86940011410C}"/>
               </a:ext>
             </a:extLst>
           </p:cNvPr>
@@ -4220,7 +4149,7 @@
                 <a:ea typeface="Arial"/>
                 <a:cs typeface="Arial"/>
               </a:rPr>
-              <a:t>⚖ Entscheidung</a:t>
+              <a:t>🩺 Praxis</a:t>
             </a:r>
           </a:p>
         </p:txBody>
@@ -4230,7 +4159,7 @@
           <p:cNvPr id="4" name="">
             <a:extLst xmlns:a="http://schemas.openxmlformats.org/drawingml/2006/main">
               <a:ext uri="{FF2B5EF4-FFF2-40B4-BE49-F238E27FC236}">
-                <a16:creationId xmlns:a16="http://schemas.microsoft.com/office/drawing/2014/main" id="{590FE5E2-BEBE-47D9-B8A0-293DF12DA420}"/>
+                <a16:creationId xmlns:a16="http://schemas.microsoft.com/office/drawing/2014/main" id="{D1E29F87-AA47-4F9E-A49D-9D8244FE20D4}"/>
               </a:ext>
             </a:extLst>
           </p:cNvPr>
@@ -4242,7 +4171,7 @@
         <p:spPr>
           <a:xfrm xmlns:a="http://schemas.openxmlformats.org/drawingml/2006/main">
             <a:off x="533400" y="1914525"/>
-            <a:ext cx="11125200" cy="371475"/>
+            <a:ext cx="11125200" cy="647700"/>
           </a:xfrm>
           <a:prstGeom xmlns:a="http://schemas.openxmlformats.org/drawingml/2006/main" prst="rect">
             <a:avLst/>
@@ -4269,7 +4198,7 @@
               </a:defRPr>
             </a:pPr>
             <a:r>
-              <a:t>AG Hersbruck · 16.10.1992 · XVII 1556/92 · damals als nicht rechtskräftig veröffentlicht</a:t>
+              <a:t>Der Beschluss beantwortete vor allem die damalige Vertretungs- und Genehmigungsfrage. Er ist keine allgemeine höchstrichterliche Pflicht zur Fortführung intensivmedizinischer Maßnahmen.</a:t>
             </a:r>
           </a:p>
         </p:txBody>
@@ -4279,18 +4208,18 @@
           <p:cNvPr id="5" name="">
             <a:extLst xmlns:a="http://schemas.openxmlformats.org/drawingml/2006/main">
               <a:ext uri="{FF2B5EF4-FFF2-40B4-BE49-F238E27FC236}">
-                <a16:creationId xmlns:a16="http://schemas.microsoft.com/office/drawing/2014/main" id="{564F9324-B832-46B4-8E21-78C6C0475EA6}"/>
-              </a:ext>
-            </a:extLst>
-          </p:cNvPr>
-          <p:cNvSpPr>
-            <a:spLocks xmlns:a="http://schemas.openxmlformats.org/drawingml/2006/main" noGrp="1"/>
-          </p:cNvSpPr>
-          <p:nvPr/>
-        </p:nvSpPr>
-        <p:spPr>
-          <a:xfrm xmlns:a="http://schemas.openxmlformats.org/drawingml/2006/main">
-            <a:off x="533400" y="2286000"/>
+                <a16:creationId xmlns:a16="http://schemas.microsoft.com/office/drawing/2014/main" id="{53E2EAE1-3FFF-4DB1-90EA-4F85F7851660}"/>
+              </a:ext>
+            </a:extLst>
+          </p:cNvPr>
+          <p:cNvSpPr>
+            <a:spLocks xmlns:a="http://schemas.openxmlformats.org/drawingml/2006/main" noGrp="1"/>
+          </p:cNvSpPr>
+          <p:nvPr/>
+        </p:nvSpPr>
+        <p:spPr>
+          <a:xfrm xmlns:a="http://schemas.openxmlformats.org/drawingml/2006/main">
+            <a:off x="533400" y="2562225"/>
             <a:ext cx="11125200" cy="457200"/>
           </a:xfrm>
           <a:prstGeom xmlns:a="http://schemas.openxmlformats.org/drawingml/2006/main" prst="rect">
@@ -4326,7 +4255,7 @@
                 <a:ea typeface="Arial"/>
                 <a:cs typeface="Arial"/>
               </a:rPr>
-              <a:t>📚 Fundstellen</a:t>
+              <a:t>💡 Praxis-Merksatz</a:t>
             </a:r>
           </a:p>
         </p:txBody>
@@ -4336,19 +4265,19 @@
           <p:cNvPr id="6" name="">
             <a:extLst xmlns:a="http://schemas.openxmlformats.org/drawingml/2006/main">
               <a:ext uri="{FF2B5EF4-FFF2-40B4-BE49-F238E27FC236}">
-                <a16:creationId xmlns:a16="http://schemas.microsoft.com/office/drawing/2014/main" id="{CB3B61AA-F2CF-4FB4-BB0F-78585F43950B}"/>
-              </a:ext>
-            </a:extLst>
-          </p:cNvPr>
-          <p:cNvSpPr>
-            <a:spLocks xmlns:a="http://schemas.openxmlformats.org/drawingml/2006/main" noGrp="1"/>
-          </p:cNvSpPr>
-          <p:nvPr/>
-        </p:nvSpPr>
-        <p:spPr>
-          <a:xfrm xmlns:a="http://schemas.openxmlformats.org/drawingml/2006/main">
-            <a:off x="533400" y="2743200"/>
-            <a:ext cx="11125200" cy="371475"/>
+                <a16:creationId xmlns:a16="http://schemas.microsoft.com/office/drawing/2014/main" id="{F0596520-D354-4A33-ABC0-FCAB09F4EE63}"/>
+              </a:ext>
+            </a:extLst>
+          </p:cNvPr>
+          <p:cNvSpPr>
+            <a:spLocks xmlns:a="http://schemas.openxmlformats.org/drawingml/2006/main" noGrp="1"/>
+          </p:cNvSpPr>
+          <p:nvPr/>
+        </p:nvSpPr>
+        <p:spPr>
+          <a:xfrm xmlns:a="http://schemas.openxmlformats.org/drawingml/2006/main">
+            <a:off x="533400" y="3019425"/>
+            <a:ext cx="11125200" cy="647700"/>
           </a:xfrm>
           <a:prstGeom xmlns:a="http://schemas.openxmlformats.org/drawingml/2006/main" prst="rect">
             <a:avLst/>
@@ -4375,7 +4304,7 @@
               </a:defRPr>
             </a:pPr>
             <a:r>
-              <a:t>NJW 1992, 3245 · FamRZ 1992, 1471</a:t>
+              <a:t>Die juristisch korrekte Bezeichnung lautet Beschluss; Reichweite und Begründung der Entscheidung sind bis heute umstritten.</a:t>
             </a:r>
           </a:p>
         </p:txBody>
@@ -4385,219 +4314,7 @@
           <p:cNvPr id="7" name="">
             <a:extLst xmlns:a="http://schemas.openxmlformats.org/drawingml/2006/main">
               <a:ext uri="{FF2B5EF4-FFF2-40B4-BE49-F238E27FC236}">
-                <a16:creationId xmlns:a16="http://schemas.microsoft.com/office/drawing/2014/main" id="{43FF5D4E-F5AF-421A-8702-D6C7CA7CB182}"/>
-              </a:ext>
-            </a:extLst>
-          </p:cNvPr>
-          <p:cNvSpPr>
-            <a:spLocks xmlns:a="http://schemas.openxmlformats.org/drawingml/2006/main" noGrp="1"/>
-          </p:cNvSpPr>
-          <p:nvPr/>
-        </p:nvSpPr>
-        <p:spPr>
-          <a:xfrm xmlns:a="http://schemas.openxmlformats.org/drawingml/2006/main">
-            <a:off x="533400" y="3114675"/>
-            <a:ext cx="11125200" cy="457200"/>
-          </a:xfrm>
-          <a:prstGeom xmlns:a="http://schemas.openxmlformats.org/drawingml/2006/main" prst="rect">
-            <a:avLst/>
-          </a:prstGeom>
-          <a:noFill xmlns:a="http://schemas.openxmlformats.org/drawingml/2006/main"/>
-          <a:ln xmlns:a="http://schemas.openxmlformats.org/drawingml/2006/main" w="0">
-            <a:noFill/>
-          </a:ln>
-        </p:spPr>
-        <p:txBody>
-          <a:bodyPr xmlns:a="http://schemas.openxmlformats.org/drawingml/2006/main">
-            <a:noAutofit/>
-          </a:bodyPr>
-          <a:lstStyle xmlns:a="http://schemas.openxmlformats.org/drawingml/2006/main"/>
-          <a:p xmlns:a="http://schemas.openxmlformats.org/drawingml/2006/main">
-            <a:pPr>
-              <a:defRPr sz="1800" b="1">
-                <a:solidFill>
-                  <a:srgbClr val="087F86"/>
-                </a:solidFill>
-                <a:latin typeface="Arial"/>
-                <a:ea typeface="Arial"/>
-                <a:cs typeface="Arial"/>
-              </a:defRPr>
-            </a:pPr>
-            <a:r>
-              <a:rPr sz="1800" b="1">
-                <a:solidFill>
-                  <a:srgbClr val="087F86"/>
-                </a:solidFill>
-                <a:latin typeface="Arial"/>
-                <a:ea typeface="Arial"/>
-                <a:cs typeface="Arial"/>
-              </a:rPr>
-              <a:t>🧩 Sachverhalt</a:t>
-            </a:r>
-          </a:p>
-        </p:txBody>
-      </p:sp>
-      <p:sp>
-        <p:nvSpPr>
-          <p:cNvPr id="8" name="">
-            <a:extLst xmlns:a="http://schemas.openxmlformats.org/drawingml/2006/main">
-              <a:ext uri="{FF2B5EF4-FFF2-40B4-BE49-F238E27FC236}">
-                <a16:creationId xmlns:a16="http://schemas.microsoft.com/office/drawing/2014/main" id="{B74F142D-8746-44A5-B255-C78D4B8F7E93}"/>
-              </a:ext>
-            </a:extLst>
-          </p:cNvPr>
-          <p:cNvSpPr>
-            <a:spLocks xmlns:a="http://schemas.openxmlformats.org/drawingml/2006/main" noGrp="1"/>
-          </p:cNvSpPr>
-          <p:nvPr/>
-        </p:nvSpPr>
-        <p:spPr>
-          <a:xfrm xmlns:a="http://schemas.openxmlformats.org/drawingml/2006/main">
-            <a:off x="533400" y="3571875"/>
-            <a:ext cx="11125200" cy="647700"/>
-          </a:xfrm>
-          <a:prstGeom xmlns:a="http://schemas.openxmlformats.org/drawingml/2006/main" prst="rect">
-            <a:avLst/>
-          </a:prstGeom>
-          <a:noFill xmlns:a="http://schemas.openxmlformats.org/drawingml/2006/main"/>
-          <a:ln xmlns:a="http://schemas.openxmlformats.org/drawingml/2006/main" w="0">
-            <a:noFill/>
-          </a:ln>
-        </p:spPr>
-        <p:txBody>
-          <a:bodyPr xmlns:a="http://schemas.openxmlformats.org/drawingml/2006/main">
-            <a:noAutofit/>
-          </a:bodyPr>
-          <a:lstStyle xmlns:a="http://schemas.openxmlformats.org/drawingml/2006/main"/>
-          <a:p xmlns:a="http://schemas.openxmlformats.org/drawingml/2006/main">
-            <a:pPr>
-              <a:defRPr sz="1725" b="0">
-                <a:solidFill>
-                  <a:srgbClr val="071D33"/>
-                </a:solidFill>
-                <a:latin typeface="Arial"/>
-                <a:ea typeface="Arial"/>
-                <a:cs typeface="Arial"/>
-              </a:defRPr>
-            </a:pPr>
-            <a:r>
-              <a:t>Das Gericht bestellte für die hirntote Schwangere eine vorläufige Betreuerin, obwohl es die Frau als rechtlich tot ansah. Kreislauf und Atmung wurden wegen der Schwangerschaft künstlich aufrechterhalten.</a:t>
-            </a:r>
-          </a:p>
-        </p:txBody>
-      </p:sp>
-      <p:sp>
-        <p:nvSpPr>
-          <p:cNvPr id="9" name="">
-            <a:extLst xmlns:a="http://schemas.openxmlformats.org/drawingml/2006/main">
-              <a:ext uri="{FF2B5EF4-FFF2-40B4-BE49-F238E27FC236}">
-                <a16:creationId xmlns:a16="http://schemas.microsoft.com/office/drawing/2014/main" id="{61E499F8-C333-46C0-9C40-EF8A75132FB3}"/>
-              </a:ext>
-            </a:extLst>
-          </p:cNvPr>
-          <p:cNvSpPr>
-            <a:spLocks xmlns:a="http://schemas.openxmlformats.org/drawingml/2006/main" noGrp="1"/>
-          </p:cNvSpPr>
-          <p:nvPr/>
-        </p:nvSpPr>
-        <p:spPr>
-          <a:xfrm xmlns:a="http://schemas.openxmlformats.org/drawingml/2006/main">
-            <a:off x="533400" y="4219575"/>
-            <a:ext cx="11125200" cy="457200"/>
-          </a:xfrm>
-          <a:prstGeom xmlns:a="http://schemas.openxmlformats.org/drawingml/2006/main" prst="rect">
-            <a:avLst/>
-          </a:prstGeom>
-          <a:noFill xmlns:a="http://schemas.openxmlformats.org/drawingml/2006/main"/>
-          <a:ln xmlns:a="http://schemas.openxmlformats.org/drawingml/2006/main" w="0">
-            <a:noFill/>
-          </a:ln>
-        </p:spPr>
-        <p:txBody>
-          <a:bodyPr xmlns:a="http://schemas.openxmlformats.org/drawingml/2006/main">
-            <a:noAutofit/>
-          </a:bodyPr>
-          <a:lstStyle xmlns:a="http://schemas.openxmlformats.org/drawingml/2006/main"/>
-          <a:p xmlns:a="http://schemas.openxmlformats.org/drawingml/2006/main">
-            <a:pPr>
-              <a:defRPr sz="1800" b="1">
-                <a:solidFill>
-                  <a:srgbClr val="087F86"/>
-                </a:solidFill>
-                <a:latin typeface="Arial"/>
-                <a:ea typeface="Arial"/>
-                <a:cs typeface="Arial"/>
-              </a:defRPr>
-            </a:pPr>
-            <a:r>
-              <a:rPr sz="1800" b="1">
-                <a:solidFill>
-                  <a:srgbClr val="087F86"/>
-                </a:solidFill>
-                <a:latin typeface="Arial"/>
-                <a:ea typeface="Arial"/>
-                <a:cs typeface="Arial"/>
-              </a:rPr>
-              <a:t>❝ Tragende Aussage</a:t>
-            </a:r>
-          </a:p>
-        </p:txBody>
-      </p:sp>
-      <p:sp>
-        <p:nvSpPr>
-          <p:cNvPr id="10" name="">
-            <a:extLst xmlns:a="http://schemas.openxmlformats.org/drawingml/2006/main">
-              <a:ext uri="{FF2B5EF4-FFF2-40B4-BE49-F238E27FC236}">
-                <a16:creationId xmlns:a16="http://schemas.microsoft.com/office/drawing/2014/main" id="{4B07DDC4-CC11-4E38-89FD-80C9C3904DB9}"/>
-              </a:ext>
-            </a:extLst>
-          </p:cNvPr>
-          <p:cNvSpPr>
-            <a:spLocks xmlns:a="http://schemas.openxmlformats.org/drawingml/2006/main" noGrp="1"/>
-          </p:cNvSpPr>
-          <p:nvPr/>
-        </p:nvSpPr>
-        <p:spPr>
-          <a:xfrm xmlns:a="http://schemas.openxmlformats.org/drawingml/2006/main">
-            <a:off x="533400" y="4676775"/>
-            <a:ext cx="11125200" cy="914400"/>
-          </a:xfrm>
-          <a:prstGeom xmlns:a="http://schemas.openxmlformats.org/drawingml/2006/main" prst="rect">
-            <a:avLst/>
-          </a:prstGeom>
-          <a:noFill xmlns:a="http://schemas.openxmlformats.org/drawingml/2006/main"/>
-          <a:ln xmlns:a="http://schemas.openxmlformats.org/drawingml/2006/main" w="0">
-            <a:noFill/>
-          </a:ln>
-        </p:spPr>
-        <p:txBody>
-          <a:bodyPr xmlns:a="http://schemas.openxmlformats.org/drawingml/2006/main">
-            <a:noAutofit/>
-          </a:bodyPr>
-          <a:lstStyle xmlns:a="http://schemas.openxmlformats.org/drawingml/2006/main"/>
-          <a:p xmlns:a="http://schemas.openxmlformats.org/drawingml/2006/main">
-            <a:pPr>
-              <a:defRPr sz="1725" b="0">
-                <a:solidFill>
-                  <a:srgbClr val="071D33"/>
-                </a:solidFill>
-                <a:latin typeface="Arial"/>
-                <a:ea typeface="Arial"/>
-                <a:cs typeface="Arial"/>
-              </a:defRPr>
-            </a:pPr>
-            <a:r>
-              <a:t>Nach dem Beschluss bedurfte das Abschalten der funktionserhaltenden Apparate vor der Entbindung oder dem Tod des ungeborenen Kindes einer gerichtlichen Genehmigung. Danach sollte dieser Genehmigungsvorbehalt entfallen.</a:t>
-            </a:r>
-          </a:p>
-        </p:txBody>
-      </p:sp>
-      <p:sp>
-        <p:nvSpPr>
-          <p:cNvPr id="11" name="">
-            <a:extLst xmlns:a="http://schemas.openxmlformats.org/drawingml/2006/main">
-              <a:ext uri="{FF2B5EF4-FFF2-40B4-BE49-F238E27FC236}">
-                <a16:creationId xmlns:a16="http://schemas.microsoft.com/office/drawing/2014/main" id="{7BCC2E8E-E533-4164-8A8C-685E43723728}"/>
+                <a16:creationId xmlns:a16="http://schemas.microsoft.com/office/drawing/2014/main" id="{B55050E0-A0BB-48CE-A71B-61D96B130254}"/>
               </a:ext>
             </a:extLst>
           </p:cNvPr>
@@ -4640,7 +4357,7 @@
             </a:r>
             <a:r>
               <a:rPr>
-                <a:hlinkClick xmlns:r="http://schemas.openxmlformats.org/officeDocument/2006/relationships" r:id="R7434f91a82f446bc"/>
+                <a:hlinkClick xmlns:r="http://schemas.openxmlformats.org/officeDocument/2006/relationships" r:id="R9885c08efe7841f3"/>
               </a:rPr>
               <a:t>Quelle öffnen (beck-online.beck.de)</a:t>
             </a:r>
@@ -4652,10 +4369,10 @@
       </p:sp>
       <p:sp>
         <p:nvSpPr>
-          <p:cNvPr id="12" name="">
-            <a:extLst xmlns:a="http://schemas.openxmlformats.org/drawingml/2006/main">
-              <a:ext uri="{FF2B5EF4-FFF2-40B4-BE49-F238E27FC236}">
-                <a16:creationId xmlns:a16="http://schemas.microsoft.com/office/drawing/2014/main" id="{AC27CFF0-7BFE-4BFD-A4EE-29EC00D3EC93}"/>
+          <p:cNvPr id="8" name="">
+            <a:extLst xmlns:a="http://schemas.openxmlformats.org/drawingml/2006/main">
+              <a:ext uri="{FF2B5EF4-FFF2-40B4-BE49-F238E27FC236}">
+                <a16:creationId xmlns:a16="http://schemas.microsoft.com/office/drawing/2014/main" id="{FD999F0B-28B3-415D-B256-13460FD4232A}"/>
               </a:ext>
             </a:extLst>
           </p:cNvPr>
@@ -4702,7 +4419,7 @@
                 <a:ea typeface="Arial"/>
                 <a:cs typeface="Arial"/>
               </a:rPr>
-              <a:t>Recht Medizinisch · Folie 8 · Seite 1/2</a:t>
+              <a:t>Recht Medizinisch · Folie 8 · Seite 2/2</a:t>
             </a:r>
           </a:p>
         </p:txBody>
@@ -4710,7 +4427,7 @@
     </p:spTree>
     <p:extLst>
       <p:ext uri="{BB962C8B-B14F-4D97-AF65-F5344CB8AC3E}">
-        <p14:creationId xmlns:p14="http://schemas.microsoft.com/office/powerpoint/2010/main" val="118244891"/>
+        <p14:creationId xmlns:p14="http://schemas.microsoft.com/office/powerpoint/2010/main" val="411662632"/>
       </p:ext>
     </p:extLst>
   </p:cSld>
@@ -4723,7 +4440,7 @@
     <p:bg>
       <p:bgPr>
         <a:solidFill xmlns:a="http://schemas.openxmlformats.org/drawingml/2006/main">
-          <a:srgbClr val="DFF1EB"/>
+          <a:srgbClr val="F8F5ED"/>
         </a:solidFill>
       </p:bgPr>
     </p:bg>
@@ -4738,10 +4455,10 @@
       </p:grpSpPr>
       <p:sp>
         <p:nvSpPr>
-          <p:cNvPr id="9" name="">
-            <a:extLst xmlns:a="http://schemas.openxmlformats.org/drawingml/2006/main">
-              <a:ext uri="{FF2B5EF4-FFF2-40B4-BE49-F238E27FC236}">
-                <a16:creationId xmlns:a16="http://schemas.microsoft.com/office/drawing/2014/main" id="{DAE72750-5711-4C85-825E-7904D55B5890}"/>
+          <p:cNvPr id="7" name="">
+            <a:extLst xmlns:a="http://schemas.openxmlformats.org/drawingml/2006/main">
+              <a:ext uri="{FF2B5EF4-FFF2-40B4-BE49-F238E27FC236}">
+                <a16:creationId xmlns:a16="http://schemas.microsoft.com/office/drawing/2014/main" id="{78EFDF36-68D2-455B-AC9B-44CFDD70AF63}"/>
               </a:ext>
             </a:extLst>
           </p:cNvPr>
@@ -4788,7 +4505,7 @@
                 <a:ea typeface="Arial"/>
                 <a:cs typeface="Arial"/>
               </a:rPr>
-              <a:t>AG HERSBRUCK · BESCHLUSS 1992</a:t>
+              <a:t>AG HERSBRUCK · ABWÄGUNG</a:t>
             </a:r>
           </a:p>
         </p:txBody>
@@ -4798,7 +4515,7 @@
           <p:cNvPr id="2" name="">
             <a:extLst xmlns:a="http://schemas.openxmlformats.org/drawingml/2006/main">
               <a:ext uri="{FF2B5EF4-FFF2-40B4-BE49-F238E27FC236}">
-                <a16:creationId xmlns:a16="http://schemas.microsoft.com/office/drawing/2014/main" id="{4AAB3858-8B3A-40E8-8006-CD6B93A140F5}"/>
+                <a16:creationId xmlns:a16="http://schemas.microsoft.com/office/drawing/2014/main" id="{5861B3F0-4216-4046-B0E5-383EA46A242E}"/>
               </a:ext>
             </a:extLst>
           </p:cNvPr>
@@ -4845,7 +4562,7 @@
                 <a:ea typeface="Georgia"/>
                 <a:cs typeface="Georgia"/>
               </a:rPr>
-              <a:t>Eine umstrittene Zwischenlösung</a:t>
+              <a:t>Welche Interessen gaben den Ausschlag?</a:t>
             </a:r>
           </a:p>
         </p:txBody>
@@ -4855,7 +4572,7 @@
           <p:cNvPr id="3" name="">
             <a:extLst xmlns:a="http://schemas.openxmlformats.org/drawingml/2006/main">
               <a:ext uri="{FF2B5EF4-FFF2-40B4-BE49-F238E27FC236}">
-                <a16:creationId xmlns:a16="http://schemas.microsoft.com/office/drawing/2014/main" id="{0D17E65B-29D3-4769-98AE-7F258CC7EA00}"/>
+                <a16:creationId xmlns:a16="http://schemas.microsoft.com/office/drawing/2014/main" id="{E03BB66E-0149-4109-A333-B91FF9DFA587}"/>
               </a:ext>
             </a:extLst>
           </p:cNvPr>
@@ -4902,7 +4619,7 @@
                 <a:ea typeface="Arial"/>
                 <a:cs typeface="Arial"/>
               </a:rPr>
-              <a:t>🩺 Praxis</a:t>
+              <a:t>☷ Kernpunkte</a:t>
             </a:r>
           </a:p>
         </p:txBody>
@@ -4912,7 +4629,7 @@
           <p:cNvPr id="4" name="">
             <a:extLst xmlns:a="http://schemas.openxmlformats.org/drawingml/2006/main">
               <a:ext uri="{FF2B5EF4-FFF2-40B4-BE49-F238E27FC236}">
-                <a16:creationId xmlns:a16="http://schemas.microsoft.com/office/drawing/2014/main" id="{15B04DDB-978A-4907-8CEA-7CFEA2589E77}"/>
+                <a16:creationId xmlns:a16="http://schemas.microsoft.com/office/drawing/2014/main" id="{8831B45C-B017-4244-AE15-5B1A1B3713B7}"/>
               </a:ext>
             </a:extLst>
           </p:cNvPr>
@@ -4924,7 +4641,7 @@
         <p:spPr>
           <a:xfrm xmlns:a="http://schemas.openxmlformats.org/drawingml/2006/main">
             <a:off x="533400" y="1914525"/>
-            <a:ext cx="11125200" cy="647700"/>
+            <a:ext cx="11125200" cy="3609975"/>
           </a:xfrm>
           <a:prstGeom xmlns:a="http://schemas.openxmlformats.org/drawingml/2006/main" prst="rect">
             <a:avLst/>
@@ -4951,7 +4668,27 @@
               </a:defRPr>
             </a:pPr>
             <a:r>
-              <a:t>Der Beschluss beantwortete vor allem die damalige Vertretungs- und Genehmigungsfrage. Er ist keine allgemeine höchstrichterliche Pflicht zur Fortführung intensivmedizinischer Maßnahmen.</a:t>
+              <a:t>• Das Gericht ging vom rechtlichen Tod der Schwangeren aus.</a:t>
+            </a:r>
+            <a:br/>
+            <a:r>
+              <a:t>• Zu berücksichtigen blieben Menschenwürde, postmortaler Persönlichkeitsschutz, frühere Willensäußerungen und die Totenfürsorge der Angehörigen.</a:t>
+            </a:r>
+            <a:br/>
+            <a:r>
+              <a:t>• Gegen die Fortführung sprach die Gefahr, den Körper nur noch funktional als Mittel für die Schwangerschaft zu behandeln.</a:t>
+            </a:r>
+            <a:br/>
+            <a:r>
+              <a:t>• Eine laufende Einwilligung der Patientin konnte nach der angenommenen Todesfeststellung nicht mehr konstruiert werden.</a:t>
+            </a:r>
+            <a:br/>
+            <a:r>
+              <a:t>• Das Gericht erkannte der ungeborenen Leibesfrucht ein eigenständiges, rechtlich schutzwürdiges Lebensinteresse zu.</a:t>
+            </a:r>
+            <a:br/>
+            <a:r>
+              <a:t>• Entscheidend war die konkrete medizinische Chance, die Schwangerschaft bis zu Geburt oder Lebensfähigkeit fortzuführen.</a:t>
             </a:r>
           </a:p>
         </p:txBody>
@@ -4961,113 +4698,7 @@
           <p:cNvPr id="5" name="">
             <a:extLst xmlns:a="http://schemas.openxmlformats.org/drawingml/2006/main">
               <a:ext uri="{FF2B5EF4-FFF2-40B4-BE49-F238E27FC236}">
-                <a16:creationId xmlns:a16="http://schemas.microsoft.com/office/drawing/2014/main" id="{8A06A910-5F59-439B-9CA6-1FC99D8BA8E4}"/>
-              </a:ext>
-            </a:extLst>
-          </p:cNvPr>
-          <p:cNvSpPr>
-            <a:spLocks xmlns:a="http://schemas.openxmlformats.org/drawingml/2006/main" noGrp="1"/>
-          </p:cNvSpPr>
-          <p:nvPr/>
-        </p:nvSpPr>
-        <p:spPr>
-          <a:xfrm xmlns:a="http://schemas.openxmlformats.org/drawingml/2006/main">
-            <a:off x="533400" y="2562225"/>
-            <a:ext cx="11125200" cy="457200"/>
-          </a:xfrm>
-          <a:prstGeom xmlns:a="http://schemas.openxmlformats.org/drawingml/2006/main" prst="rect">
-            <a:avLst/>
-          </a:prstGeom>
-          <a:noFill xmlns:a="http://schemas.openxmlformats.org/drawingml/2006/main"/>
-          <a:ln xmlns:a="http://schemas.openxmlformats.org/drawingml/2006/main" w="0">
-            <a:noFill/>
-          </a:ln>
-        </p:spPr>
-        <p:txBody>
-          <a:bodyPr xmlns:a="http://schemas.openxmlformats.org/drawingml/2006/main">
-            <a:noAutofit/>
-          </a:bodyPr>
-          <a:lstStyle xmlns:a="http://schemas.openxmlformats.org/drawingml/2006/main"/>
-          <a:p xmlns:a="http://schemas.openxmlformats.org/drawingml/2006/main">
-            <a:pPr>
-              <a:defRPr sz="1800" b="1">
-                <a:solidFill>
-                  <a:srgbClr val="087F86"/>
-                </a:solidFill>
-                <a:latin typeface="Arial"/>
-                <a:ea typeface="Arial"/>
-                <a:cs typeface="Arial"/>
-              </a:defRPr>
-            </a:pPr>
-            <a:r>
-              <a:rPr sz="1800" b="1">
-                <a:solidFill>
-                  <a:srgbClr val="087F86"/>
-                </a:solidFill>
-                <a:latin typeface="Arial"/>
-                <a:ea typeface="Arial"/>
-                <a:cs typeface="Arial"/>
-              </a:rPr>
-              <a:t>💡 Praxis-Merksatz</a:t>
-            </a:r>
-          </a:p>
-        </p:txBody>
-      </p:sp>
-      <p:sp>
-        <p:nvSpPr>
-          <p:cNvPr id="6" name="">
-            <a:extLst xmlns:a="http://schemas.openxmlformats.org/drawingml/2006/main">
-              <a:ext uri="{FF2B5EF4-FFF2-40B4-BE49-F238E27FC236}">
-                <a16:creationId xmlns:a16="http://schemas.microsoft.com/office/drawing/2014/main" id="{C89329A6-091B-4AD6-BA98-DE07D6A59ECD}"/>
-              </a:ext>
-            </a:extLst>
-          </p:cNvPr>
-          <p:cNvSpPr>
-            <a:spLocks xmlns:a="http://schemas.openxmlformats.org/drawingml/2006/main" noGrp="1"/>
-          </p:cNvSpPr>
-          <p:nvPr/>
-        </p:nvSpPr>
-        <p:spPr>
-          <a:xfrm xmlns:a="http://schemas.openxmlformats.org/drawingml/2006/main">
-            <a:off x="533400" y="3019425"/>
-            <a:ext cx="11125200" cy="647700"/>
-          </a:xfrm>
-          <a:prstGeom xmlns:a="http://schemas.openxmlformats.org/drawingml/2006/main" prst="rect">
-            <a:avLst/>
-          </a:prstGeom>
-          <a:noFill xmlns:a="http://schemas.openxmlformats.org/drawingml/2006/main"/>
-          <a:ln xmlns:a="http://schemas.openxmlformats.org/drawingml/2006/main" w="0">
-            <a:noFill/>
-          </a:ln>
-        </p:spPr>
-        <p:txBody>
-          <a:bodyPr xmlns:a="http://schemas.openxmlformats.org/drawingml/2006/main">
-            <a:noAutofit/>
-          </a:bodyPr>
-          <a:lstStyle xmlns:a="http://schemas.openxmlformats.org/drawingml/2006/main"/>
-          <a:p xmlns:a="http://schemas.openxmlformats.org/drawingml/2006/main">
-            <a:pPr>
-              <a:defRPr sz="1725" b="0">
-                <a:solidFill>
-                  <a:srgbClr val="071D33"/>
-                </a:solidFill>
-                <a:latin typeface="Arial"/>
-                <a:ea typeface="Arial"/>
-                <a:cs typeface="Arial"/>
-              </a:defRPr>
-            </a:pPr>
-            <a:r>
-              <a:t>Die juristisch korrekte Bezeichnung lautet Beschluss; Reichweite und Begründung der Entscheidung sind bis heute umstritten.</a:t>
-            </a:r>
-          </a:p>
-        </p:txBody>
-      </p:sp>
-      <p:sp>
-        <p:nvSpPr>
-          <p:cNvPr id="7" name="">
-            <a:extLst xmlns:a="http://schemas.openxmlformats.org/drawingml/2006/main">
-              <a:ext uri="{FF2B5EF4-FFF2-40B4-BE49-F238E27FC236}">
-                <a16:creationId xmlns:a16="http://schemas.microsoft.com/office/drawing/2014/main" id="{E00AD1BF-19B5-43D5-A284-D9D10B6E3D98}"/>
+                <a16:creationId xmlns:a16="http://schemas.microsoft.com/office/drawing/2014/main" id="{9CD20472-F1E7-45C7-9585-63DD27FD55C1}"/>
               </a:ext>
             </a:extLst>
           </p:cNvPr>
@@ -5106,15 +4737,24 @@
               </a:defRPr>
             </a:pPr>
             <a:r>
-              <a:t>Quelle: AG Hersbruck, Beschl. v. 16.10.1992 – XVII 1556/92, NJW 1992, 3245; veröffentlichter Beschlusstext geprüft am 09.09.2026 · </a:t>
+              <a:t>Quelle: AG Hersbruck, Beschl. v. 16.10.1992 – XVII 1556/92 · </a:t>
             </a:r>
             <a:r>
               <a:rPr>
-                <a:hlinkClick xmlns:r="http://schemas.openxmlformats.org/officeDocument/2006/relationships" r:id="Rf37ce9e060c14160"/>
+                <a:hlinkClick xmlns:r="http://schemas.openxmlformats.org/officeDocument/2006/relationships" r:id="R272f4e6d92e140fc"/>
               </a:rPr>
               <a:t>Quelle öffnen (beck-online.beck.de)</a:t>
             </a:r>
             <a:r>
+              <a:t> · Kritische Einordnung: Neue Kriminalpolitik 1993, 9–11 · </a:t>
+            </a:r>
+            <a:r>
+              <a:rPr>
+                <a:hlinkClick xmlns:r="http://schemas.openxmlformats.org/officeDocument/2006/relationships" r:id="R0fb9c13696454f33"/>
+              </a:rPr>
+              <a:t>Quelle öffnen (doi.org)</a:t>
+            </a:r>
+            <a:r>
               <a:t/>
             </a:r>
           </a:p>
@@ -5122,10 +4762,10 @@
       </p:sp>
       <p:sp>
         <p:nvSpPr>
-          <p:cNvPr id="8" name="">
-            <a:extLst xmlns:a="http://schemas.openxmlformats.org/drawingml/2006/main">
-              <a:ext uri="{FF2B5EF4-FFF2-40B4-BE49-F238E27FC236}">
-                <a16:creationId xmlns:a16="http://schemas.microsoft.com/office/drawing/2014/main" id="{03F19D8A-F60D-47FE-B622-2A1826F36474}"/>
+          <p:cNvPr id="6" name="">
+            <a:extLst xmlns:a="http://schemas.openxmlformats.org/drawingml/2006/main">
+              <a:ext uri="{FF2B5EF4-FFF2-40B4-BE49-F238E27FC236}">
+                <a16:creationId xmlns:a16="http://schemas.microsoft.com/office/drawing/2014/main" id="{4327307C-FF97-4DCB-975D-B30543C3FB3D}"/>
               </a:ext>
             </a:extLst>
           </p:cNvPr>
@@ -5172,7 +4812,7 @@
                 <a:ea typeface="Arial"/>
                 <a:cs typeface="Arial"/>
               </a:rPr>
-              <a:t>Recht Medizinisch · Folie 8 · Seite 2/2</a:t>
+              <a:t>Recht Medizinisch · Folie 9 · Seite 1/2</a:t>
             </a:r>
           </a:p>
         </p:txBody>
@@ -5180,7 +4820,7 @@
     </p:spTree>
     <p:extLst>
       <p:ext uri="{BB962C8B-B14F-4D97-AF65-F5344CB8AC3E}">
-        <p14:creationId xmlns:p14="http://schemas.microsoft.com/office/powerpoint/2010/main" val="2146442295"/>
+        <p14:creationId xmlns:p14="http://schemas.microsoft.com/office/powerpoint/2010/main" val="1875707006"/>
       </p:ext>
     </p:extLst>
   </p:cSld>
@@ -5208,10 +4848,10 @@
       </p:grpSpPr>
       <p:sp>
         <p:nvSpPr>
-          <p:cNvPr id="7" name="">
-            <a:extLst xmlns:a="http://schemas.openxmlformats.org/drawingml/2006/main">
-              <a:ext uri="{FF2B5EF4-FFF2-40B4-BE49-F238E27FC236}">
-                <a16:creationId xmlns:a16="http://schemas.microsoft.com/office/drawing/2014/main" id="{4B9CDB1E-4E52-47F5-B2D0-B131B274F317}"/>
+          <p:cNvPr id="9" name="">
+            <a:extLst xmlns:a="http://schemas.openxmlformats.org/drawingml/2006/main">
+              <a:ext uri="{FF2B5EF4-FFF2-40B4-BE49-F238E27FC236}">
+                <a16:creationId xmlns:a16="http://schemas.microsoft.com/office/drawing/2014/main" id="{571024CC-BBF0-4DF5-AD18-36BDE9E531CE}"/>
               </a:ext>
             </a:extLst>
           </p:cNvPr>
@@ -5268,7 +4908,7 @@
           <p:cNvPr id="2" name="">
             <a:extLst xmlns:a="http://schemas.openxmlformats.org/drawingml/2006/main">
               <a:ext uri="{FF2B5EF4-FFF2-40B4-BE49-F238E27FC236}">
-                <a16:creationId xmlns:a16="http://schemas.microsoft.com/office/drawing/2014/main" id="{5C860C03-41C5-43F7-87A0-A08490629F61}"/>
+                <a16:creationId xmlns:a16="http://schemas.microsoft.com/office/drawing/2014/main" id="{EB71FD68-8551-46CE-809C-EA7B8C22B295}"/>
               </a:ext>
             </a:extLst>
           </p:cNvPr>
@@ -5325,7 +4965,7 @@
           <p:cNvPr id="3" name="">
             <a:extLst xmlns:a="http://schemas.openxmlformats.org/drawingml/2006/main">
               <a:ext uri="{FF2B5EF4-FFF2-40B4-BE49-F238E27FC236}">
-                <a16:creationId xmlns:a16="http://schemas.microsoft.com/office/drawing/2014/main" id="{68C5D2DC-C543-4DE7-8252-5CEB70896515}"/>
+                <a16:creationId xmlns:a16="http://schemas.microsoft.com/office/drawing/2014/main" id="{A670BC32-6A52-4F1A-A3DD-CEAD4453DFDE}"/>
               </a:ext>
             </a:extLst>
           </p:cNvPr>
@@ -5382,7 +5022,7 @@
           <p:cNvPr id="4" name="">
             <a:extLst xmlns:a="http://schemas.openxmlformats.org/drawingml/2006/main">
               <a:ext uri="{FF2B5EF4-FFF2-40B4-BE49-F238E27FC236}">
-                <a16:creationId xmlns:a16="http://schemas.microsoft.com/office/drawing/2014/main" id="{04E97334-38E7-43AE-B488-41CA6B1797E9}"/>
+                <a16:creationId xmlns:a16="http://schemas.microsoft.com/office/drawing/2014/main" id="{713E919D-AC56-40F8-B528-45D610024043}"/>
               </a:ext>
             </a:extLst>
           </p:cNvPr>
@@ -5394,7 +5034,7 @@
         <p:spPr>
           <a:xfrm xmlns:a="http://schemas.openxmlformats.org/drawingml/2006/main">
             <a:off x="533400" y="1914525"/>
-            <a:ext cx="11125200" cy="3609975"/>
+            <a:ext cx="11125200" cy="1295400"/>
           </a:xfrm>
           <a:prstGeom xmlns:a="http://schemas.openxmlformats.org/drawingml/2006/main" prst="rect">
             <a:avLst/>
@@ -5421,27 +5061,11 @@
               </a:defRPr>
             </a:pPr>
             <a:r>
-              <a:t>• Das Gericht ging vom rechtlichen Tod der Schwangeren aus.</a:t>
+              <a:t>• Solange eine reale Chance bestand, gewichtete das Gericht dieses Lebensinteresse höher als die entgegenstehenden postmortalen Belange.</a:t>
             </a:r>
             <a:br/>
             <a:r>
-              <a:t>• Zu berücksichtigen blieben Menschenwürde, postmortaler Persönlichkeitsschutz, frühere Willensäußerungen und die Totenfürsorge der Angehörigen.</a:t>
-            </a:r>
-            <a:br/>
-            <a:r>
-              <a:t>• Gegen die Fortführung sprach die Gefahr, den Körper nur noch funktional als Mittel für die Schwangerschaft zu behandeln.</a:t>
-            </a:r>
-            <a:br/>
-            <a:r>
-              <a:t>• Eine laufende Einwilligung der Patientin konnte nach der angenommenen Todesfeststellung nicht mehr konstruiert werden.</a:t>
-            </a:r>
-            <a:br/>
-            <a:r>
-              <a:t>• Das Gericht erkannte der ungeborenen Leibesfrucht ein eigenständiges, rechtlich schutzwürdiges Lebensinteresse zu.</a:t>
-            </a:r>
-            <a:br/>
-            <a:r>
-              <a:t>• Entscheidend war die konkrete medizinische Chance, die Schwangerschaft bis zu Geburt oder Lebensfähigkeit fortzuführen.</a:t>
+              <a:t>• Deshalb sollte ein vorzeitiges Abschalten nicht allein dem Betreuer überlassen, sondern gerichtlich genehmigt werden.</a:t>
             </a:r>
           </a:p>
         </p:txBody>
@@ -5451,7 +5075,113 @@
           <p:cNvPr id="5" name="">
             <a:extLst xmlns:a="http://schemas.openxmlformats.org/drawingml/2006/main">
               <a:ext uri="{FF2B5EF4-FFF2-40B4-BE49-F238E27FC236}">
-                <a16:creationId xmlns:a16="http://schemas.microsoft.com/office/drawing/2014/main" id="{5A691CFA-5AA1-4C3D-966D-BA6962FC5A1A}"/>
+                <a16:creationId xmlns:a16="http://schemas.microsoft.com/office/drawing/2014/main" id="{957AD85E-EBD3-433D-9D46-DE17BEACEB26}"/>
+              </a:ext>
+            </a:extLst>
+          </p:cNvPr>
+          <p:cNvSpPr>
+            <a:spLocks xmlns:a="http://schemas.openxmlformats.org/drawingml/2006/main" noGrp="1"/>
+          </p:cNvSpPr>
+          <p:nvPr/>
+        </p:nvSpPr>
+        <p:spPr>
+          <a:xfrm xmlns:a="http://schemas.openxmlformats.org/drawingml/2006/main">
+            <a:off x="533400" y="3209925"/>
+            <a:ext cx="11125200" cy="457200"/>
+          </a:xfrm>
+          <a:prstGeom xmlns:a="http://schemas.openxmlformats.org/drawingml/2006/main" prst="rect">
+            <a:avLst/>
+          </a:prstGeom>
+          <a:noFill xmlns:a="http://schemas.openxmlformats.org/drawingml/2006/main"/>
+          <a:ln xmlns:a="http://schemas.openxmlformats.org/drawingml/2006/main" w="0">
+            <a:noFill/>
+          </a:ln>
+        </p:spPr>
+        <p:txBody>
+          <a:bodyPr xmlns:a="http://schemas.openxmlformats.org/drawingml/2006/main">
+            <a:noAutofit/>
+          </a:bodyPr>
+          <a:lstStyle xmlns:a="http://schemas.openxmlformats.org/drawingml/2006/main"/>
+          <a:p xmlns:a="http://schemas.openxmlformats.org/drawingml/2006/main">
+            <a:pPr>
+              <a:defRPr sz="1800" b="1">
+                <a:solidFill>
+                  <a:srgbClr val="087F86"/>
+                </a:solidFill>
+                <a:latin typeface="Arial"/>
+                <a:ea typeface="Arial"/>
+                <a:cs typeface="Arial"/>
+              </a:defRPr>
+            </a:pPr>
+            <a:r>
+              <a:rPr sz="1800" b="1">
+                <a:solidFill>
+                  <a:srgbClr val="087F86"/>
+                </a:solidFill>
+                <a:latin typeface="Arial"/>
+                <a:ea typeface="Arial"/>
+                <a:cs typeface="Arial"/>
+              </a:rPr>
+              <a:t>💡 Praxis-Merksatz</a:t>
+            </a:r>
+          </a:p>
+        </p:txBody>
+      </p:sp>
+      <p:sp>
+        <p:nvSpPr>
+          <p:cNvPr id="6" name="">
+            <a:extLst xmlns:a="http://schemas.openxmlformats.org/drawingml/2006/main">
+              <a:ext uri="{FF2B5EF4-FFF2-40B4-BE49-F238E27FC236}">
+                <a16:creationId xmlns:a16="http://schemas.microsoft.com/office/drawing/2014/main" id="{F71516C8-FE32-4A50-838F-EBB5EF43B67C}"/>
+              </a:ext>
+            </a:extLst>
+          </p:cNvPr>
+          <p:cNvSpPr>
+            <a:spLocks xmlns:a="http://schemas.openxmlformats.org/drawingml/2006/main" noGrp="1"/>
+          </p:cNvSpPr>
+          <p:nvPr/>
+        </p:nvSpPr>
+        <p:spPr>
+          <a:xfrm xmlns:a="http://schemas.openxmlformats.org/drawingml/2006/main">
+            <a:off x="533400" y="3667125"/>
+            <a:ext cx="11125200" cy="914400"/>
+          </a:xfrm>
+          <a:prstGeom xmlns:a="http://schemas.openxmlformats.org/drawingml/2006/main" prst="rect">
+            <a:avLst/>
+          </a:prstGeom>
+          <a:noFill xmlns:a="http://schemas.openxmlformats.org/drawingml/2006/main"/>
+          <a:ln xmlns:a="http://schemas.openxmlformats.org/drawingml/2006/main" w="0">
+            <a:noFill/>
+          </a:ln>
+        </p:spPr>
+        <p:txBody>
+          <a:bodyPr xmlns:a="http://schemas.openxmlformats.org/drawingml/2006/main">
+            <a:noAutofit/>
+          </a:bodyPr>
+          <a:lstStyle xmlns:a="http://schemas.openxmlformats.org/drawingml/2006/main"/>
+          <a:p xmlns:a="http://schemas.openxmlformats.org/drawingml/2006/main">
+            <a:pPr>
+              <a:defRPr sz="1725" b="0">
+                <a:solidFill>
+                  <a:srgbClr val="071D33"/>
+                </a:solidFill>
+                <a:latin typeface="Arial"/>
+                <a:ea typeface="Arial"/>
+                <a:cs typeface="Arial"/>
+              </a:defRPr>
+            </a:pPr>
+            <a:r>
+              <a:t>Die Priorisierung war prognoseabhängig, nicht absolut: Nach Geburt oder Tod der Leibesfrucht sollte die Genehmigungspflicht entfallen. Umstritten bleiben gesetzliche Grundlage und mögliche Instrumentalisierung des weiblichen Körpers.</a:t>
+            </a:r>
+          </a:p>
+        </p:txBody>
+      </p:sp>
+      <p:sp>
+        <p:nvSpPr>
+          <p:cNvPr id="7" name="">
+            <a:extLst xmlns:a="http://schemas.openxmlformats.org/drawingml/2006/main">
+              <a:ext uri="{FF2B5EF4-FFF2-40B4-BE49-F238E27FC236}">
+                <a16:creationId xmlns:a16="http://schemas.microsoft.com/office/drawing/2014/main" id="{DE6D75B5-4474-440E-A957-2A664CF91470}"/>
               </a:ext>
             </a:extLst>
           </p:cNvPr>
@@ -5494,7 +5224,7 @@
             </a:r>
             <a:r>
               <a:rPr>
-                <a:hlinkClick xmlns:r="http://schemas.openxmlformats.org/officeDocument/2006/relationships" r:id="Rd8cb8b696195401f"/>
+                <a:hlinkClick xmlns:r="http://schemas.openxmlformats.org/officeDocument/2006/relationships" r:id="R533f96c3ffe74a39"/>
               </a:rPr>
               <a:t>Quelle öffnen (beck-online.beck.de)</a:t>
             </a:r>
@@ -5503,7 +5233,7 @@
             </a:r>
             <a:r>
               <a:rPr>
-                <a:hlinkClick xmlns:r="http://schemas.openxmlformats.org/officeDocument/2006/relationships" r:id="Rf565c9efc718409b"/>
+                <a:hlinkClick xmlns:r="http://schemas.openxmlformats.org/officeDocument/2006/relationships" r:id="Rae30648863b5477a"/>
               </a:rPr>
               <a:t>Quelle öffnen (doi.org)</a:t>
             </a:r>
@@ -5515,10 +5245,10 @@
       </p:sp>
       <p:sp>
         <p:nvSpPr>
-          <p:cNvPr id="6" name="">
-            <a:extLst xmlns:a="http://schemas.openxmlformats.org/drawingml/2006/main">
-              <a:ext uri="{FF2B5EF4-FFF2-40B4-BE49-F238E27FC236}">
-                <a16:creationId xmlns:a16="http://schemas.microsoft.com/office/drawing/2014/main" id="{036034A6-0117-4F3F-B60A-4E68BFCD7AA7}"/>
+          <p:cNvPr id="8" name="">
+            <a:extLst xmlns:a="http://schemas.openxmlformats.org/drawingml/2006/main">
+              <a:ext uri="{FF2B5EF4-FFF2-40B4-BE49-F238E27FC236}">
+                <a16:creationId xmlns:a16="http://schemas.microsoft.com/office/drawing/2014/main" id="{47A59151-1B76-4AFC-8327-A2E72AEEA659}"/>
               </a:ext>
             </a:extLst>
           </p:cNvPr>
@@ -5565,7 +5295,7 @@
                 <a:ea typeface="Arial"/>
                 <a:cs typeface="Arial"/>
               </a:rPr>
-              <a:t>Recht Medizinisch · Folie 9 · Seite 1/2</a:t>
+              <a:t>Recht Medizinisch · Folie 9 · Seite 2/2</a:t>
             </a:r>
           </a:p>
         </p:txBody>
@@ -5573,7 +5303,7 @@
     </p:spTree>
     <p:extLst>
       <p:ext uri="{BB962C8B-B14F-4D97-AF65-F5344CB8AC3E}">
-        <p14:creationId xmlns:p14="http://schemas.microsoft.com/office/powerpoint/2010/main" val="729407142"/>
+        <p14:creationId xmlns:p14="http://schemas.microsoft.com/office/powerpoint/2010/main" val="104275682"/>
       </p:ext>
     </p:extLst>
   </p:cSld>
@@ -5601,10 +5331,10 @@
       </p:grpSpPr>
       <p:sp>
         <p:nvSpPr>
-          <p:cNvPr id="9" name="">
-            <a:extLst xmlns:a="http://schemas.openxmlformats.org/drawingml/2006/main">
-              <a:ext uri="{FF2B5EF4-FFF2-40B4-BE49-F238E27FC236}">
-                <a16:creationId xmlns:a16="http://schemas.microsoft.com/office/drawing/2014/main" id="{9579F85E-6E3E-4C37-B86A-D212652ADEE0}"/>
+          <p:cNvPr id="7" name="">
+            <a:extLst xmlns:a="http://schemas.openxmlformats.org/drawingml/2006/main">
+              <a:ext uri="{FF2B5EF4-FFF2-40B4-BE49-F238E27FC236}">
+                <a16:creationId xmlns:a16="http://schemas.microsoft.com/office/drawing/2014/main" id="{256855A4-9324-4F43-888D-B84F3397FC71}"/>
               </a:ext>
             </a:extLst>
           </p:cNvPr>
@@ -5651,7 +5381,7 @@
                 <a:ea typeface="Arial"/>
                 <a:cs typeface="Arial"/>
               </a:rPr>
-              <a:t>AG HERSBRUCK · ABWÄGUNG</a:t>
+              <a:t>RECHTSSTAND 2026</a:t>
             </a:r>
           </a:p>
         </p:txBody>
@@ -5661,7 +5391,7 @@
           <p:cNvPr id="2" name="">
             <a:extLst xmlns:a="http://schemas.openxmlformats.org/drawingml/2006/main">
               <a:ext uri="{FF2B5EF4-FFF2-40B4-BE49-F238E27FC236}">
-                <a16:creationId xmlns:a16="http://schemas.microsoft.com/office/drawing/2014/main" id="{5939258B-EF97-498D-972F-050AC0FEA9CA}"/>
+                <a16:creationId xmlns:a16="http://schemas.microsoft.com/office/drawing/2014/main" id="{FCBEE1F5-2A7E-4D70-81E9-F751806A38BB}"/>
               </a:ext>
             </a:extLst>
           </p:cNvPr>
@@ -5708,7 +5438,7 @@
                 <a:ea typeface="Georgia"/>
                 <a:cs typeface="Georgia"/>
               </a:rPr>
-              <a:t>Welche Interessen gaben den Ausschlag?</a:t>
+              <a:t>Was gilt heute?</a:t>
             </a:r>
           </a:p>
         </p:txBody>
@@ -5718,7 +5448,7 @@
           <p:cNvPr id="3" name="">
             <a:extLst xmlns:a="http://schemas.openxmlformats.org/drawingml/2006/main">
               <a:ext uri="{FF2B5EF4-FFF2-40B4-BE49-F238E27FC236}">
-                <a16:creationId xmlns:a16="http://schemas.microsoft.com/office/drawing/2014/main" id="{DE9AB957-4115-4EAE-B8BE-D1E4C2D273D0}"/>
+                <a16:creationId xmlns:a16="http://schemas.microsoft.com/office/drawing/2014/main" id="{B09ACB77-9D2D-4298-9FB9-DF44E886A646}"/>
               </a:ext>
             </a:extLst>
           </p:cNvPr>
@@ -5765,7 +5495,7 @@
                 <a:ea typeface="Arial"/>
                 <a:cs typeface="Arial"/>
               </a:rPr>
-              <a:t>☷ Kernpunkte</a:t>
+              <a:t>Historische Entscheidung</a:t>
             </a:r>
           </a:p>
         </p:txBody>
@@ -5775,7 +5505,7 @@
           <p:cNvPr id="4" name="">
             <a:extLst xmlns:a="http://schemas.openxmlformats.org/drawingml/2006/main">
               <a:ext uri="{FF2B5EF4-FFF2-40B4-BE49-F238E27FC236}">
-                <a16:creationId xmlns:a16="http://schemas.microsoft.com/office/drawing/2014/main" id="{8126E591-C09A-4A89-885F-C17D0939C815}"/>
+                <a16:creationId xmlns:a16="http://schemas.microsoft.com/office/drawing/2014/main" id="{D3D4EE37-2F7A-43F3-AB52-36D131731A67}"/>
               </a:ext>
             </a:extLst>
           </p:cNvPr>
@@ -5787,7 +5517,7 @@
         <p:spPr>
           <a:xfrm xmlns:a="http://schemas.openxmlformats.org/drawingml/2006/main">
             <a:off x="533400" y="1914525"/>
-            <a:ext cx="11125200" cy="1295400"/>
+            <a:ext cx="11125200" cy="1114425"/>
           </a:xfrm>
           <a:prstGeom xmlns:a="http://schemas.openxmlformats.org/drawingml/2006/main" prst="rect">
             <a:avLst/>
@@ -5814,11 +5544,15 @@
               </a:defRPr>
             </a:pPr>
             <a:r>
-              <a:t>• Solange eine reale Chance bestand, gewichtete das Gericht dieses Lebensinteresse höher als die entgegenstehenden postmortalen Belange.</a:t>
+              <a:t>• vorläufige Betreuung trotz angenommener rechtlicher Todesfeststellung</a:t>
             </a:r>
             <a:br/>
             <a:r>
-              <a:t>• Deshalb sollte ein vorzeitiges Abschalten nicht allein dem Betreuer überlassen, sondern gerichtlich genehmigt werden.</a:t>
+              <a:t>• gerichtlicher Genehmigungsvorbehalt für ein Abschalten vor Entbindung oder Tod der Leibesfrucht</a:t>
+            </a:r>
+            <a:br/>
+            <a:r>
+              <a:t>• keine höchstrichterliche abschließende Güterabwägung</a:t>
             </a:r>
           </a:p>
         </p:txBody>
@@ -5828,54 +5562,64 @@
           <p:cNvPr id="5" name="">
             <a:extLst xmlns:a="http://schemas.openxmlformats.org/drawingml/2006/main">
               <a:ext uri="{FF2B5EF4-FFF2-40B4-BE49-F238E27FC236}">
-                <a16:creationId xmlns:a16="http://schemas.microsoft.com/office/drawing/2014/main" id="{2AEF54D4-0E0B-48FE-83EE-7EB31660957A}"/>
-              </a:ext>
-            </a:extLst>
-          </p:cNvPr>
-          <p:cNvSpPr>
-            <a:spLocks xmlns:a="http://schemas.openxmlformats.org/drawingml/2006/main" noGrp="1"/>
-          </p:cNvSpPr>
-          <p:nvPr/>
-        </p:nvSpPr>
-        <p:spPr>
-          <a:xfrm xmlns:a="http://schemas.openxmlformats.org/drawingml/2006/main">
-            <a:off x="533400" y="3209925"/>
-            <a:ext cx="11125200" cy="457200"/>
-          </a:xfrm>
-          <a:prstGeom xmlns:a="http://schemas.openxmlformats.org/drawingml/2006/main" prst="rect">
-            <a:avLst/>
-          </a:prstGeom>
-          <a:noFill xmlns:a="http://schemas.openxmlformats.org/drawingml/2006/main"/>
-          <a:ln xmlns:a="http://schemas.openxmlformats.org/drawingml/2006/main" w="0">
-            <a:noFill/>
-          </a:ln>
-        </p:spPr>
-        <p:txBody>
-          <a:bodyPr xmlns:a="http://schemas.openxmlformats.org/drawingml/2006/main">
-            <a:noAutofit/>
-          </a:bodyPr>
-          <a:lstStyle xmlns:a="http://schemas.openxmlformats.org/drawingml/2006/main"/>
-          <a:p xmlns:a="http://schemas.openxmlformats.org/drawingml/2006/main">
-            <a:pPr>
-              <a:defRPr sz="1800" b="1">
-                <a:solidFill>
-                  <a:srgbClr val="087F86"/>
-                </a:solidFill>
-                <a:latin typeface="Arial"/>
-                <a:ea typeface="Arial"/>
-                <a:cs typeface="Arial"/>
-              </a:defRPr>
-            </a:pPr>
-            <a:r>
-              <a:rPr sz="1800" b="1">
-                <a:solidFill>
-                  <a:srgbClr val="087F86"/>
-                </a:solidFill>
-                <a:latin typeface="Arial"/>
-                <a:ea typeface="Arial"/>
-                <a:cs typeface="Arial"/>
+                <a16:creationId xmlns:a16="http://schemas.microsoft.com/office/drawing/2014/main" id="{7A56846C-8C59-4D0F-B360-790A09A742E8}"/>
+              </a:ext>
+            </a:extLst>
+          </p:cNvPr>
+          <p:cNvSpPr>
+            <a:spLocks xmlns:a="http://schemas.openxmlformats.org/drawingml/2006/main" noGrp="1"/>
+          </p:cNvSpPr>
+          <p:nvPr/>
+        </p:nvSpPr>
+        <p:spPr>
+          <a:xfrm xmlns:a="http://schemas.openxmlformats.org/drawingml/2006/main">
+            <a:off x="533400" y="5810250"/>
+            <a:ext cx="11125200" cy="381000"/>
+          </a:xfrm>
+          <a:prstGeom xmlns:a="http://schemas.openxmlformats.org/drawingml/2006/main" prst="rect">
+            <a:avLst/>
+          </a:prstGeom>
+          <a:noFill xmlns:a="http://schemas.openxmlformats.org/drawingml/2006/main"/>
+          <a:ln xmlns:a="http://schemas.openxmlformats.org/drawingml/2006/main" w="0">
+            <a:noFill/>
+          </a:ln>
+        </p:spPr>
+        <p:txBody>
+          <a:bodyPr xmlns:a="http://schemas.openxmlformats.org/drawingml/2006/main">
+            <a:noAutofit/>
+          </a:bodyPr>
+          <a:lstStyle xmlns:a="http://schemas.openxmlformats.org/drawingml/2006/main"/>
+          <a:p xmlns:a="http://schemas.openxmlformats.org/drawingml/2006/main">
+            <a:pPr>
+              <a:defRPr sz="900" b="0">
+                <a:solidFill>
+                  <a:srgbClr val="526D75"/>
+                </a:solidFill>
+                <a:latin typeface="Arial"/>
+                <a:ea typeface="Arial"/>
+                <a:cs typeface="Arial"/>
+              </a:defRPr>
+            </a:pPr>
+            <a:r>
+              <a:t>Heutiger Rechtsrahmen: § 1870 BGB und § 1874 Abs. 2 BGB. Amtliche Gesetzestexte: </a:t>
+            </a:r>
+            <a:r>
+              <a:rPr>
+                <a:hlinkClick xmlns:r="http://schemas.openxmlformats.org/officeDocument/2006/relationships" r:id="Rd44b11e801e74acc"/>
               </a:rPr>
-              <a:t>💡 Praxis-Merksatz</a:t>
+              <a:t>§ 1870 BGB öffnen</a:t>
+            </a:r>
+            <a:r>
+              <a:t> und </a:t>
+            </a:r>
+            <a:r>
+              <a:rPr>
+                <a:hlinkClick xmlns:r="http://schemas.openxmlformats.org/officeDocument/2006/relationships" r:id="R13f83dbc6dce452c"/>
+              </a:rPr>
+              <a:t>§ 1874 BGB öffnen</a:t>
+            </a:r>
+            <a:r>
+              <a:t> · geprüft am 08.09.2026. Diese Normen belegen die heutige Rechtslage; sie sind kein Beleg für die historische Entscheidung.</a:t>
             </a:r>
           </a:p>
         </p:txBody>
@@ -5885,123 +5629,7 @@
           <p:cNvPr id="6" name="">
             <a:extLst xmlns:a="http://schemas.openxmlformats.org/drawingml/2006/main">
               <a:ext uri="{FF2B5EF4-FFF2-40B4-BE49-F238E27FC236}">
-                <a16:creationId xmlns:a16="http://schemas.microsoft.com/office/drawing/2014/main" id="{575AC59C-FC00-4174-BAC5-CC25C42C9C4E}"/>
-              </a:ext>
-            </a:extLst>
-          </p:cNvPr>
-          <p:cNvSpPr>
-            <a:spLocks xmlns:a="http://schemas.openxmlformats.org/drawingml/2006/main" noGrp="1"/>
-          </p:cNvSpPr>
-          <p:nvPr/>
-        </p:nvSpPr>
-        <p:spPr>
-          <a:xfrm xmlns:a="http://schemas.openxmlformats.org/drawingml/2006/main">
-            <a:off x="533400" y="3667125"/>
-            <a:ext cx="11125200" cy="914400"/>
-          </a:xfrm>
-          <a:prstGeom xmlns:a="http://schemas.openxmlformats.org/drawingml/2006/main" prst="rect">
-            <a:avLst/>
-          </a:prstGeom>
-          <a:noFill xmlns:a="http://schemas.openxmlformats.org/drawingml/2006/main"/>
-          <a:ln xmlns:a="http://schemas.openxmlformats.org/drawingml/2006/main" w="0">
-            <a:noFill/>
-          </a:ln>
-        </p:spPr>
-        <p:txBody>
-          <a:bodyPr xmlns:a="http://schemas.openxmlformats.org/drawingml/2006/main">
-            <a:noAutofit/>
-          </a:bodyPr>
-          <a:lstStyle xmlns:a="http://schemas.openxmlformats.org/drawingml/2006/main"/>
-          <a:p xmlns:a="http://schemas.openxmlformats.org/drawingml/2006/main">
-            <a:pPr>
-              <a:defRPr sz="1725" b="0">
-                <a:solidFill>
-                  <a:srgbClr val="071D33"/>
-                </a:solidFill>
-                <a:latin typeface="Arial"/>
-                <a:ea typeface="Arial"/>
-                <a:cs typeface="Arial"/>
-              </a:defRPr>
-            </a:pPr>
-            <a:r>
-              <a:t>Die Priorisierung war prognoseabhängig, nicht absolut: Nach Geburt oder Tod der Leibesfrucht sollte die Genehmigungspflicht entfallen. Umstritten bleiben gesetzliche Grundlage und mögliche Instrumentalisierung des weiblichen Körpers.</a:t>
-            </a:r>
-          </a:p>
-        </p:txBody>
-      </p:sp>
-      <p:sp>
-        <p:nvSpPr>
-          <p:cNvPr id="7" name="">
-            <a:extLst xmlns:a="http://schemas.openxmlformats.org/drawingml/2006/main">
-              <a:ext uri="{FF2B5EF4-FFF2-40B4-BE49-F238E27FC236}">
-                <a16:creationId xmlns:a16="http://schemas.microsoft.com/office/drawing/2014/main" id="{FBFB351A-6152-4E1E-80AD-408994278100}"/>
-              </a:ext>
-            </a:extLst>
-          </p:cNvPr>
-          <p:cNvSpPr>
-            <a:spLocks xmlns:a="http://schemas.openxmlformats.org/drawingml/2006/main" noGrp="1"/>
-          </p:cNvSpPr>
-          <p:nvPr/>
-        </p:nvSpPr>
-        <p:spPr>
-          <a:xfrm xmlns:a="http://schemas.openxmlformats.org/drawingml/2006/main">
-            <a:off x="533400" y="5953125"/>
-            <a:ext cx="11125200" cy="238125"/>
-          </a:xfrm>
-          <a:prstGeom xmlns:a="http://schemas.openxmlformats.org/drawingml/2006/main" prst="rect">
-            <a:avLst/>
-          </a:prstGeom>
-          <a:noFill xmlns:a="http://schemas.openxmlformats.org/drawingml/2006/main"/>
-          <a:ln xmlns:a="http://schemas.openxmlformats.org/drawingml/2006/main" w="0">
-            <a:noFill/>
-          </a:ln>
-        </p:spPr>
-        <p:txBody>
-          <a:bodyPr xmlns:a="http://schemas.openxmlformats.org/drawingml/2006/main">
-            <a:noAutofit/>
-          </a:bodyPr>
-          <a:lstStyle xmlns:a="http://schemas.openxmlformats.org/drawingml/2006/main"/>
-          <a:p xmlns:a="http://schemas.openxmlformats.org/drawingml/2006/main">
-            <a:pPr>
-              <a:defRPr sz="900" b="0">
-                <a:solidFill>
-                  <a:srgbClr val="526D75"/>
-                </a:solidFill>
-                <a:latin typeface="Arial"/>
-                <a:ea typeface="Arial"/>
-                <a:cs typeface="Arial"/>
-              </a:defRPr>
-            </a:pPr>
-            <a:r>
-              <a:t>Quelle: AG Hersbruck, Beschl. v. 16.10.1992 – XVII 1556/92 · </a:t>
-            </a:r>
-            <a:r>
-              <a:rPr>
-                <a:hlinkClick xmlns:r="http://schemas.openxmlformats.org/officeDocument/2006/relationships" r:id="R6a394b6e7f53452b"/>
-              </a:rPr>
-              <a:t>Quelle öffnen (beck-online.beck.de)</a:t>
-            </a:r>
-            <a:r>
-              <a:t> · Kritische Einordnung: Neue Kriminalpolitik 1993, 9–11 · </a:t>
-            </a:r>
-            <a:r>
-              <a:rPr>
-                <a:hlinkClick xmlns:r="http://schemas.openxmlformats.org/officeDocument/2006/relationships" r:id="R6e1767a877a445c4"/>
-              </a:rPr>
-              <a:t>Quelle öffnen (doi.org)</a:t>
-            </a:r>
-            <a:r>
-              <a:t/>
-            </a:r>
-          </a:p>
-        </p:txBody>
-      </p:sp>
-      <p:sp>
-        <p:nvSpPr>
-          <p:cNvPr id="8" name="">
-            <a:extLst xmlns:a="http://schemas.openxmlformats.org/drawingml/2006/main">
-              <a:ext uri="{FF2B5EF4-FFF2-40B4-BE49-F238E27FC236}">
-                <a16:creationId xmlns:a16="http://schemas.microsoft.com/office/drawing/2014/main" id="{45DA9058-648E-49E9-87B2-592679C6F384}"/>
+                <a16:creationId xmlns:a16="http://schemas.microsoft.com/office/drawing/2014/main" id="{3F33CBD8-2682-42AB-9B53-6DD47D171E7B}"/>
               </a:ext>
             </a:extLst>
           </p:cNvPr>
@@ -6048,7 +5676,7 @@
                 <a:ea typeface="Arial"/>
                 <a:cs typeface="Arial"/>
               </a:rPr>
-              <a:t>Recht Medizinisch · Folie 9 · Seite 2/2</a:t>
+              <a:t>Recht Medizinisch · Folie 10 · Seite 1/2</a:t>
             </a:r>
           </a:p>
         </p:txBody>
@@ -6056,7 +5684,7 @@
     </p:spTree>
     <p:extLst>
       <p:ext uri="{BB962C8B-B14F-4D97-AF65-F5344CB8AC3E}">
-        <p14:creationId xmlns:p14="http://schemas.microsoft.com/office/powerpoint/2010/main" val="560716779"/>
+        <p14:creationId xmlns:p14="http://schemas.microsoft.com/office/powerpoint/2010/main" val="857090229"/>
       </p:ext>
     </p:extLst>
   </p:cSld>
@@ -6084,10 +5712,10 @@
       </p:grpSpPr>
       <p:sp>
         <p:nvSpPr>
-          <p:cNvPr id="7" name="">
-            <a:extLst xmlns:a="http://schemas.openxmlformats.org/drawingml/2006/main">
-              <a:ext uri="{FF2B5EF4-FFF2-40B4-BE49-F238E27FC236}">
-                <a16:creationId xmlns:a16="http://schemas.microsoft.com/office/drawing/2014/main" id="{1B1EF9C7-99ED-4167-9D61-96B24054B0D3}"/>
+          <p:cNvPr id="9" name="">
+            <a:extLst xmlns:a="http://schemas.openxmlformats.org/drawingml/2006/main">
+              <a:ext uri="{FF2B5EF4-FFF2-40B4-BE49-F238E27FC236}">
+                <a16:creationId xmlns:a16="http://schemas.microsoft.com/office/drawing/2014/main" id="{EBA0923C-EB6C-4CC6-A619-CE2B5CB2D8D5}"/>
               </a:ext>
             </a:extLst>
           </p:cNvPr>
@@ -6144,7 +5772,7 @@
           <p:cNvPr id="2" name="">
             <a:extLst xmlns:a="http://schemas.openxmlformats.org/drawingml/2006/main">
               <a:ext uri="{FF2B5EF4-FFF2-40B4-BE49-F238E27FC236}">
-                <a16:creationId xmlns:a16="http://schemas.microsoft.com/office/drawing/2014/main" id="{799007DE-86C6-41FA-A746-74CA4F87C94F}"/>
+                <a16:creationId xmlns:a16="http://schemas.microsoft.com/office/drawing/2014/main" id="{606704F0-2E9B-4057-81CB-C117AF6D1EF2}"/>
               </a:ext>
             </a:extLst>
           </p:cNvPr>
@@ -6201,7 +5829,7 @@
           <p:cNvPr id="3" name="">
             <a:extLst xmlns:a="http://schemas.openxmlformats.org/drawingml/2006/main">
               <a:ext uri="{FF2B5EF4-FFF2-40B4-BE49-F238E27FC236}">
-                <a16:creationId xmlns:a16="http://schemas.microsoft.com/office/drawing/2014/main" id="{8CC0570F-FAE6-437E-95F7-96FD51F36321}"/>
+                <a16:creationId xmlns:a16="http://schemas.microsoft.com/office/drawing/2014/main" id="{22BC984F-8898-4363-9196-B5FDBB205BC5}"/>
               </a:ext>
             </a:extLst>
           </p:cNvPr>
@@ -6248,7 +5876,7 @@
                 <a:ea typeface="Arial"/>
                 <a:cs typeface="Arial"/>
               </a:rPr>
-              <a:t>Historische Entscheidung</a:t>
+              <a:t>Heutiger Rechtsrahmen</a:t>
             </a:r>
           </a:p>
         </p:txBody>
@@ -6258,7 +5886,7 @@
           <p:cNvPr id="4" name="">
             <a:extLst xmlns:a="http://schemas.openxmlformats.org/drawingml/2006/main">
               <a:ext uri="{FF2B5EF4-FFF2-40B4-BE49-F238E27FC236}">
-                <a16:creationId xmlns:a16="http://schemas.microsoft.com/office/drawing/2014/main" id="{CF0C3C63-034E-428C-8288-943C9DD7F719}"/>
+                <a16:creationId xmlns:a16="http://schemas.microsoft.com/office/drawing/2014/main" id="{6D5AF1DD-6828-45FD-A4BE-9BFC69D1D74C}"/>
               </a:ext>
             </a:extLst>
           </p:cNvPr>
@@ -6270,7 +5898,7 @@
         <p:spPr>
           <a:xfrm xmlns:a="http://schemas.openxmlformats.org/drawingml/2006/main">
             <a:off x="533400" y="1914525"/>
-            <a:ext cx="11125200" cy="1114425"/>
+            <a:ext cx="11125200" cy="2028825"/>
           </a:xfrm>
           <a:prstGeom xmlns:a="http://schemas.openxmlformats.org/drawingml/2006/main" prst="rect">
             <a:avLst/>
@@ -6297,15 +5925,19 @@
               </a:defRPr>
             </a:pPr>
             <a:r>
-              <a:t>• vorläufige Betreuung trotz angenommener rechtlicher Todesfeststellung</a:t>
+              <a:t>• § 1870 BGB: Die Betreuung endet mit dem Tod.</a:t>
             </a:r>
             <a:br/>
             <a:r>
-              <a:t>• gerichtlicher Genehmigungsvorbehalt für ein Abschalten vor Entbindung oder Tod der Leibesfrucht</a:t>
+              <a:t>• § 1874 Abs. 2 BGB regelt daneben unaufschiebbare Angelegenheiten im bisherigen Aufgabenkreis, bis der Erbe sie besorgen kann. Daraus folgt keine allgemeine Befugnis zur Fortführung einer Schwangerschaft nach dem Tod.</a:t>
             </a:r>
             <a:br/>
             <a:r>
-              <a:t>• keine höchstrichterliche abschließende Güterabwägung</a:t>
+              <a:t>• Medizinische Indikation und Prognose bleiben eigenständige ärztliche Fragen.</a:t>
+            </a:r>
+            <a:br/>
+            <a:r>
+              <a:t>• Grundrechte, Strafrecht, Totenfürsorge und Verfahrenszuständigkeit müssen getrennt geprüft werden.</a:t>
             </a:r>
           </a:p>
         </p:txBody>
@@ -6315,7 +5947,113 @@
           <p:cNvPr id="5" name="">
             <a:extLst xmlns:a="http://schemas.openxmlformats.org/drawingml/2006/main">
               <a:ext uri="{FF2B5EF4-FFF2-40B4-BE49-F238E27FC236}">
-                <a16:creationId xmlns:a16="http://schemas.microsoft.com/office/drawing/2014/main" id="{498D0712-E13C-4855-904B-51470040CCEE}"/>
+                <a16:creationId xmlns:a16="http://schemas.microsoft.com/office/drawing/2014/main" id="{892566DD-2500-492D-81E7-64C985B9F3D6}"/>
+              </a:ext>
+            </a:extLst>
+          </p:cNvPr>
+          <p:cNvSpPr>
+            <a:spLocks xmlns:a="http://schemas.openxmlformats.org/drawingml/2006/main" noGrp="1"/>
+          </p:cNvSpPr>
+          <p:nvPr/>
+        </p:nvSpPr>
+        <p:spPr>
+          <a:xfrm xmlns:a="http://schemas.openxmlformats.org/drawingml/2006/main">
+            <a:off x="533400" y="3943350"/>
+            <a:ext cx="11125200" cy="457200"/>
+          </a:xfrm>
+          <a:prstGeom xmlns:a="http://schemas.openxmlformats.org/drawingml/2006/main" prst="rect">
+            <a:avLst/>
+          </a:prstGeom>
+          <a:noFill xmlns:a="http://schemas.openxmlformats.org/drawingml/2006/main"/>
+          <a:ln xmlns:a="http://schemas.openxmlformats.org/drawingml/2006/main" w="0">
+            <a:noFill/>
+          </a:ln>
+        </p:spPr>
+        <p:txBody>
+          <a:bodyPr xmlns:a="http://schemas.openxmlformats.org/drawingml/2006/main">
+            <a:noAutofit/>
+          </a:bodyPr>
+          <a:lstStyle xmlns:a="http://schemas.openxmlformats.org/drawingml/2006/main"/>
+          <a:p xmlns:a="http://schemas.openxmlformats.org/drawingml/2006/main">
+            <a:pPr>
+              <a:defRPr sz="1800" b="1">
+                <a:solidFill>
+                  <a:srgbClr val="087F86"/>
+                </a:solidFill>
+                <a:latin typeface="Arial"/>
+                <a:ea typeface="Arial"/>
+                <a:cs typeface="Arial"/>
+              </a:defRPr>
+            </a:pPr>
+            <a:r>
+              <a:rPr sz="1800" b="1">
+                <a:solidFill>
+                  <a:srgbClr val="087F86"/>
+                </a:solidFill>
+                <a:latin typeface="Arial"/>
+                <a:ea typeface="Arial"/>
+                <a:cs typeface="Arial"/>
+              </a:rPr>
+              <a:t>💡 Praxis-Merksatz</a:t>
+            </a:r>
+          </a:p>
+        </p:txBody>
+      </p:sp>
+      <p:sp>
+        <p:nvSpPr>
+          <p:cNvPr id="6" name="">
+            <a:extLst xmlns:a="http://schemas.openxmlformats.org/drawingml/2006/main">
+              <a:ext uri="{FF2B5EF4-FFF2-40B4-BE49-F238E27FC236}">
+                <a16:creationId xmlns:a16="http://schemas.microsoft.com/office/drawing/2014/main" id="{8F8E7D35-9DD5-42F0-AD7C-5F7ABA5E4D07}"/>
+              </a:ext>
+            </a:extLst>
+          </p:cNvPr>
+          <p:cNvSpPr>
+            <a:spLocks xmlns:a="http://schemas.openxmlformats.org/drawingml/2006/main" noGrp="1"/>
+          </p:cNvSpPr>
+          <p:nvPr/>
+        </p:nvSpPr>
+        <p:spPr>
+          <a:xfrm xmlns:a="http://schemas.openxmlformats.org/drawingml/2006/main">
+            <a:off x="533400" y="4400550"/>
+            <a:ext cx="11125200" cy="647700"/>
+          </a:xfrm>
+          <a:prstGeom xmlns:a="http://schemas.openxmlformats.org/drawingml/2006/main" prst="rect">
+            <a:avLst/>
+          </a:prstGeom>
+          <a:noFill xmlns:a="http://schemas.openxmlformats.org/drawingml/2006/main"/>
+          <a:ln xmlns:a="http://schemas.openxmlformats.org/drawingml/2006/main" w="0">
+            <a:noFill/>
+          </a:ln>
+        </p:spPr>
+        <p:txBody>
+          <a:bodyPr xmlns:a="http://schemas.openxmlformats.org/drawingml/2006/main">
+            <a:noAutofit/>
+          </a:bodyPr>
+          <a:lstStyle xmlns:a="http://schemas.openxmlformats.org/drawingml/2006/main"/>
+          <a:p xmlns:a="http://schemas.openxmlformats.org/drawingml/2006/main">
+            <a:pPr>
+              <a:defRPr sz="1725" b="0">
+                <a:solidFill>
+                  <a:srgbClr val="071D33"/>
+                </a:solidFill>
+                <a:latin typeface="Arial"/>
+                <a:ea typeface="Arial"/>
+                <a:cs typeface="Arial"/>
+              </a:defRPr>
+            </a:pPr>
+            <a:r>
+              <a:t>Lehrziel ist nicht eine Musterlösung, sondern die saubere Trennung von Tatsachen, Rechtspositionen, Zuständigkeiten und Entscheidungsgrenzen.</a:t>
+            </a:r>
+          </a:p>
+        </p:txBody>
+      </p:sp>
+      <p:sp>
+        <p:nvSpPr>
+          <p:cNvPr id="7" name="">
+            <a:extLst xmlns:a="http://schemas.openxmlformats.org/drawingml/2006/main">
+              <a:ext uri="{FF2B5EF4-FFF2-40B4-BE49-F238E27FC236}">
+                <a16:creationId xmlns:a16="http://schemas.microsoft.com/office/drawing/2014/main" id="{C8FB9179-A8DC-4C3D-8A2E-B2777CB3A741}"/>
               </a:ext>
             </a:extLst>
           </p:cNvPr>
@@ -6354,11 +6092,11 @@
               </a:defRPr>
             </a:pPr>
             <a:r>
-              <a:t>Heutiger Rechtsrahmen: § 1870 BGB und § 1874 Abs. 2 BGB. Amtliche Gesetzestexte: </a:t>
+              <a:t>Heutiger Rechtsrahmen: § 1870 BGB und § 1874 Abs. 2 BGB. Amtliche Gesetzestexte: </a:t>
             </a:r>
             <a:r>
               <a:rPr>
-                <a:hlinkClick xmlns:r="http://schemas.openxmlformats.org/officeDocument/2006/relationships" r:id="R2d8878aef052404e"/>
+                <a:hlinkClick xmlns:r="http://schemas.openxmlformats.org/officeDocument/2006/relationships" r:id="Rcd11be1d2fcc4241"/>
               </a:rPr>
               <a:t>§ 1870 BGB öffnen</a:t>
             </a:r>
@@ -6367,7 +6105,7 @@
             </a:r>
             <a:r>
               <a:rPr>
-                <a:hlinkClick xmlns:r="http://schemas.openxmlformats.org/officeDocument/2006/relationships" r:id="Ra6db75d1570a42e1"/>
+                <a:hlinkClick xmlns:r="http://schemas.openxmlformats.org/officeDocument/2006/relationships" r:id="R18d7a03971b64872"/>
               </a:rPr>
               <a:t>§ 1874 BGB öffnen</a:t>
             </a:r>
@@ -6379,10 +6117,10 @@
       </p:sp>
       <p:sp>
         <p:nvSpPr>
-          <p:cNvPr id="6" name="">
-            <a:extLst xmlns:a="http://schemas.openxmlformats.org/drawingml/2006/main">
-              <a:ext uri="{FF2B5EF4-FFF2-40B4-BE49-F238E27FC236}">
-                <a16:creationId xmlns:a16="http://schemas.microsoft.com/office/drawing/2014/main" id="{D1D88C40-024A-4498-9CAF-13D134F5C0F2}"/>
+          <p:cNvPr id="8" name="">
+            <a:extLst xmlns:a="http://schemas.openxmlformats.org/drawingml/2006/main">
+              <a:ext uri="{FF2B5EF4-FFF2-40B4-BE49-F238E27FC236}">
+                <a16:creationId xmlns:a16="http://schemas.microsoft.com/office/drawing/2014/main" id="{20BCFDEC-2F30-42D4-B321-A212E9163766}"/>
               </a:ext>
             </a:extLst>
           </p:cNvPr>
@@ -6429,7 +6167,7 @@
                 <a:ea typeface="Arial"/>
                 <a:cs typeface="Arial"/>
               </a:rPr>
-              <a:t>Recht Medizinisch · Folie 10 · Seite 1/2</a:t>
+              <a:t>Recht Medizinisch · Folie 10 · Seite 2/2</a:t>
             </a:r>
           </a:p>
         </p:txBody>
@@ -6437,7 +6175,7 @@
     </p:spTree>
     <p:extLst>
       <p:ext uri="{BB962C8B-B14F-4D97-AF65-F5344CB8AC3E}">
-        <p14:creationId xmlns:p14="http://schemas.microsoft.com/office/powerpoint/2010/main" val="1332478858"/>
+        <p14:creationId xmlns:p14="http://schemas.microsoft.com/office/powerpoint/2010/main" val="1514718686"/>
       </p:ext>
     </p:extLst>
   </p:cSld>
@@ -6445,497 +6183,6 @@
 </file>
 
 <file path=ppt/slides/slide15.xml><?xml version="1.0" encoding="utf-8"?>
-<p:sld xmlns:p="http://schemas.openxmlformats.org/presentationml/2006/main">
-  <p:cSld>
-    <p:bg>
-      <p:bgPr>
-        <a:solidFill xmlns:a="http://schemas.openxmlformats.org/drawingml/2006/main">
-          <a:srgbClr val="F8F5ED"/>
-        </a:solidFill>
-      </p:bgPr>
-    </p:bg>
-    <p:spTree>
-      <p:nvGrpSpPr>
-        <p:cNvPr id="1" name=""/>
-        <p:cNvGrpSpPr/>
-        <p:nvPr/>
-      </p:nvGrpSpPr>
-      <p:grpSpPr>
-        <a:xfrm xmlns:a="http://schemas.openxmlformats.org/drawingml/2006/main"/>
-      </p:grpSpPr>
-      <p:sp>
-        <p:nvSpPr>
-          <p:cNvPr id="9" name="">
-            <a:extLst xmlns:a="http://schemas.openxmlformats.org/drawingml/2006/main">
-              <a:ext uri="{FF2B5EF4-FFF2-40B4-BE49-F238E27FC236}">
-                <a16:creationId xmlns:a16="http://schemas.microsoft.com/office/drawing/2014/main" id="{EB772D53-1324-4B09-85A7-8F0FD1A019E0}"/>
-              </a:ext>
-            </a:extLst>
-          </p:cNvPr>
-          <p:cNvSpPr>
-            <a:spLocks xmlns:a="http://schemas.openxmlformats.org/drawingml/2006/main" noGrp="1"/>
-          </p:cNvSpPr>
-          <p:nvPr/>
-        </p:nvSpPr>
-        <p:spPr>
-          <a:xfrm xmlns:a="http://schemas.openxmlformats.org/drawingml/2006/main">
-            <a:off x="533400" y="228600"/>
-            <a:ext cx="11125200" cy="285750"/>
-          </a:xfrm>
-          <a:prstGeom xmlns:a="http://schemas.openxmlformats.org/drawingml/2006/main" prst="rect">
-            <a:avLst/>
-          </a:prstGeom>
-          <a:noFill xmlns:a="http://schemas.openxmlformats.org/drawingml/2006/main"/>
-          <a:ln xmlns:a="http://schemas.openxmlformats.org/drawingml/2006/main" w="0">
-            <a:noFill/>
-          </a:ln>
-        </p:spPr>
-        <p:txBody>
-          <a:bodyPr xmlns:a="http://schemas.openxmlformats.org/drawingml/2006/main">
-            <a:noAutofit/>
-          </a:bodyPr>
-          <a:lstStyle xmlns:a="http://schemas.openxmlformats.org/drawingml/2006/main"/>
-          <a:p xmlns:a="http://schemas.openxmlformats.org/drawingml/2006/main">
-            <a:pPr>
-              <a:defRPr sz="1125" b="1">
-                <a:solidFill>
-                  <a:srgbClr val="087F86"/>
-                </a:solidFill>
-                <a:latin typeface="Arial"/>
-                <a:ea typeface="Arial"/>
-                <a:cs typeface="Arial"/>
-              </a:defRPr>
-            </a:pPr>
-            <a:r>
-              <a:rPr sz="1125" b="1">
-                <a:solidFill>
-                  <a:srgbClr val="087F86"/>
-                </a:solidFill>
-                <a:latin typeface="Arial"/>
-                <a:ea typeface="Arial"/>
-                <a:cs typeface="Arial"/>
-              </a:rPr>
-              <a:t>RECHTSSTAND 2026</a:t>
-            </a:r>
-          </a:p>
-        </p:txBody>
-      </p:sp>
-      <p:sp>
-        <p:nvSpPr>
-          <p:cNvPr id="2" name="">
-            <a:extLst xmlns:a="http://schemas.openxmlformats.org/drawingml/2006/main">
-              <a:ext uri="{FF2B5EF4-FFF2-40B4-BE49-F238E27FC236}">
-                <a16:creationId xmlns:a16="http://schemas.microsoft.com/office/drawing/2014/main" id="{9C86AB50-EA16-4717-877C-ADDC3D535A12}"/>
-              </a:ext>
-            </a:extLst>
-          </p:cNvPr>
-          <p:cNvSpPr>
-            <a:spLocks xmlns:a="http://schemas.openxmlformats.org/drawingml/2006/main" noGrp="1"/>
-          </p:cNvSpPr>
-          <p:nvPr/>
-        </p:nvSpPr>
-        <p:spPr>
-          <a:xfrm xmlns:a="http://schemas.openxmlformats.org/drawingml/2006/main">
-            <a:off x="533400" y="666750"/>
-            <a:ext cx="11125200" cy="552450"/>
-          </a:xfrm>
-          <a:prstGeom xmlns:a="http://schemas.openxmlformats.org/drawingml/2006/main" prst="rect">
-            <a:avLst/>
-          </a:prstGeom>
-          <a:noFill xmlns:a="http://schemas.openxmlformats.org/drawingml/2006/main"/>
-          <a:ln xmlns:a="http://schemas.openxmlformats.org/drawingml/2006/main" w="0">
-            <a:noFill/>
-          </a:ln>
-        </p:spPr>
-        <p:txBody>
-          <a:bodyPr xmlns:a="http://schemas.openxmlformats.org/drawingml/2006/main">
-            <a:noAutofit/>
-          </a:bodyPr>
-          <a:lstStyle xmlns:a="http://schemas.openxmlformats.org/drawingml/2006/main"/>
-          <a:p xmlns:a="http://schemas.openxmlformats.org/drawingml/2006/main">
-            <a:pPr>
-              <a:defRPr sz="2850" b="1">
-                <a:solidFill>
-                  <a:srgbClr val="071D33"/>
-                </a:solidFill>
-                <a:latin typeface="Georgia"/>
-                <a:ea typeface="Georgia"/>
-                <a:cs typeface="Georgia"/>
-              </a:defRPr>
-            </a:pPr>
-            <a:r>
-              <a:rPr sz="2850" b="1">
-                <a:solidFill>
-                  <a:srgbClr val="071D33"/>
-                </a:solidFill>
-                <a:latin typeface="Georgia"/>
-                <a:ea typeface="Georgia"/>
-                <a:cs typeface="Georgia"/>
-              </a:rPr>
-              <a:t>Was gilt heute?</a:t>
-            </a:r>
-          </a:p>
-        </p:txBody>
-      </p:sp>
-      <p:sp>
-        <p:nvSpPr>
-          <p:cNvPr id="3" name="">
-            <a:extLst xmlns:a="http://schemas.openxmlformats.org/drawingml/2006/main">
-              <a:ext uri="{FF2B5EF4-FFF2-40B4-BE49-F238E27FC236}">
-                <a16:creationId xmlns:a16="http://schemas.microsoft.com/office/drawing/2014/main" id="{FC7F5506-B487-4100-B382-1B128F2EA549}"/>
-              </a:ext>
-            </a:extLst>
-          </p:cNvPr>
-          <p:cNvSpPr>
-            <a:spLocks xmlns:a="http://schemas.openxmlformats.org/drawingml/2006/main" noGrp="1"/>
-          </p:cNvSpPr>
-          <p:nvPr/>
-        </p:nvSpPr>
-        <p:spPr>
-          <a:xfrm xmlns:a="http://schemas.openxmlformats.org/drawingml/2006/main">
-            <a:off x="533400" y="1457325"/>
-            <a:ext cx="11125200" cy="457200"/>
-          </a:xfrm>
-          <a:prstGeom xmlns:a="http://schemas.openxmlformats.org/drawingml/2006/main" prst="rect">
-            <a:avLst/>
-          </a:prstGeom>
-          <a:noFill xmlns:a="http://schemas.openxmlformats.org/drawingml/2006/main"/>
-          <a:ln xmlns:a="http://schemas.openxmlformats.org/drawingml/2006/main" w="0">
-            <a:noFill/>
-          </a:ln>
-        </p:spPr>
-        <p:txBody>
-          <a:bodyPr xmlns:a="http://schemas.openxmlformats.org/drawingml/2006/main">
-            <a:noAutofit/>
-          </a:bodyPr>
-          <a:lstStyle xmlns:a="http://schemas.openxmlformats.org/drawingml/2006/main"/>
-          <a:p xmlns:a="http://schemas.openxmlformats.org/drawingml/2006/main">
-            <a:pPr>
-              <a:defRPr sz="1800" b="1">
-                <a:solidFill>
-                  <a:srgbClr val="087F86"/>
-                </a:solidFill>
-                <a:latin typeface="Arial"/>
-                <a:ea typeface="Arial"/>
-                <a:cs typeface="Arial"/>
-              </a:defRPr>
-            </a:pPr>
-            <a:r>
-              <a:rPr sz="1800" b="1">
-                <a:solidFill>
-                  <a:srgbClr val="087F86"/>
-                </a:solidFill>
-                <a:latin typeface="Arial"/>
-                <a:ea typeface="Arial"/>
-                <a:cs typeface="Arial"/>
-              </a:rPr>
-              <a:t>Heutiger Rechtsrahmen</a:t>
-            </a:r>
-          </a:p>
-        </p:txBody>
-      </p:sp>
-      <p:sp>
-        <p:nvSpPr>
-          <p:cNvPr id="4" name="">
-            <a:extLst xmlns:a="http://schemas.openxmlformats.org/drawingml/2006/main">
-              <a:ext uri="{FF2B5EF4-FFF2-40B4-BE49-F238E27FC236}">
-                <a16:creationId xmlns:a16="http://schemas.microsoft.com/office/drawing/2014/main" id="{36E6D6E6-4262-40D5-8901-AAEB4E1B3A3F}"/>
-              </a:ext>
-            </a:extLst>
-          </p:cNvPr>
-          <p:cNvSpPr>
-            <a:spLocks xmlns:a="http://schemas.openxmlformats.org/drawingml/2006/main" noGrp="1"/>
-          </p:cNvSpPr>
-          <p:nvPr/>
-        </p:nvSpPr>
-        <p:spPr>
-          <a:xfrm xmlns:a="http://schemas.openxmlformats.org/drawingml/2006/main">
-            <a:off x="533400" y="1914525"/>
-            <a:ext cx="11125200" cy="2028825"/>
-          </a:xfrm>
-          <a:prstGeom xmlns:a="http://schemas.openxmlformats.org/drawingml/2006/main" prst="rect">
-            <a:avLst/>
-          </a:prstGeom>
-          <a:noFill xmlns:a="http://schemas.openxmlformats.org/drawingml/2006/main"/>
-          <a:ln xmlns:a="http://schemas.openxmlformats.org/drawingml/2006/main" w="0">
-            <a:noFill/>
-          </a:ln>
-        </p:spPr>
-        <p:txBody>
-          <a:bodyPr xmlns:a="http://schemas.openxmlformats.org/drawingml/2006/main">
-            <a:noAutofit/>
-          </a:bodyPr>
-          <a:lstStyle xmlns:a="http://schemas.openxmlformats.org/drawingml/2006/main"/>
-          <a:p xmlns:a="http://schemas.openxmlformats.org/drawingml/2006/main">
-            <a:pPr>
-              <a:defRPr sz="1725" b="0">
-                <a:solidFill>
-                  <a:srgbClr val="071D33"/>
-                </a:solidFill>
-                <a:latin typeface="Arial"/>
-                <a:ea typeface="Arial"/>
-                <a:cs typeface="Arial"/>
-              </a:defRPr>
-            </a:pPr>
-            <a:r>
-              <a:t>• § 1870 BGB: Die Betreuung endet mit dem Tod.</a:t>
-            </a:r>
-            <a:br/>
-            <a:r>
-              <a:t>• § 1874 Abs. 2 BGB regelt daneben unaufschiebbare Angelegenheiten im bisherigen Aufgabenkreis, bis der Erbe sie besorgen kann. Daraus folgt keine allgemeine Befugnis zur Fortführung einer Schwangerschaft nach dem Tod.</a:t>
-            </a:r>
-            <a:br/>
-            <a:r>
-              <a:t>• Medizinische Indikation und Prognose bleiben eigenständige ärztliche Fragen.</a:t>
-            </a:r>
-            <a:br/>
-            <a:r>
-              <a:t>• Grundrechte, Strafrecht, Totenfürsorge und Verfahrenszuständigkeit müssen getrennt geprüft werden.</a:t>
-            </a:r>
-          </a:p>
-        </p:txBody>
-      </p:sp>
-      <p:sp>
-        <p:nvSpPr>
-          <p:cNvPr id="5" name="">
-            <a:extLst xmlns:a="http://schemas.openxmlformats.org/drawingml/2006/main">
-              <a:ext uri="{FF2B5EF4-FFF2-40B4-BE49-F238E27FC236}">
-                <a16:creationId xmlns:a16="http://schemas.microsoft.com/office/drawing/2014/main" id="{9ADC0995-E25F-4F45-9F73-5ECE68745CB2}"/>
-              </a:ext>
-            </a:extLst>
-          </p:cNvPr>
-          <p:cNvSpPr>
-            <a:spLocks xmlns:a="http://schemas.openxmlformats.org/drawingml/2006/main" noGrp="1"/>
-          </p:cNvSpPr>
-          <p:nvPr/>
-        </p:nvSpPr>
-        <p:spPr>
-          <a:xfrm xmlns:a="http://schemas.openxmlformats.org/drawingml/2006/main">
-            <a:off x="533400" y="3943350"/>
-            <a:ext cx="11125200" cy="457200"/>
-          </a:xfrm>
-          <a:prstGeom xmlns:a="http://schemas.openxmlformats.org/drawingml/2006/main" prst="rect">
-            <a:avLst/>
-          </a:prstGeom>
-          <a:noFill xmlns:a="http://schemas.openxmlformats.org/drawingml/2006/main"/>
-          <a:ln xmlns:a="http://schemas.openxmlformats.org/drawingml/2006/main" w="0">
-            <a:noFill/>
-          </a:ln>
-        </p:spPr>
-        <p:txBody>
-          <a:bodyPr xmlns:a="http://schemas.openxmlformats.org/drawingml/2006/main">
-            <a:noAutofit/>
-          </a:bodyPr>
-          <a:lstStyle xmlns:a="http://schemas.openxmlformats.org/drawingml/2006/main"/>
-          <a:p xmlns:a="http://schemas.openxmlformats.org/drawingml/2006/main">
-            <a:pPr>
-              <a:defRPr sz="1800" b="1">
-                <a:solidFill>
-                  <a:srgbClr val="087F86"/>
-                </a:solidFill>
-                <a:latin typeface="Arial"/>
-                <a:ea typeface="Arial"/>
-                <a:cs typeface="Arial"/>
-              </a:defRPr>
-            </a:pPr>
-            <a:r>
-              <a:rPr sz="1800" b="1">
-                <a:solidFill>
-                  <a:srgbClr val="087F86"/>
-                </a:solidFill>
-                <a:latin typeface="Arial"/>
-                <a:ea typeface="Arial"/>
-                <a:cs typeface="Arial"/>
-              </a:rPr>
-              <a:t>💡 Praxis-Merksatz</a:t>
-            </a:r>
-          </a:p>
-        </p:txBody>
-      </p:sp>
-      <p:sp>
-        <p:nvSpPr>
-          <p:cNvPr id="6" name="">
-            <a:extLst xmlns:a="http://schemas.openxmlformats.org/drawingml/2006/main">
-              <a:ext uri="{FF2B5EF4-FFF2-40B4-BE49-F238E27FC236}">
-                <a16:creationId xmlns:a16="http://schemas.microsoft.com/office/drawing/2014/main" id="{8243B999-42EF-435C-852B-CA02CF470D2B}"/>
-              </a:ext>
-            </a:extLst>
-          </p:cNvPr>
-          <p:cNvSpPr>
-            <a:spLocks xmlns:a="http://schemas.openxmlformats.org/drawingml/2006/main" noGrp="1"/>
-          </p:cNvSpPr>
-          <p:nvPr/>
-        </p:nvSpPr>
-        <p:spPr>
-          <a:xfrm xmlns:a="http://schemas.openxmlformats.org/drawingml/2006/main">
-            <a:off x="533400" y="4400550"/>
-            <a:ext cx="11125200" cy="647700"/>
-          </a:xfrm>
-          <a:prstGeom xmlns:a="http://schemas.openxmlformats.org/drawingml/2006/main" prst="rect">
-            <a:avLst/>
-          </a:prstGeom>
-          <a:noFill xmlns:a="http://schemas.openxmlformats.org/drawingml/2006/main"/>
-          <a:ln xmlns:a="http://schemas.openxmlformats.org/drawingml/2006/main" w="0">
-            <a:noFill/>
-          </a:ln>
-        </p:spPr>
-        <p:txBody>
-          <a:bodyPr xmlns:a="http://schemas.openxmlformats.org/drawingml/2006/main">
-            <a:noAutofit/>
-          </a:bodyPr>
-          <a:lstStyle xmlns:a="http://schemas.openxmlformats.org/drawingml/2006/main"/>
-          <a:p xmlns:a="http://schemas.openxmlformats.org/drawingml/2006/main">
-            <a:pPr>
-              <a:defRPr sz="1725" b="0">
-                <a:solidFill>
-                  <a:srgbClr val="071D33"/>
-                </a:solidFill>
-                <a:latin typeface="Arial"/>
-                <a:ea typeface="Arial"/>
-                <a:cs typeface="Arial"/>
-              </a:defRPr>
-            </a:pPr>
-            <a:r>
-              <a:t>Lehrziel ist nicht eine Musterlösung, sondern die saubere Trennung von Tatsachen, Rechtspositionen, Zuständigkeiten und Entscheidungsgrenzen.</a:t>
-            </a:r>
-          </a:p>
-        </p:txBody>
-      </p:sp>
-      <p:sp>
-        <p:nvSpPr>
-          <p:cNvPr id="7" name="">
-            <a:extLst xmlns:a="http://schemas.openxmlformats.org/drawingml/2006/main">
-              <a:ext uri="{FF2B5EF4-FFF2-40B4-BE49-F238E27FC236}">
-                <a16:creationId xmlns:a16="http://schemas.microsoft.com/office/drawing/2014/main" id="{3B30A3E3-E950-48DF-AA53-CF2A4310CADE}"/>
-              </a:ext>
-            </a:extLst>
-          </p:cNvPr>
-          <p:cNvSpPr>
-            <a:spLocks xmlns:a="http://schemas.openxmlformats.org/drawingml/2006/main" noGrp="1"/>
-          </p:cNvSpPr>
-          <p:nvPr/>
-        </p:nvSpPr>
-        <p:spPr>
-          <a:xfrm xmlns:a="http://schemas.openxmlformats.org/drawingml/2006/main">
-            <a:off x="533400" y="5810250"/>
-            <a:ext cx="11125200" cy="381000"/>
-          </a:xfrm>
-          <a:prstGeom xmlns:a="http://schemas.openxmlformats.org/drawingml/2006/main" prst="rect">
-            <a:avLst/>
-          </a:prstGeom>
-          <a:noFill xmlns:a="http://schemas.openxmlformats.org/drawingml/2006/main"/>
-          <a:ln xmlns:a="http://schemas.openxmlformats.org/drawingml/2006/main" w="0">
-            <a:noFill/>
-          </a:ln>
-        </p:spPr>
-        <p:txBody>
-          <a:bodyPr xmlns:a="http://schemas.openxmlformats.org/drawingml/2006/main">
-            <a:noAutofit/>
-          </a:bodyPr>
-          <a:lstStyle xmlns:a="http://schemas.openxmlformats.org/drawingml/2006/main"/>
-          <a:p xmlns:a="http://schemas.openxmlformats.org/drawingml/2006/main">
-            <a:pPr>
-              <a:defRPr sz="900" b="0">
-                <a:solidFill>
-                  <a:srgbClr val="526D75"/>
-                </a:solidFill>
-                <a:latin typeface="Arial"/>
-                <a:ea typeface="Arial"/>
-                <a:cs typeface="Arial"/>
-              </a:defRPr>
-            </a:pPr>
-            <a:r>
-              <a:t>Heutiger Rechtsrahmen: § 1870 BGB und § 1874 Abs. 2 BGB. Amtliche Gesetzestexte: </a:t>
-            </a:r>
-            <a:r>
-              <a:rPr>
-                <a:hlinkClick xmlns:r="http://schemas.openxmlformats.org/officeDocument/2006/relationships" r:id="R7d6a2039c3d44cba"/>
-              </a:rPr>
-              <a:t>§ 1870 BGB öffnen</a:t>
-            </a:r>
-            <a:r>
-              <a:t> und </a:t>
-            </a:r>
-            <a:r>
-              <a:rPr>
-                <a:hlinkClick xmlns:r="http://schemas.openxmlformats.org/officeDocument/2006/relationships" r:id="R7f492458de8345e8"/>
-              </a:rPr>
-              <a:t>§ 1874 BGB öffnen</a:t>
-            </a:r>
-            <a:r>
-              <a:t> · geprüft am 08.09.2026. Diese Normen belegen die heutige Rechtslage; sie sind kein Beleg für die historische Entscheidung.</a:t>
-            </a:r>
-          </a:p>
-        </p:txBody>
-      </p:sp>
-      <p:sp>
-        <p:nvSpPr>
-          <p:cNvPr id="8" name="">
-            <a:extLst xmlns:a="http://schemas.openxmlformats.org/drawingml/2006/main">
-              <a:ext uri="{FF2B5EF4-FFF2-40B4-BE49-F238E27FC236}">
-                <a16:creationId xmlns:a16="http://schemas.microsoft.com/office/drawing/2014/main" id="{DD061650-A7EE-4FD6-8D0F-44B75BE8D260}"/>
-              </a:ext>
-            </a:extLst>
-          </p:cNvPr>
-          <p:cNvSpPr>
-            <a:spLocks xmlns:a="http://schemas.openxmlformats.org/drawingml/2006/main" noGrp="1"/>
-          </p:cNvSpPr>
-          <p:nvPr/>
-        </p:nvSpPr>
-        <p:spPr>
-          <a:xfrm xmlns:a="http://schemas.openxmlformats.org/drawingml/2006/main">
-            <a:off x="533400" y="6381750"/>
-            <a:ext cx="11125200" cy="228600"/>
-          </a:xfrm>
-          <a:prstGeom xmlns:a="http://schemas.openxmlformats.org/drawingml/2006/main" prst="rect">
-            <a:avLst/>
-          </a:prstGeom>
-          <a:noFill xmlns:a="http://schemas.openxmlformats.org/drawingml/2006/main"/>
-          <a:ln xmlns:a="http://schemas.openxmlformats.org/drawingml/2006/main" w="0">
-            <a:noFill/>
-          </a:ln>
-        </p:spPr>
-        <p:txBody>
-          <a:bodyPr xmlns:a="http://schemas.openxmlformats.org/drawingml/2006/main">
-            <a:noAutofit/>
-          </a:bodyPr>
-          <a:lstStyle xmlns:a="http://schemas.openxmlformats.org/drawingml/2006/main"/>
-          <a:p xmlns:a="http://schemas.openxmlformats.org/drawingml/2006/main">
-            <a:pPr>
-              <a:defRPr sz="1050" b="0">
-                <a:solidFill>
-                  <a:srgbClr val="526D75"/>
-                </a:solidFill>
-                <a:latin typeface="Arial"/>
-                <a:ea typeface="Arial"/>
-                <a:cs typeface="Arial"/>
-              </a:defRPr>
-            </a:pPr>
-            <a:r>
-              <a:rPr sz="1050" b="0">
-                <a:solidFill>
-                  <a:srgbClr val="526D75"/>
-                </a:solidFill>
-                <a:latin typeface="Arial"/>
-                <a:ea typeface="Arial"/>
-                <a:cs typeface="Arial"/>
-              </a:rPr>
-              <a:t>Recht Medizinisch · Folie 10 · Seite 2/2</a:t>
-            </a:r>
-          </a:p>
-        </p:txBody>
-      </p:sp>
-    </p:spTree>
-    <p:extLst>
-      <p:ext uri="{BB962C8B-B14F-4D97-AF65-F5344CB8AC3E}">
-        <p14:creationId xmlns:p14="http://schemas.microsoft.com/office/powerpoint/2010/main" val="841262007"/>
-      </p:ext>
-    </p:extLst>
-  </p:cSld>
-</p:sld>
-</file>
-
-<file path=ppt/slides/slide16.xml><?xml version="1.0" encoding="utf-8"?>
 <p:sld xmlns:p="http://schemas.openxmlformats.org/presentationml/2006/main">
   <p:cSld>
     <p:bg>
@@ -6959,7 +6206,7 @@
           <p:cNvPr id="17" name="">
             <a:extLst xmlns:a="http://schemas.openxmlformats.org/drawingml/2006/main">
               <a:ext uri="{FF2B5EF4-FFF2-40B4-BE49-F238E27FC236}">
-                <a16:creationId xmlns:a16="http://schemas.microsoft.com/office/drawing/2014/main" id="{5350CDA4-CDB3-44E1-B0F5-E733FD315523}"/>
+                <a16:creationId xmlns:a16="http://schemas.microsoft.com/office/drawing/2014/main" id="{386B58CF-1D15-49D9-BDED-0CA717257BD0}"/>
               </a:ext>
             </a:extLst>
           </p:cNvPr>
@@ -7016,7 +6263,7 @@
           <p:cNvPr id="2" name="">
             <a:extLst xmlns:a="http://schemas.openxmlformats.org/drawingml/2006/main">
               <a:ext uri="{FF2B5EF4-FFF2-40B4-BE49-F238E27FC236}">
-                <a16:creationId xmlns:a16="http://schemas.microsoft.com/office/drawing/2014/main" id="{106AA7F8-B0CF-48C9-93AB-5616FCADA838}"/>
+                <a16:creationId xmlns:a16="http://schemas.microsoft.com/office/drawing/2014/main" id="{FBA14F5E-465D-40DE-A587-1478F439319F}"/>
               </a:ext>
             </a:extLst>
           </p:cNvPr>
@@ -7073,7 +6320,7 @@
           <p:cNvPr id="3" name="">
             <a:extLst xmlns:a="http://schemas.openxmlformats.org/drawingml/2006/main">
               <a:ext uri="{FF2B5EF4-FFF2-40B4-BE49-F238E27FC236}">
-                <a16:creationId xmlns:a16="http://schemas.microsoft.com/office/drawing/2014/main" id="{F407F78E-26E3-4770-8282-73787F3E6A79}"/>
+                <a16:creationId xmlns:a16="http://schemas.microsoft.com/office/drawing/2014/main" id="{BA26586B-7560-4363-9514-EE0060976E02}"/>
               </a:ext>
             </a:extLst>
           </p:cNvPr>
@@ -7085,11 +6332,11 @@
         <p:spPr>
           <a:xfrm xmlns:a="http://schemas.openxmlformats.org/drawingml/2006/main">
             <a:off x="438150" y="1381125"/>
-            <a:ext cx="5486400" cy="2009775"/>
+            <a:ext cx="5486400" cy="1933575"/>
           </a:xfrm>
           <a:prstGeom xmlns:a="http://schemas.openxmlformats.org/drawingml/2006/main" prst="roundRect">
             <a:avLst>
-              <a:gd name="adj" fmla="val 3791"/>
+              <a:gd name="adj" fmla="val 3941"/>
             </a:avLst>
           </a:prstGeom>
           <a:solidFill xmlns:a="http://schemas.openxmlformats.org/drawingml/2006/main">
@@ -7105,7 +6352,7 @@
           <p:cNvPr id="4" name="">
             <a:extLst xmlns:a="http://schemas.openxmlformats.org/drawingml/2006/main">
               <a:ext uri="{FF2B5EF4-FFF2-40B4-BE49-F238E27FC236}">
-                <a16:creationId xmlns:a16="http://schemas.microsoft.com/office/drawing/2014/main" id="{583F33C1-FE6B-46C9-87DF-E132600121AD}"/>
+                <a16:creationId xmlns:a16="http://schemas.microsoft.com/office/drawing/2014/main" id="{A2E04650-A722-4E7B-B858-CACFA732359B}"/>
               </a:ext>
             </a:extLst>
           </p:cNvPr>
@@ -7162,7 +6409,7 @@
           <p:cNvPr id="5" name="">
             <a:extLst xmlns:a="http://schemas.openxmlformats.org/drawingml/2006/main">
               <a:ext uri="{FF2B5EF4-FFF2-40B4-BE49-F238E27FC236}">
-                <a16:creationId xmlns:a16="http://schemas.microsoft.com/office/drawing/2014/main" id="{BB92C1F1-37F9-467B-A413-7EBAAAFE4CEF}"/>
+                <a16:creationId xmlns:a16="http://schemas.microsoft.com/office/drawing/2014/main" id="{499828FD-22E5-4104-8CC8-F0DD5AC9B9D5}"/>
               </a:ext>
             </a:extLst>
           </p:cNvPr>
@@ -7174,7 +6421,7 @@
         <p:spPr>
           <a:xfrm xmlns:a="http://schemas.openxmlformats.org/drawingml/2006/main">
             <a:off x="533400" y="1895475"/>
-            <a:ext cx="5410200" cy="1533525"/>
+            <a:ext cx="5410200" cy="1457325"/>
           </a:xfrm>
           <a:prstGeom xmlns:a="http://schemas.openxmlformats.org/drawingml/2006/main" prst="rect">
             <a:avLst/>
@@ -7211,7 +6458,7 @@
           <p:cNvPr id="6" name="">
             <a:extLst xmlns:a="http://schemas.openxmlformats.org/drawingml/2006/main">
               <a:ext uri="{FF2B5EF4-FFF2-40B4-BE49-F238E27FC236}">
-                <a16:creationId xmlns:a16="http://schemas.microsoft.com/office/drawing/2014/main" id="{7ACA9702-A606-4BE7-ABCB-1A0E90D98F3F}"/>
+                <a16:creationId xmlns:a16="http://schemas.microsoft.com/office/drawing/2014/main" id="{030512A7-ED64-4639-B79C-667E558F8DB3}"/>
               </a:ext>
             </a:extLst>
           </p:cNvPr>
@@ -7223,11 +6470,11 @@
         <p:spPr>
           <a:xfrm xmlns:a="http://schemas.openxmlformats.org/drawingml/2006/main">
             <a:off x="6153150" y="1381125"/>
-            <a:ext cx="5486400" cy="2009775"/>
+            <a:ext cx="5486400" cy="1933575"/>
           </a:xfrm>
           <a:prstGeom xmlns:a="http://schemas.openxmlformats.org/drawingml/2006/main" prst="roundRect">
             <a:avLst>
-              <a:gd name="adj" fmla="val 3791"/>
+              <a:gd name="adj" fmla="val 3941"/>
             </a:avLst>
           </a:prstGeom>
           <a:solidFill xmlns:a="http://schemas.openxmlformats.org/drawingml/2006/main">
@@ -7243,7 +6490,7 @@
           <p:cNvPr id="7" name="">
             <a:extLst xmlns:a="http://schemas.openxmlformats.org/drawingml/2006/main">
               <a:ext uri="{FF2B5EF4-FFF2-40B4-BE49-F238E27FC236}">
-                <a16:creationId xmlns:a16="http://schemas.microsoft.com/office/drawing/2014/main" id="{8F6FC278-BB55-437D-BF1A-E0EFF4D1DB00}"/>
+                <a16:creationId xmlns:a16="http://schemas.microsoft.com/office/drawing/2014/main" id="{A1C98112-86CC-4901-8F1D-45C91D141C98}"/>
               </a:ext>
             </a:extLst>
           </p:cNvPr>
@@ -7300,7 +6547,7 @@
           <p:cNvPr id="8" name="">
             <a:extLst xmlns:a="http://schemas.openxmlformats.org/drawingml/2006/main">
               <a:ext uri="{FF2B5EF4-FFF2-40B4-BE49-F238E27FC236}">
-                <a16:creationId xmlns:a16="http://schemas.microsoft.com/office/drawing/2014/main" id="{9522DAD5-99CF-4922-9C6B-A160A03CFBDC}"/>
+                <a16:creationId xmlns:a16="http://schemas.microsoft.com/office/drawing/2014/main" id="{4188A907-03D5-4F4B-ABDF-6281D5091575}"/>
               </a:ext>
             </a:extLst>
           </p:cNvPr>
@@ -7312,7 +6559,7 @@
         <p:spPr>
           <a:xfrm xmlns:a="http://schemas.openxmlformats.org/drawingml/2006/main">
             <a:off x="6248400" y="1895475"/>
-            <a:ext cx="5410200" cy="1533525"/>
+            <a:ext cx="5410200" cy="1457325"/>
           </a:xfrm>
           <a:prstGeom xmlns:a="http://schemas.openxmlformats.org/drawingml/2006/main" prst="rect">
             <a:avLst/>
@@ -7349,23 +6596,23 @@
           <p:cNvPr id="9" name="">
             <a:extLst xmlns:a="http://schemas.openxmlformats.org/drawingml/2006/main">
               <a:ext uri="{FF2B5EF4-FFF2-40B4-BE49-F238E27FC236}">
-                <a16:creationId xmlns:a16="http://schemas.microsoft.com/office/drawing/2014/main" id="{ECF8A9D9-DF12-49BB-9FE9-FBE9D8773680}"/>
-              </a:ext>
-            </a:extLst>
-          </p:cNvPr>
-          <p:cNvSpPr>
-            <a:spLocks xmlns:a="http://schemas.openxmlformats.org/drawingml/2006/main" noGrp="1"/>
-          </p:cNvSpPr>
-          <p:nvPr/>
-        </p:nvSpPr>
-        <p:spPr>
-          <a:xfrm xmlns:a="http://schemas.openxmlformats.org/drawingml/2006/main">
-            <a:off x="438150" y="3486150"/>
-            <a:ext cx="5486400" cy="2257425"/>
+                <a16:creationId xmlns:a16="http://schemas.microsoft.com/office/drawing/2014/main" id="{846DD396-E9E1-4676-B3E0-6089B6A0F191}"/>
+              </a:ext>
+            </a:extLst>
+          </p:cNvPr>
+          <p:cNvSpPr>
+            <a:spLocks xmlns:a="http://schemas.openxmlformats.org/drawingml/2006/main" noGrp="1"/>
+          </p:cNvSpPr>
+          <p:nvPr/>
+        </p:nvSpPr>
+        <p:spPr>
+          <a:xfrm xmlns:a="http://schemas.openxmlformats.org/drawingml/2006/main">
+            <a:off x="438150" y="3409950"/>
+            <a:ext cx="5486400" cy="2181225"/>
           </a:xfrm>
           <a:prstGeom xmlns:a="http://schemas.openxmlformats.org/drawingml/2006/main" prst="roundRect">
             <a:avLst>
-              <a:gd name="adj" fmla="val 3376"/>
+              <a:gd name="adj" fmla="val 3493"/>
             </a:avLst>
           </a:prstGeom>
           <a:solidFill xmlns:a="http://schemas.openxmlformats.org/drawingml/2006/main">
@@ -7381,18 +6628,18 @@
           <p:cNvPr id="10" name="">
             <a:extLst xmlns:a="http://schemas.openxmlformats.org/drawingml/2006/main">
               <a:ext uri="{FF2B5EF4-FFF2-40B4-BE49-F238E27FC236}">
-                <a16:creationId xmlns:a16="http://schemas.microsoft.com/office/drawing/2014/main" id="{0C52014D-815E-4FB4-B50D-856BFC8DCA34}"/>
-              </a:ext>
-            </a:extLst>
-          </p:cNvPr>
-          <p:cNvSpPr>
-            <a:spLocks xmlns:a="http://schemas.openxmlformats.org/drawingml/2006/main" noGrp="1"/>
-          </p:cNvSpPr>
-          <p:nvPr/>
-        </p:nvSpPr>
-        <p:spPr>
-          <a:xfrm xmlns:a="http://schemas.openxmlformats.org/drawingml/2006/main">
-            <a:off x="533400" y="3562350"/>
+                <a16:creationId xmlns:a16="http://schemas.microsoft.com/office/drawing/2014/main" id="{9BFCDF5B-E49A-4741-818B-44B7E1780E3E}"/>
+              </a:ext>
+            </a:extLst>
+          </p:cNvPr>
+          <p:cNvSpPr>
+            <a:spLocks xmlns:a="http://schemas.openxmlformats.org/drawingml/2006/main" noGrp="1"/>
+          </p:cNvSpPr>
+          <p:nvPr/>
+        </p:nvSpPr>
+        <p:spPr>
+          <a:xfrm xmlns:a="http://schemas.openxmlformats.org/drawingml/2006/main">
+            <a:off x="533400" y="3486150"/>
             <a:ext cx="5410200" cy="438150"/>
           </a:xfrm>
           <a:prstGeom xmlns:a="http://schemas.openxmlformats.org/drawingml/2006/main" prst="rect">
@@ -7438,19 +6685,19 @@
           <p:cNvPr id="11" name="">
             <a:extLst xmlns:a="http://schemas.openxmlformats.org/drawingml/2006/main">
               <a:ext uri="{FF2B5EF4-FFF2-40B4-BE49-F238E27FC236}">
-                <a16:creationId xmlns:a16="http://schemas.microsoft.com/office/drawing/2014/main" id="{7B0C9EAA-D7A9-4656-87F0-94C42BF7B7C9}"/>
-              </a:ext>
-            </a:extLst>
-          </p:cNvPr>
-          <p:cNvSpPr>
-            <a:spLocks xmlns:a="http://schemas.openxmlformats.org/drawingml/2006/main" noGrp="1"/>
-          </p:cNvSpPr>
-          <p:nvPr/>
-        </p:nvSpPr>
-        <p:spPr>
-          <a:xfrm xmlns:a="http://schemas.openxmlformats.org/drawingml/2006/main">
-            <a:off x="533400" y="4000500"/>
-            <a:ext cx="5410200" cy="1781175"/>
+                <a16:creationId xmlns:a16="http://schemas.microsoft.com/office/drawing/2014/main" id="{4FB29B18-E1BF-49A8-9D1A-8DD28FD914BA}"/>
+              </a:ext>
+            </a:extLst>
+          </p:cNvPr>
+          <p:cNvSpPr>
+            <a:spLocks xmlns:a="http://schemas.openxmlformats.org/drawingml/2006/main" noGrp="1"/>
+          </p:cNvSpPr>
+          <p:nvPr/>
+        </p:nvSpPr>
+        <p:spPr>
+          <a:xfrm xmlns:a="http://schemas.openxmlformats.org/drawingml/2006/main">
+            <a:off x="533400" y="3924300"/>
+            <a:ext cx="5410200" cy="1704975"/>
           </a:xfrm>
           <a:prstGeom xmlns:a="http://schemas.openxmlformats.org/drawingml/2006/main" prst="rect">
             <a:avLst/>
@@ -7495,23 +6742,23 @@
           <p:cNvPr id="12" name="">
             <a:extLst xmlns:a="http://schemas.openxmlformats.org/drawingml/2006/main">
               <a:ext uri="{FF2B5EF4-FFF2-40B4-BE49-F238E27FC236}">
-                <a16:creationId xmlns:a16="http://schemas.microsoft.com/office/drawing/2014/main" id="{E89B2891-BBD0-4A2C-B4F2-EF2E6385A890}"/>
-              </a:ext>
-            </a:extLst>
-          </p:cNvPr>
-          <p:cNvSpPr>
-            <a:spLocks xmlns:a="http://schemas.openxmlformats.org/drawingml/2006/main" noGrp="1"/>
-          </p:cNvSpPr>
-          <p:nvPr/>
-        </p:nvSpPr>
-        <p:spPr>
-          <a:xfrm xmlns:a="http://schemas.openxmlformats.org/drawingml/2006/main">
-            <a:off x="6153150" y="3486150"/>
-            <a:ext cx="5486400" cy="2257425"/>
+                <a16:creationId xmlns:a16="http://schemas.microsoft.com/office/drawing/2014/main" id="{C1ACD005-C233-4A6B-88D5-56AA1BFF5744}"/>
+              </a:ext>
+            </a:extLst>
+          </p:cNvPr>
+          <p:cNvSpPr>
+            <a:spLocks xmlns:a="http://schemas.openxmlformats.org/drawingml/2006/main" noGrp="1"/>
+          </p:cNvSpPr>
+          <p:nvPr/>
+        </p:nvSpPr>
+        <p:spPr>
+          <a:xfrm xmlns:a="http://schemas.openxmlformats.org/drawingml/2006/main">
+            <a:off x="6153150" y="3409950"/>
+            <a:ext cx="5486400" cy="2181225"/>
           </a:xfrm>
           <a:prstGeom xmlns:a="http://schemas.openxmlformats.org/drawingml/2006/main" prst="roundRect">
             <a:avLst>
-              <a:gd name="adj" fmla="val 3376"/>
+              <a:gd name="adj" fmla="val 3493"/>
             </a:avLst>
           </a:prstGeom>
           <a:solidFill xmlns:a="http://schemas.openxmlformats.org/drawingml/2006/main">
@@ -7527,18 +6774,18 @@
           <p:cNvPr id="13" name="">
             <a:extLst xmlns:a="http://schemas.openxmlformats.org/drawingml/2006/main">
               <a:ext uri="{FF2B5EF4-FFF2-40B4-BE49-F238E27FC236}">
-                <a16:creationId xmlns:a16="http://schemas.microsoft.com/office/drawing/2014/main" id="{78F0AE77-5B7C-4782-AC21-0401A8FDAB8B}"/>
-              </a:ext>
-            </a:extLst>
-          </p:cNvPr>
-          <p:cNvSpPr>
-            <a:spLocks xmlns:a="http://schemas.openxmlformats.org/drawingml/2006/main" noGrp="1"/>
-          </p:cNvSpPr>
-          <p:nvPr/>
-        </p:nvSpPr>
-        <p:spPr>
-          <a:xfrm xmlns:a="http://schemas.openxmlformats.org/drawingml/2006/main">
-            <a:off x="6248400" y="3562350"/>
+                <a16:creationId xmlns:a16="http://schemas.microsoft.com/office/drawing/2014/main" id="{01924DD9-0499-41BB-BA81-115B15ECE5FB}"/>
+              </a:ext>
+            </a:extLst>
+          </p:cNvPr>
+          <p:cNvSpPr>
+            <a:spLocks xmlns:a="http://schemas.openxmlformats.org/drawingml/2006/main" noGrp="1"/>
+          </p:cNvSpPr>
+          <p:nvPr/>
+        </p:nvSpPr>
+        <p:spPr>
+          <a:xfrm xmlns:a="http://schemas.openxmlformats.org/drawingml/2006/main">
+            <a:off x="6248400" y="3486150"/>
             <a:ext cx="5410200" cy="438150"/>
           </a:xfrm>
           <a:prstGeom xmlns:a="http://schemas.openxmlformats.org/drawingml/2006/main" prst="rect">
@@ -7584,19 +6831,19 @@
           <p:cNvPr id="14" name="">
             <a:extLst xmlns:a="http://schemas.openxmlformats.org/drawingml/2006/main">
               <a:ext uri="{FF2B5EF4-FFF2-40B4-BE49-F238E27FC236}">
-                <a16:creationId xmlns:a16="http://schemas.microsoft.com/office/drawing/2014/main" id="{48CE518A-2CF3-45B7-8D70-22F37E2F9317}"/>
-              </a:ext>
-            </a:extLst>
-          </p:cNvPr>
-          <p:cNvSpPr>
-            <a:spLocks xmlns:a="http://schemas.openxmlformats.org/drawingml/2006/main" noGrp="1"/>
-          </p:cNvSpPr>
-          <p:nvPr/>
-        </p:nvSpPr>
-        <p:spPr>
-          <a:xfrm xmlns:a="http://schemas.openxmlformats.org/drawingml/2006/main">
-            <a:off x="6248400" y="4000500"/>
-            <a:ext cx="5410200" cy="1781175"/>
+                <a16:creationId xmlns:a16="http://schemas.microsoft.com/office/drawing/2014/main" id="{48A8B5F6-E687-4C36-BD33-8CD7AEE31E61}"/>
+              </a:ext>
+            </a:extLst>
+          </p:cNvPr>
+          <p:cNvSpPr>
+            <a:spLocks xmlns:a="http://schemas.openxmlformats.org/drawingml/2006/main" noGrp="1"/>
+          </p:cNvSpPr>
+          <p:nvPr/>
+        </p:nvSpPr>
+        <p:spPr>
+          <a:xfrm xmlns:a="http://schemas.openxmlformats.org/drawingml/2006/main">
+            <a:off x="6248400" y="3924300"/>
+            <a:ext cx="5410200" cy="1704975"/>
           </a:xfrm>
           <a:prstGeom xmlns:a="http://schemas.openxmlformats.org/drawingml/2006/main" prst="rect">
             <a:avLst/>
@@ -7649,7 +6896,7 @@
           <p:cNvPr id="15" name="">
             <a:extLst xmlns:a="http://schemas.openxmlformats.org/drawingml/2006/main">
               <a:ext uri="{FF2B5EF4-FFF2-40B4-BE49-F238E27FC236}">
-                <a16:creationId xmlns:a16="http://schemas.microsoft.com/office/drawing/2014/main" id="{94392199-3847-4A4E-8374-13250582ED10}"/>
+                <a16:creationId xmlns:a16="http://schemas.microsoft.com/office/drawing/2014/main" id="{8D466D0F-F31E-4ACA-899B-AAE9D8459629}"/>
               </a:ext>
             </a:extLst>
           </p:cNvPr>
@@ -7692,7 +6939,7 @@
             </a:r>
             <a:r>
               <a:rPr>
-                <a:hlinkClick xmlns:r="http://schemas.openxmlformats.org/officeDocument/2006/relationships" r:id="R6b8219ff0f5f4430"/>
+                <a:hlinkClick xmlns:r="http://schemas.openxmlformats.org/officeDocument/2006/relationships" r:id="R667a62f4d93c4485"/>
               </a:rPr>
               <a:t>Quelle öffnen (podcasts.apple.com)</a:t>
             </a:r>
@@ -7707,7 +6954,7 @@
           <p:cNvPr id="16" name="">
             <a:extLst xmlns:a="http://schemas.openxmlformats.org/drawingml/2006/main">
               <a:ext uri="{FF2B5EF4-FFF2-40B4-BE49-F238E27FC236}">
-                <a16:creationId xmlns:a16="http://schemas.microsoft.com/office/drawing/2014/main" id="{3AC6BD78-45E9-46A0-BECD-58FB6B7D8047}"/>
+                <a16:creationId xmlns:a16="http://schemas.microsoft.com/office/drawing/2014/main" id="{B1957F08-BDB8-492A-BA9A-A103B300901B}"/>
               </a:ext>
             </a:extLst>
           </p:cNvPr>
@@ -7762,14 +7009,14 @@
     </p:spTree>
     <p:extLst>
       <p:ext uri="{BB962C8B-B14F-4D97-AF65-F5344CB8AC3E}">
-        <p14:creationId xmlns:p14="http://schemas.microsoft.com/office/powerpoint/2010/main" val="1574958815"/>
+        <p14:creationId xmlns:p14="http://schemas.microsoft.com/office/powerpoint/2010/main" val="1673239061"/>
       </p:ext>
     </p:extLst>
   </p:cSld>
 </p:sld>
 </file>
 
-<file path=ppt/slides/slide17.xml><?xml version="1.0" encoding="utf-8"?>
+<file path=ppt/slides/slide16.xml><?xml version="1.0" encoding="utf-8"?>
 <p:sld xmlns:p="http://schemas.openxmlformats.org/presentationml/2006/main">
   <p:cSld>
     <p:bg>
@@ -7793,7 +7040,7 @@
           <p:cNvPr id="14" name="">
             <a:extLst xmlns:a="http://schemas.openxmlformats.org/drawingml/2006/main">
               <a:ext uri="{FF2B5EF4-FFF2-40B4-BE49-F238E27FC236}">
-                <a16:creationId xmlns:a16="http://schemas.microsoft.com/office/drawing/2014/main" id="{E595AD5C-7A83-4101-9C63-9BEEC5CE97BF}"/>
+                <a16:creationId xmlns:a16="http://schemas.microsoft.com/office/drawing/2014/main" id="{2663AE7C-C8E7-4062-A159-DAE9F24403A4}"/>
               </a:ext>
             </a:extLst>
           </p:cNvPr>
@@ -7850,7 +7097,7 @@
           <p:cNvPr id="2" name="">
             <a:extLst xmlns:a="http://schemas.openxmlformats.org/drawingml/2006/main">
               <a:ext uri="{FF2B5EF4-FFF2-40B4-BE49-F238E27FC236}">
-                <a16:creationId xmlns:a16="http://schemas.microsoft.com/office/drawing/2014/main" id="{6671EB4D-8A56-4BB3-8BFD-BA5748946A09}"/>
+                <a16:creationId xmlns:a16="http://schemas.microsoft.com/office/drawing/2014/main" id="{0F3DDDC8-54BD-469A-A29E-16955DEF73EA}"/>
               </a:ext>
             </a:extLst>
           </p:cNvPr>
@@ -7907,7 +7154,7 @@
           <p:cNvPr id="3" name="">
             <a:extLst xmlns:a="http://schemas.openxmlformats.org/drawingml/2006/main">
               <a:ext uri="{FF2B5EF4-FFF2-40B4-BE49-F238E27FC236}">
-                <a16:creationId xmlns:a16="http://schemas.microsoft.com/office/drawing/2014/main" id="{8960B85C-FF47-45EB-826A-DAE156041068}"/>
+                <a16:creationId xmlns:a16="http://schemas.microsoft.com/office/drawing/2014/main" id="{4EDBDE14-3269-4D3D-A791-06EEF959E5AC}"/>
               </a:ext>
             </a:extLst>
           </p:cNvPr>
@@ -7919,11 +7166,11 @@
         <p:spPr>
           <a:xfrm xmlns:a="http://schemas.openxmlformats.org/drawingml/2006/main">
             <a:off x="438150" y="1381125"/>
-            <a:ext cx="5486400" cy="1514475"/>
+            <a:ext cx="5486400" cy="1190625"/>
           </a:xfrm>
           <a:prstGeom xmlns:a="http://schemas.openxmlformats.org/drawingml/2006/main" prst="roundRect">
             <a:avLst>
-              <a:gd name="adj" fmla="val 5031"/>
+              <a:gd name="adj" fmla="val 6400"/>
             </a:avLst>
           </a:prstGeom>
           <a:solidFill xmlns:a="http://schemas.openxmlformats.org/drawingml/2006/main">
@@ -7939,7 +7186,7 @@
           <p:cNvPr id="4" name="">
             <a:extLst xmlns:a="http://schemas.openxmlformats.org/drawingml/2006/main">
               <a:ext uri="{FF2B5EF4-FFF2-40B4-BE49-F238E27FC236}">
-                <a16:creationId xmlns:a16="http://schemas.microsoft.com/office/drawing/2014/main" id="{BCB11275-B469-404B-9A4F-7DD2D14BB1E3}"/>
+                <a16:creationId xmlns:a16="http://schemas.microsoft.com/office/drawing/2014/main" id="{9DAD59FF-E135-42C7-9006-8293C9E0F352}"/>
               </a:ext>
             </a:extLst>
           </p:cNvPr>
@@ -7996,7 +7243,7 @@
           <p:cNvPr id="5" name="">
             <a:extLst xmlns:a="http://schemas.openxmlformats.org/drawingml/2006/main">
               <a:ext uri="{FF2B5EF4-FFF2-40B4-BE49-F238E27FC236}">
-                <a16:creationId xmlns:a16="http://schemas.microsoft.com/office/drawing/2014/main" id="{FDDC686A-CF52-45C8-87D8-6D483AD96DDA}"/>
+                <a16:creationId xmlns:a16="http://schemas.microsoft.com/office/drawing/2014/main" id="{BD9E720D-E9A3-48D4-8014-2B902E3DACC2}"/>
               </a:ext>
             </a:extLst>
           </p:cNvPr>
@@ -8008,7 +7255,7 @@
         <p:spPr>
           <a:xfrm xmlns:a="http://schemas.openxmlformats.org/drawingml/2006/main">
             <a:off x="533400" y="1895475"/>
-            <a:ext cx="5410200" cy="1038225"/>
+            <a:ext cx="5410200" cy="714375"/>
           </a:xfrm>
           <a:prstGeom xmlns:a="http://schemas.openxmlformats.org/drawingml/2006/main" prst="rect">
             <a:avLst/>
@@ -8045,7 +7292,7 @@
           <p:cNvPr id="6" name="">
             <a:extLst xmlns:a="http://schemas.openxmlformats.org/drawingml/2006/main">
               <a:ext uri="{FF2B5EF4-FFF2-40B4-BE49-F238E27FC236}">
-                <a16:creationId xmlns:a16="http://schemas.microsoft.com/office/drawing/2014/main" id="{A03350B0-0C3E-47A2-B33E-92BAAE82D738}"/>
+                <a16:creationId xmlns:a16="http://schemas.microsoft.com/office/drawing/2014/main" id="{FFF9412E-0F13-44E0-B94D-E9A4BD497A48}"/>
               </a:ext>
             </a:extLst>
           </p:cNvPr>
@@ -8057,11 +7304,11 @@
         <p:spPr>
           <a:xfrm xmlns:a="http://schemas.openxmlformats.org/drawingml/2006/main">
             <a:off x="6153150" y="1381125"/>
-            <a:ext cx="5486400" cy="1514475"/>
+            <a:ext cx="5486400" cy="1190625"/>
           </a:xfrm>
           <a:prstGeom xmlns:a="http://schemas.openxmlformats.org/drawingml/2006/main" prst="roundRect">
             <a:avLst>
-              <a:gd name="adj" fmla="val 5031"/>
+              <a:gd name="adj" fmla="val 6400"/>
             </a:avLst>
           </a:prstGeom>
           <a:solidFill xmlns:a="http://schemas.openxmlformats.org/drawingml/2006/main">
@@ -8077,7 +7324,7 @@
           <p:cNvPr id="7" name="">
             <a:extLst xmlns:a="http://schemas.openxmlformats.org/drawingml/2006/main">
               <a:ext uri="{FF2B5EF4-FFF2-40B4-BE49-F238E27FC236}">
-                <a16:creationId xmlns:a16="http://schemas.microsoft.com/office/drawing/2014/main" id="{88425C8A-D4BD-474A-A03D-6736372CE39D}"/>
+                <a16:creationId xmlns:a16="http://schemas.microsoft.com/office/drawing/2014/main" id="{6D044DFD-A084-40A4-B49C-DBEEE708509E}"/>
               </a:ext>
             </a:extLst>
           </p:cNvPr>
@@ -8134,7 +7381,7 @@
           <p:cNvPr id="8" name="">
             <a:extLst xmlns:a="http://schemas.openxmlformats.org/drawingml/2006/main">
               <a:ext uri="{FF2B5EF4-FFF2-40B4-BE49-F238E27FC236}">
-                <a16:creationId xmlns:a16="http://schemas.microsoft.com/office/drawing/2014/main" id="{3CFFEF2D-6CEE-4025-84CD-E5F6E8FD22F4}"/>
+                <a16:creationId xmlns:a16="http://schemas.microsoft.com/office/drawing/2014/main" id="{13E48A45-136A-46A0-BC3B-EE4D11181BCA}"/>
               </a:ext>
             </a:extLst>
           </p:cNvPr>
@@ -8146,7 +7393,7 @@
         <p:spPr>
           <a:xfrm xmlns:a="http://schemas.openxmlformats.org/drawingml/2006/main">
             <a:off x="6248400" y="1895475"/>
-            <a:ext cx="5410200" cy="1038225"/>
+            <a:ext cx="5410200" cy="714375"/>
           </a:xfrm>
           <a:prstGeom xmlns:a="http://schemas.openxmlformats.org/drawingml/2006/main" prst="rect">
             <a:avLst/>
@@ -8183,23 +7430,23 @@
           <p:cNvPr id="9" name="">
             <a:extLst xmlns:a="http://schemas.openxmlformats.org/drawingml/2006/main">
               <a:ext uri="{FF2B5EF4-FFF2-40B4-BE49-F238E27FC236}">
-                <a16:creationId xmlns:a16="http://schemas.microsoft.com/office/drawing/2014/main" id="{BFBA2819-B196-4C7D-AFB0-1747C29AA000}"/>
-              </a:ext>
-            </a:extLst>
-          </p:cNvPr>
-          <p:cNvSpPr>
-            <a:spLocks xmlns:a="http://schemas.openxmlformats.org/drawingml/2006/main" noGrp="1"/>
-          </p:cNvSpPr>
-          <p:nvPr/>
-        </p:nvSpPr>
-        <p:spPr>
-          <a:xfrm xmlns:a="http://schemas.openxmlformats.org/drawingml/2006/main">
-            <a:off x="438150" y="2990850"/>
-            <a:ext cx="5486400" cy="1266825"/>
+                <a16:creationId xmlns:a16="http://schemas.microsoft.com/office/drawing/2014/main" id="{D96BC756-1784-433E-BDF8-8538D9388259}"/>
+              </a:ext>
+            </a:extLst>
+          </p:cNvPr>
+          <p:cNvSpPr>
+            <a:spLocks xmlns:a="http://schemas.openxmlformats.org/drawingml/2006/main" noGrp="1"/>
+          </p:cNvSpPr>
+          <p:nvPr/>
+        </p:nvSpPr>
+        <p:spPr>
+          <a:xfrm xmlns:a="http://schemas.openxmlformats.org/drawingml/2006/main">
+            <a:off x="438150" y="2667000"/>
+            <a:ext cx="11201400" cy="942975"/>
           </a:xfrm>
           <a:prstGeom xmlns:a="http://schemas.openxmlformats.org/drawingml/2006/main" prst="roundRect">
             <a:avLst>
-              <a:gd name="adj" fmla="val 6015"/>
+              <a:gd name="adj" fmla="val 8081"/>
             </a:avLst>
           </a:prstGeom>
           <a:solidFill xmlns:a="http://schemas.openxmlformats.org/drawingml/2006/main">
@@ -8215,19 +7462,19 @@
           <p:cNvPr id="10" name="">
             <a:extLst xmlns:a="http://schemas.openxmlformats.org/drawingml/2006/main">
               <a:ext uri="{FF2B5EF4-FFF2-40B4-BE49-F238E27FC236}">
-                <a16:creationId xmlns:a16="http://schemas.microsoft.com/office/drawing/2014/main" id="{1236076C-6278-4C1F-BAAF-C512FDC68697}"/>
-              </a:ext>
-            </a:extLst>
-          </p:cNvPr>
-          <p:cNvSpPr>
-            <a:spLocks xmlns:a="http://schemas.openxmlformats.org/drawingml/2006/main" noGrp="1"/>
-          </p:cNvSpPr>
-          <p:nvPr/>
-        </p:nvSpPr>
-        <p:spPr>
-          <a:xfrm xmlns:a="http://schemas.openxmlformats.org/drawingml/2006/main">
-            <a:off x="533400" y="3067050"/>
-            <a:ext cx="5410200" cy="438150"/>
+                <a16:creationId xmlns:a16="http://schemas.microsoft.com/office/drawing/2014/main" id="{2634C538-464F-40BB-8034-85B11B64FDE3}"/>
+              </a:ext>
+            </a:extLst>
+          </p:cNvPr>
+          <p:cNvSpPr>
+            <a:spLocks xmlns:a="http://schemas.openxmlformats.org/drawingml/2006/main" noGrp="1"/>
+          </p:cNvSpPr>
+          <p:nvPr/>
+        </p:nvSpPr>
+        <p:spPr>
+          <a:xfrm xmlns:a="http://schemas.openxmlformats.org/drawingml/2006/main">
+            <a:off x="533400" y="2743200"/>
+            <a:ext cx="11125200" cy="438150"/>
           </a:xfrm>
           <a:prstGeom xmlns:a="http://schemas.openxmlformats.org/drawingml/2006/main" prst="rect">
             <a:avLst/>
@@ -8272,19 +7519,19 @@
           <p:cNvPr id="11" name="">
             <a:extLst xmlns:a="http://schemas.openxmlformats.org/drawingml/2006/main">
               <a:ext uri="{FF2B5EF4-FFF2-40B4-BE49-F238E27FC236}">
-                <a16:creationId xmlns:a16="http://schemas.microsoft.com/office/drawing/2014/main" id="{40F91C80-8481-4F40-9379-7AE948A74943}"/>
-              </a:ext>
-            </a:extLst>
-          </p:cNvPr>
-          <p:cNvSpPr>
-            <a:spLocks xmlns:a="http://schemas.openxmlformats.org/drawingml/2006/main" noGrp="1"/>
-          </p:cNvSpPr>
-          <p:nvPr/>
-        </p:nvSpPr>
-        <p:spPr>
-          <a:xfrm xmlns:a="http://schemas.openxmlformats.org/drawingml/2006/main">
-            <a:off x="533400" y="3505200"/>
-            <a:ext cx="5410200" cy="790575"/>
+                <a16:creationId xmlns:a16="http://schemas.microsoft.com/office/drawing/2014/main" id="{46905DC3-A04C-4E57-A573-D252CDC56231}"/>
+              </a:ext>
+            </a:extLst>
+          </p:cNvPr>
+          <p:cNvSpPr>
+            <a:spLocks xmlns:a="http://schemas.openxmlformats.org/drawingml/2006/main" noGrp="1"/>
+          </p:cNvSpPr>
+          <p:nvPr/>
+        </p:nvSpPr>
+        <p:spPr>
+          <a:xfrm xmlns:a="http://schemas.openxmlformats.org/drawingml/2006/main">
+            <a:off x="533400" y="3181350"/>
+            <a:ext cx="11125200" cy="466725"/>
           </a:xfrm>
           <a:prstGeom xmlns:a="http://schemas.openxmlformats.org/drawingml/2006/main" prst="rect">
             <a:avLst/>
@@ -8321,7 +7568,7 @@
           <p:cNvPr id="12" name="">
             <a:extLst xmlns:a="http://schemas.openxmlformats.org/drawingml/2006/main">
               <a:ext uri="{FF2B5EF4-FFF2-40B4-BE49-F238E27FC236}">
-                <a16:creationId xmlns:a16="http://schemas.microsoft.com/office/drawing/2014/main" id="{51AEE4DC-FB10-46AB-A448-34BAD6726ADA}"/>
+                <a16:creationId xmlns:a16="http://schemas.microsoft.com/office/drawing/2014/main" id="{ABE0BDEF-C167-415E-8BDA-4C23612F7531}"/>
               </a:ext>
             </a:extLst>
           </p:cNvPr>
@@ -8370,7 +7617,7 @@
           <p:cNvPr id="13" name="">
             <a:extLst xmlns:a="http://schemas.openxmlformats.org/drawingml/2006/main">
               <a:ext uri="{FF2B5EF4-FFF2-40B4-BE49-F238E27FC236}">
-                <a16:creationId xmlns:a16="http://schemas.microsoft.com/office/drawing/2014/main" id="{25F41244-F550-4710-B0AD-5F0730A71337}"/>
+                <a16:creationId xmlns:a16="http://schemas.microsoft.com/office/drawing/2014/main" id="{CF75B00F-55F2-459E-B0C3-9D844B3D1B75}"/>
               </a:ext>
             </a:extLst>
           </p:cNvPr>
@@ -8425,7 +7672,7 @@
     </p:spTree>
     <p:extLst>
       <p:ext uri="{BB962C8B-B14F-4D97-AF65-F5344CB8AC3E}">
-        <p14:creationId xmlns:p14="http://schemas.microsoft.com/office/powerpoint/2010/main" val="1323588415"/>
+        <p14:creationId xmlns:p14="http://schemas.microsoft.com/office/powerpoint/2010/main" val="2104712989"/>
       </p:ext>
     </p:extLst>
   </p:cSld>
@@ -8456,7 +7703,7 @@
           <p:cNvPr id="7" name="">
             <a:extLst xmlns:a="http://schemas.openxmlformats.org/drawingml/2006/main">
               <a:ext uri="{FF2B5EF4-FFF2-40B4-BE49-F238E27FC236}">
-                <a16:creationId xmlns:a16="http://schemas.microsoft.com/office/drawing/2014/main" id="{280FAB0E-A594-4F24-8437-375B48BBA0F3}"/>
+                <a16:creationId xmlns:a16="http://schemas.microsoft.com/office/drawing/2014/main" id="{52641DD7-5AA0-4029-9EBE-6A1A70FDC07A}"/>
               </a:ext>
             </a:extLst>
           </p:cNvPr>
@@ -8513,7 +7760,7 @@
           <p:cNvPr id="2" name="">
             <a:extLst xmlns:a="http://schemas.openxmlformats.org/drawingml/2006/main">
               <a:ext uri="{FF2B5EF4-FFF2-40B4-BE49-F238E27FC236}">
-                <a16:creationId xmlns:a16="http://schemas.microsoft.com/office/drawing/2014/main" id="{F2D88D2B-CE0C-4DD0-A4A0-BEB1520A142E}"/>
+                <a16:creationId xmlns:a16="http://schemas.microsoft.com/office/drawing/2014/main" id="{6CA008F9-5363-4B3E-A5F9-4DBF56C10749}"/>
               </a:ext>
             </a:extLst>
           </p:cNvPr>
@@ -8570,7 +7817,7 @@
           <p:cNvPr id="3" name="">
             <a:extLst xmlns:a="http://schemas.openxmlformats.org/drawingml/2006/main">
               <a:ext uri="{FF2B5EF4-FFF2-40B4-BE49-F238E27FC236}">
-                <a16:creationId xmlns:a16="http://schemas.microsoft.com/office/drawing/2014/main" id="{053C37DE-DCF9-47AA-B833-9292C5FC3FC3}"/>
+                <a16:creationId xmlns:a16="http://schemas.microsoft.com/office/drawing/2014/main" id="{F67DA658-2F9F-4B78-8607-CE5B9CAA1833}"/>
               </a:ext>
             </a:extLst>
           </p:cNvPr>
@@ -8627,7 +7874,7 @@
           <p:cNvPr id="4" name="">
             <a:extLst xmlns:a="http://schemas.openxmlformats.org/drawingml/2006/main">
               <a:ext uri="{FF2B5EF4-FFF2-40B4-BE49-F238E27FC236}">
-                <a16:creationId xmlns:a16="http://schemas.microsoft.com/office/drawing/2014/main" id="{4A5CF69A-1B44-449C-BDD5-1700788B68D5}"/>
+                <a16:creationId xmlns:a16="http://schemas.microsoft.com/office/drawing/2014/main" id="{C739AA3D-72B4-4698-A862-B9159ADAD2D1}"/>
               </a:ext>
             </a:extLst>
           </p:cNvPr>
@@ -8711,7 +7958,7 @@
           <p:cNvPr id="5" name="">
             <a:extLst xmlns:a="http://schemas.openxmlformats.org/drawingml/2006/main">
               <a:ext uri="{FF2B5EF4-FFF2-40B4-BE49-F238E27FC236}">
-                <a16:creationId xmlns:a16="http://schemas.microsoft.com/office/drawing/2014/main" id="{4806D2DF-CA3F-457C-B363-5B480DF8A8B8}"/>
+                <a16:creationId xmlns:a16="http://schemas.microsoft.com/office/drawing/2014/main" id="{9241BF5D-8723-4B94-90A1-2D39A0E70872}"/>
               </a:ext>
             </a:extLst>
           </p:cNvPr>
@@ -8760,7 +8007,7 @@
           <p:cNvPr id="6" name="">
             <a:extLst xmlns:a="http://schemas.openxmlformats.org/drawingml/2006/main">
               <a:ext uri="{FF2B5EF4-FFF2-40B4-BE49-F238E27FC236}">
-                <a16:creationId xmlns:a16="http://schemas.microsoft.com/office/drawing/2014/main" id="{B46976A7-C587-421E-8EFF-991ADCDB88C3}"/>
+                <a16:creationId xmlns:a16="http://schemas.microsoft.com/office/drawing/2014/main" id="{1AF22F54-9EC4-44F9-A3AB-D4F441BA7953}"/>
               </a:ext>
             </a:extLst>
           </p:cNvPr>
@@ -8815,7 +8062,7 @@
     </p:spTree>
     <p:extLst>
       <p:ext uri="{BB962C8B-B14F-4D97-AF65-F5344CB8AC3E}">
-        <p14:creationId xmlns:p14="http://schemas.microsoft.com/office/powerpoint/2010/main" val="675826677"/>
+        <p14:creationId xmlns:p14="http://schemas.microsoft.com/office/powerpoint/2010/main" val="1507647707"/>
       </p:ext>
     </p:extLst>
   </p:cSld>
@@ -8846,7 +8093,7 @@
           <p:cNvPr id="17" name="">
             <a:extLst xmlns:a="http://schemas.openxmlformats.org/drawingml/2006/main">
               <a:ext uri="{FF2B5EF4-FFF2-40B4-BE49-F238E27FC236}">
-                <a16:creationId xmlns:a16="http://schemas.microsoft.com/office/drawing/2014/main" id="{6A98E01C-0BE3-48CE-91FC-CA1AA64A56BE}"/>
+                <a16:creationId xmlns:a16="http://schemas.microsoft.com/office/drawing/2014/main" id="{6950DF18-727D-471D-A88B-AF23C9EF20B1}"/>
               </a:ext>
             </a:extLst>
           </p:cNvPr>
@@ -8903,7 +8150,7 @@
           <p:cNvPr id="2" name="">
             <a:extLst xmlns:a="http://schemas.openxmlformats.org/drawingml/2006/main">
               <a:ext uri="{FF2B5EF4-FFF2-40B4-BE49-F238E27FC236}">
-                <a16:creationId xmlns:a16="http://schemas.microsoft.com/office/drawing/2014/main" id="{DE7A0877-E2EC-4D5E-AC1A-021A302B10F8}"/>
+                <a16:creationId xmlns:a16="http://schemas.microsoft.com/office/drawing/2014/main" id="{C06607C7-DE8E-4962-A028-687934265A83}"/>
               </a:ext>
             </a:extLst>
           </p:cNvPr>
@@ -8960,7 +8207,7 @@
           <p:cNvPr id="3" name="">
             <a:extLst xmlns:a="http://schemas.openxmlformats.org/drawingml/2006/main">
               <a:ext uri="{FF2B5EF4-FFF2-40B4-BE49-F238E27FC236}">
-                <a16:creationId xmlns:a16="http://schemas.microsoft.com/office/drawing/2014/main" id="{58691625-C2F6-4ACF-8B98-B83979B0CC92}"/>
+                <a16:creationId xmlns:a16="http://schemas.microsoft.com/office/drawing/2014/main" id="{75DF6986-835E-4C45-949D-9813E6B2FF17}"/>
               </a:ext>
             </a:extLst>
           </p:cNvPr>
@@ -8972,11 +8219,11 @@
         <p:spPr>
           <a:xfrm xmlns:a="http://schemas.openxmlformats.org/drawingml/2006/main">
             <a:off x="438150" y="1381125"/>
-            <a:ext cx="5486400" cy="1762125"/>
+            <a:ext cx="5486400" cy="1685925"/>
           </a:xfrm>
           <a:prstGeom xmlns:a="http://schemas.openxmlformats.org/drawingml/2006/main" prst="roundRect">
             <a:avLst>
-              <a:gd name="adj" fmla="val 4324"/>
+              <a:gd name="adj" fmla="val 4520"/>
             </a:avLst>
           </a:prstGeom>
           <a:solidFill xmlns:a="http://schemas.openxmlformats.org/drawingml/2006/main">
@@ -8992,7 +8239,7 @@
           <p:cNvPr id="4" name="">
             <a:extLst xmlns:a="http://schemas.openxmlformats.org/drawingml/2006/main">
               <a:ext uri="{FF2B5EF4-FFF2-40B4-BE49-F238E27FC236}">
-                <a16:creationId xmlns:a16="http://schemas.microsoft.com/office/drawing/2014/main" id="{37E29C53-039D-43C3-BD13-8787AFBCAE7D}"/>
+                <a16:creationId xmlns:a16="http://schemas.microsoft.com/office/drawing/2014/main" id="{8759B94D-3A15-4720-BEC7-C4FAE8863179}"/>
               </a:ext>
             </a:extLst>
           </p:cNvPr>
@@ -9049,7 +8296,7 @@
           <p:cNvPr id="5" name="">
             <a:extLst xmlns:a="http://schemas.openxmlformats.org/drawingml/2006/main">
               <a:ext uri="{FF2B5EF4-FFF2-40B4-BE49-F238E27FC236}">
-                <a16:creationId xmlns:a16="http://schemas.microsoft.com/office/drawing/2014/main" id="{A1CDE23A-DADF-4F99-9E51-1206E3DF5540}"/>
+                <a16:creationId xmlns:a16="http://schemas.microsoft.com/office/drawing/2014/main" id="{300B887B-A69A-420E-8A4B-DE0106FD8D81}"/>
               </a:ext>
             </a:extLst>
           </p:cNvPr>
@@ -9061,7 +8308,7 @@
         <p:spPr>
           <a:xfrm xmlns:a="http://schemas.openxmlformats.org/drawingml/2006/main">
             <a:off x="533400" y="1895475"/>
-            <a:ext cx="5410200" cy="1285875"/>
+            <a:ext cx="5410200" cy="1209675"/>
           </a:xfrm>
           <a:prstGeom xmlns:a="http://schemas.openxmlformats.org/drawingml/2006/main" prst="rect">
             <a:avLst/>
@@ -9098,7 +8345,7 @@
           <p:cNvPr id="6" name="">
             <a:extLst xmlns:a="http://schemas.openxmlformats.org/drawingml/2006/main">
               <a:ext uri="{FF2B5EF4-FFF2-40B4-BE49-F238E27FC236}">
-                <a16:creationId xmlns:a16="http://schemas.microsoft.com/office/drawing/2014/main" id="{469AC852-F27E-43FA-B185-5E370B63C02D}"/>
+                <a16:creationId xmlns:a16="http://schemas.microsoft.com/office/drawing/2014/main" id="{457A505C-A670-4C60-B982-D0C18590A632}"/>
               </a:ext>
             </a:extLst>
           </p:cNvPr>
@@ -9110,11 +8357,11 @@
         <p:spPr>
           <a:xfrm xmlns:a="http://schemas.openxmlformats.org/drawingml/2006/main">
             <a:off x="6153150" y="1381125"/>
-            <a:ext cx="5486400" cy="1762125"/>
+            <a:ext cx="5486400" cy="1685925"/>
           </a:xfrm>
           <a:prstGeom xmlns:a="http://schemas.openxmlformats.org/drawingml/2006/main" prst="roundRect">
             <a:avLst>
-              <a:gd name="adj" fmla="val 4324"/>
+              <a:gd name="adj" fmla="val 4520"/>
             </a:avLst>
           </a:prstGeom>
           <a:solidFill xmlns:a="http://schemas.openxmlformats.org/drawingml/2006/main">
@@ -9130,7 +8377,7 @@
           <p:cNvPr id="7" name="">
             <a:extLst xmlns:a="http://schemas.openxmlformats.org/drawingml/2006/main">
               <a:ext uri="{FF2B5EF4-FFF2-40B4-BE49-F238E27FC236}">
-                <a16:creationId xmlns:a16="http://schemas.microsoft.com/office/drawing/2014/main" id="{C46342CD-F1B1-4D34-AA85-E274587757CA}"/>
+                <a16:creationId xmlns:a16="http://schemas.microsoft.com/office/drawing/2014/main" id="{50789BF2-6FA5-4A1A-B06C-AA161F8384F1}"/>
               </a:ext>
             </a:extLst>
           </p:cNvPr>
@@ -9187,7 +8434,7 @@
           <p:cNvPr id="8" name="">
             <a:extLst xmlns:a="http://schemas.openxmlformats.org/drawingml/2006/main">
               <a:ext uri="{FF2B5EF4-FFF2-40B4-BE49-F238E27FC236}">
-                <a16:creationId xmlns:a16="http://schemas.microsoft.com/office/drawing/2014/main" id="{BE870E9D-F30C-4130-9ED6-4885956EDCD0}"/>
+                <a16:creationId xmlns:a16="http://schemas.microsoft.com/office/drawing/2014/main" id="{A1A3F8C9-71BD-4623-AB62-1AD08FAF1325}"/>
               </a:ext>
             </a:extLst>
           </p:cNvPr>
@@ -9199,7 +8446,7 @@
         <p:spPr>
           <a:xfrm xmlns:a="http://schemas.openxmlformats.org/drawingml/2006/main">
             <a:off x="6248400" y="1895475"/>
-            <a:ext cx="5410200" cy="1285875"/>
+            <a:ext cx="5410200" cy="1209675"/>
           </a:xfrm>
           <a:prstGeom xmlns:a="http://schemas.openxmlformats.org/drawingml/2006/main" prst="rect">
             <a:avLst/>
@@ -9236,23 +8483,23 @@
           <p:cNvPr id="9" name="">
             <a:extLst xmlns:a="http://schemas.openxmlformats.org/drawingml/2006/main">
               <a:ext uri="{FF2B5EF4-FFF2-40B4-BE49-F238E27FC236}">
-                <a16:creationId xmlns:a16="http://schemas.microsoft.com/office/drawing/2014/main" id="{10ECEA66-C5B6-47E3-9AAA-6D5158519442}"/>
-              </a:ext>
-            </a:extLst>
-          </p:cNvPr>
-          <p:cNvSpPr>
-            <a:spLocks xmlns:a="http://schemas.openxmlformats.org/drawingml/2006/main" noGrp="1"/>
-          </p:cNvSpPr>
-          <p:nvPr/>
-        </p:nvSpPr>
-        <p:spPr>
-          <a:xfrm xmlns:a="http://schemas.openxmlformats.org/drawingml/2006/main">
-            <a:off x="438150" y="3238500"/>
-            <a:ext cx="5486400" cy="1762125"/>
+                <a16:creationId xmlns:a16="http://schemas.microsoft.com/office/drawing/2014/main" id="{B7188195-94FB-49A2-9139-C89EC08B72A2}"/>
+              </a:ext>
+            </a:extLst>
+          </p:cNvPr>
+          <p:cNvSpPr>
+            <a:spLocks xmlns:a="http://schemas.openxmlformats.org/drawingml/2006/main" noGrp="1"/>
+          </p:cNvSpPr>
+          <p:nvPr/>
+        </p:nvSpPr>
+        <p:spPr>
+          <a:xfrm xmlns:a="http://schemas.openxmlformats.org/drawingml/2006/main">
+            <a:off x="438150" y="3162300"/>
+            <a:ext cx="5486400" cy="1685925"/>
           </a:xfrm>
           <a:prstGeom xmlns:a="http://schemas.openxmlformats.org/drawingml/2006/main" prst="roundRect">
             <a:avLst>
-              <a:gd name="adj" fmla="val 4324"/>
+              <a:gd name="adj" fmla="val 4520"/>
             </a:avLst>
           </a:prstGeom>
           <a:solidFill xmlns:a="http://schemas.openxmlformats.org/drawingml/2006/main">
@@ -9268,18 +8515,18 @@
           <p:cNvPr id="10" name="">
             <a:extLst xmlns:a="http://schemas.openxmlformats.org/drawingml/2006/main">
               <a:ext uri="{FF2B5EF4-FFF2-40B4-BE49-F238E27FC236}">
-                <a16:creationId xmlns:a16="http://schemas.microsoft.com/office/drawing/2014/main" id="{34741956-E131-4E20-AC3B-D2B1CD724546}"/>
-              </a:ext>
-            </a:extLst>
-          </p:cNvPr>
-          <p:cNvSpPr>
-            <a:spLocks xmlns:a="http://schemas.openxmlformats.org/drawingml/2006/main" noGrp="1"/>
-          </p:cNvSpPr>
-          <p:nvPr/>
-        </p:nvSpPr>
-        <p:spPr>
-          <a:xfrm xmlns:a="http://schemas.openxmlformats.org/drawingml/2006/main">
-            <a:off x="533400" y="3314700"/>
+                <a16:creationId xmlns:a16="http://schemas.microsoft.com/office/drawing/2014/main" id="{759C6447-4919-46FE-AC33-8CF693C5A4C5}"/>
+              </a:ext>
+            </a:extLst>
+          </p:cNvPr>
+          <p:cNvSpPr>
+            <a:spLocks xmlns:a="http://schemas.openxmlformats.org/drawingml/2006/main" noGrp="1"/>
+          </p:cNvSpPr>
+          <p:nvPr/>
+        </p:nvSpPr>
+        <p:spPr>
+          <a:xfrm xmlns:a="http://schemas.openxmlformats.org/drawingml/2006/main">
+            <a:off x="533400" y="3238500"/>
             <a:ext cx="5410200" cy="438150"/>
           </a:xfrm>
           <a:prstGeom xmlns:a="http://schemas.openxmlformats.org/drawingml/2006/main" prst="rect">
@@ -9325,19 +8572,19 @@
           <p:cNvPr id="11" name="">
             <a:extLst xmlns:a="http://schemas.openxmlformats.org/drawingml/2006/main">
               <a:ext uri="{FF2B5EF4-FFF2-40B4-BE49-F238E27FC236}">
-                <a16:creationId xmlns:a16="http://schemas.microsoft.com/office/drawing/2014/main" id="{E588A30C-F4C1-4E28-9C29-60DAB81CE8D4}"/>
-              </a:ext>
-            </a:extLst>
-          </p:cNvPr>
-          <p:cNvSpPr>
-            <a:spLocks xmlns:a="http://schemas.openxmlformats.org/drawingml/2006/main" noGrp="1"/>
-          </p:cNvSpPr>
-          <p:nvPr/>
-        </p:nvSpPr>
-        <p:spPr>
-          <a:xfrm xmlns:a="http://schemas.openxmlformats.org/drawingml/2006/main">
-            <a:off x="533400" y="3752850"/>
-            <a:ext cx="5410200" cy="1285875"/>
+                <a16:creationId xmlns:a16="http://schemas.microsoft.com/office/drawing/2014/main" id="{89FA4860-7137-4BC6-8FD2-4D3787390BD5}"/>
+              </a:ext>
+            </a:extLst>
+          </p:cNvPr>
+          <p:cNvSpPr>
+            <a:spLocks xmlns:a="http://schemas.openxmlformats.org/drawingml/2006/main" noGrp="1"/>
+          </p:cNvSpPr>
+          <p:nvPr/>
+        </p:nvSpPr>
+        <p:spPr>
+          <a:xfrm xmlns:a="http://schemas.openxmlformats.org/drawingml/2006/main">
+            <a:off x="533400" y="3676650"/>
+            <a:ext cx="5410200" cy="1209675"/>
           </a:xfrm>
           <a:prstGeom xmlns:a="http://schemas.openxmlformats.org/drawingml/2006/main" prst="rect">
             <a:avLst/>
@@ -9374,23 +8621,23 @@
           <p:cNvPr id="12" name="">
             <a:extLst xmlns:a="http://schemas.openxmlformats.org/drawingml/2006/main">
               <a:ext uri="{FF2B5EF4-FFF2-40B4-BE49-F238E27FC236}">
-                <a16:creationId xmlns:a16="http://schemas.microsoft.com/office/drawing/2014/main" id="{E4CC89CB-7AA7-4E5D-9F0B-8D2030E0C985}"/>
-              </a:ext>
-            </a:extLst>
-          </p:cNvPr>
-          <p:cNvSpPr>
-            <a:spLocks xmlns:a="http://schemas.openxmlformats.org/drawingml/2006/main" noGrp="1"/>
-          </p:cNvSpPr>
-          <p:nvPr/>
-        </p:nvSpPr>
-        <p:spPr>
-          <a:xfrm xmlns:a="http://schemas.openxmlformats.org/drawingml/2006/main">
-            <a:off x="6153150" y="3238500"/>
-            <a:ext cx="5486400" cy="1762125"/>
+                <a16:creationId xmlns:a16="http://schemas.microsoft.com/office/drawing/2014/main" id="{906025EA-4A76-4F4E-9DAB-9343DE0177A3}"/>
+              </a:ext>
+            </a:extLst>
+          </p:cNvPr>
+          <p:cNvSpPr>
+            <a:spLocks xmlns:a="http://schemas.openxmlformats.org/drawingml/2006/main" noGrp="1"/>
+          </p:cNvSpPr>
+          <p:nvPr/>
+        </p:nvSpPr>
+        <p:spPr>
+          <a:xfrm xmlns:a="http://schemas.openxmlformats.org/drawingml/2006/main">
+            <a:off x="6153150" y="3162300"/>
+            <a:ext cx="5486400" cy="1685925"/>
           </a:xfrm>
           <a:prstGeom xmlns:a="http://schemas.openxmlformats.org/drawingml/2006/main" prst="roundRect">
             <a:avLst>
-              <a:gd name="adj" fmla="val 4324"/>
+              <a:gd name="adj" fmla="val 4520"/>
             </a:avLst>
           </a:prstGeom>
           <a:solidFill xmlns:a="http://schemas.openxmlformats.org/drawingml/2006/main">
@@ -9406,18 +8653,18 @@
           <p:cNvPr id="13" name="">
             <a:extLst xmlns:a="http://schemas.openxmlformats.org/drawingml/2006/main">
               <a:ext uri="{FF2B5EF4-FFF2-40B4-BE49-F238E27FC236}">
-                <a16:creationId xmlns:a16="http://schemas.microsoft.com/office/drawing/2014/main" id="{67581456-AEAE-4CBC-B4AC-DD065D8235E4}"/>
-              </a:ext>
-            </a:extLst>
-          </p:cNvPr>
-          <p:cNvSpPr>
-            <a:spLocks xmlns:a="http://schemas.openxmlformats.org/drawingml/2006/main" noGrp="1"/>
-          </p:cNvSpPr>
-          <p:nvPr/>
-        </p:nvSpPr>
-        <p:spPr>
-          <a:xfrm xmlns:a="http://schemas.openxmlformats.org/drawingml/2006/main">
-            <a:off x="6248400" y="3314700"/>
+                <a16:creationId xmlns:a16="http://schemas.microsoft.com/office/drawing/2014/main" id="{51A90D3C-67D8-419A-9035-77D72B63FDE7}"/>
+              </a:ext>
+            </a:extLst>
+          </p:cNvPr>
+          <p:cNvSpPr>
+            <a:spLocks xmlns:a="http://schemas.openxmlformats.org/drawingml/2006/main" noGrp="1"/>
+          </p:cNvSpPr>
+          <p:nvPr/>
+        </p:nvSpPr>
+        <p:spPr>
+          <a:xfrm xmlns:a="http://schemas.openxmlformats.org/drawingml/2006/main">
+            <a:off x="6248400" y="3238500"/>
             <a:ext cx="5410200" cy="438150"/>
           </a:xfrm>
           <a:prstGeom xmlns:a="http://schemas.openxmlformats.org/drawingml/2006/main" prst="rect">
@@ -9463,19 +8710,19 @@
           <p:cNvPr id="14" name="">
             <a:extLst xmlns:a="http://schemas.openxmlformats.org/drawingml/2006/main">
               <a:ext uri="{FF2B5EF4-FFF2-40B4-BE49-F238E27FC236}">
-                <a16:creationId xmlns:a16="http://schemas.microsoft.com/office/drawing/2014/main" id="{C575EC37-15AC-4FAD-989E-DE05BB7C6F7C}"/>
-              </a:ext>
-            </a:extLst>
-          </p:cNvPr>
-          <p:cNvSpPr>
-            <a:spLocks xmlns:a="http://schemas.openxmlformats.org/drawingml/2006/main" noGrp="1"/>
-          </p:cNvSpPr>
-          <p:nvPr/>
-        </p:nvSpPr>
-        <p:spPr>
-          <a:xfrm xmlns:a="http://schemas.openxmlformats.org/drawingml/2006/main">
-            <a:off x="6248400" y="3752850"/>
-            <a:ext cx="5410200" cy="1285875"/>
+                <a16:creationId xmlns:a16="http://schemas.microsoft.com/office/drawing/2014/main" id="{71EDAEF3-34DF-46F0-8813-75D32A162EF4}"/>
+              </a:ext>
+            </a:extLst>
+          </p:cNvPr>
+          <p:cNvSpPr>
+            <a:spLocks xmlns:a="http://schemas.openxmlformats.org/drawingml/2006/main" noGrp="1"/>
+          </p:cNvSpPr>
+          <p:nvPr/>
+        </p:nvSpPr>
+        <p:spPr>
+          <a:xfrm xmlns:a="http://schemas.openxmlformats.org/drawingml/2006/main">
+            <a:off x="6248400" y="3676650"/>
+            <a:ext cx="5410200" cy="1209675"/>
           </a:xfrm>
           <a:prstGeom xmlns:a="http://schemas.openxmlformats.org/drawingml/2006/main" prst="rect">
             <a:avLst/>
@@ -9512,7 +8759,7 @@
           <p:cNvPr id="15" name="">
             <a:extLst xmlns:a="http://schemas.openxmlformats.org/drawingml/2006/main">
               <a:ext uri="{FF2B5EF4-FFF2-40B4-BE49-F238E27FC236}">
-                <a16:creationId xmlns:a16="http://schemas.microsoft.com/office/drawing/2014/main" id="{437C57FB-D0A9-4D4E-862B-EB0B52469784}"/>
+                <a16:creationId xmlns:a16="http://schemas.microsoft.com/office/drawing/2014/main" id="{6A3C2746-AF9D-473F-B2F0-27F0497BA7BC}"/>
               </a:ext>
             </a:extLst>
           </p:cNvPr>
@@ -9561,7 +8808,7 @@
           <p:cNvPr id="16" name="">
             <a:extLst xmlns:a="http://schemas.openxmlformats.org/drawingml/2006/main">
               <a:ext uri="{FF2B5EF4-FFF2-40B4-BE49-F238E27FC236}">
-                <a16:creationId xmlns:a16="http://schemas.microsoft.com/office/drawing/2014/main" id="{B72521E1-665A-4093-B2F4-376942BD5809}"/>
+                <a16:creationId xmlns:a16="http://schemas.microsoft.com/office/drawing/2014/main" id="{5E0BF626-D9E6-4342-A23C-D4A26CF36634}"/>
               </a:ext>
             </a:extLst>
           </p:cNvPr>
@@ -9616,7 +8863,7 @@
     </p:spTree>
     <p:extLst>
       <p:ext uri="{BB962C8B-B14F-4D97-AF65-F5344CB8AC3E}">
-        <p14:creationId xmlns:p14="http://schemas.microsoft.com/office/powerpoint/2010/main" val="1982750048"/>
+        <p14:creationId xmlns:p14="http://schemas.microsoft.com/office/powerpoint/2010/main" val="1078187794"/>
       </p:ext>
     </p:extLst>
   </p:cSld>
@@ -9647,7 +8894,7 @@
           <p:cNvPr id="23" name="">
             <a:extLst xmlns:a="http://schemas.openxmlformats.org/drawingml/2006/main">
               <a:ext uri="{FF2B5EF4-FFF2-40B4-BE49-F238E27FC236}">
-                <a16:creationId xmlns:a16="http://schemas.microsoft.com/office/drawing/2014/main" id="{E97CC18F-3D4A-4009-9BA1-87D95F33EC96}"/>
+                <a16:creationId xmlns:a16="http://schemas.microsoft.com/office/drawing/2014/main" id="{4B7EA7A2-CC13-492D-9EFC-5F1996183527}"/>
               </a:ext>
             </a:extLst>
           </p:cNvPr>
@@ -9704,7 +8951,7 @@
           <p:cNvPr id="2" name="">
             <a:extLst xmlns:a="http://schemas.openxmlformats.org/drawingml/2006/main">
               <a:ext uri="{FF2B5EF4-FFF2-40B4-BE49-F238E27FC236}">
-                <a16:creationId xmlns:a16="http://schemas.microsoft.com/office/drawing/2014/main" id="{9815F3CD-1C99-485F-8FC5-3B88C89D7526}"/>
+                <a16:creationId xmlns:a16="http://schemas.microsoft.com/office/drawing/2014/main" id="{D372B280-BADC-43BB-B85A-DF28A00CEC8D}"/>
               </a:ext>
             </a:extLst>
           </p:cNvPr>
@@ -9761,7 +9008,7 @@
           <p:cNvPr id="3" name="">
             <a:extLst xmlns:a="http://schemas.openxmlformats.org/drawingml/2006/main">
               <a:ext uri="{FF2B5EF4-FFF2-40B4-BE49-F238E27FC236}">
-                <a16:creationId xmlns:a16="http://schemas.microsoft.com/office/drawing/2014/main" id="{983B6DA2-12B8-4887-8F6C-8FA9BF86EE74}"/>
+                <a16:creationId xmlns:a16="http://schemas.microsoft.com/office/drawing/2014/main" id="{40FF7AF1-25B9-4551-B4A3-A3810322B1A1}"/>
               </a:ext>
             </a:extLst>
           </p:cNvPr>
@@ -9773,11 +9020,11 @@
         <p:spPr>
           <a:xfrm xmlns:a="http://schemas.openxmlformats.org/drawingml/2006/main">
             <a:off x="438150" y="1381125"/>
-            <a:ext cx="5486400" cy="1514475"/>
+            <a:ext cx="3581400" cy="1933575"/>
           </a:xfrm>
           <a:prstGeom xmlns:a="http://schemas.openxmlformats.org/drawingml/2006/main" prst="roundRect">
             <a:avLst>
-              <a:gd name="adj" fmla="val 5031"/>
+              <a:gd name="adj" fmla="val 3941"/>
             </a:avLst>
           </a:prstGeom>
           <a:solidFill xmlns:a="http://schemas.openxmlformats.org/drawingml/2006/main">
@@ -9793,7 +9040,7 @@
           <p:cNvPr id="4" name="">
             <a:extLst xmlns:a="http://schemas.openxmlformats.org/drawingml/2006/main">
               <a:ext uri="{FF2B5EF4-FFF2-40B4-BE49-F238E27FC236}">
-                <a16:creationId xmlns:a16="http://schemas.microsoft.com/office/drawing/2014/main" id="{9837239D-C8C5-49A8-B914-4BE32654B225}"/>
+                <a16:creationId xmlns:a16="http://schemas.microsoft.com/office/drawing/2014/main" id="{2F308A44-8FC5-4067-892B-8EB886C036CF}"/>
               </a:ext>
             </a:extLst>
           </p:cNvPr>
@@ -9805,7 +9052,7 @@
         <p:spPr>
           <a:xfrm xmlns:a="http://schemas.openxmlformats.org/drawingml/2006/main">
             <a:off x="533400" y="1457325"/>
-            <a:ext cx="5410200" cy="438150"/>
+            <a:ext cx="3505200" cy="438150"/>
           </a:xfrm>
           <a:prstGeom xmlns:a="http://schemas.openxmlformats.org/drawingml/2006/main" prst="rect">
             <a:avLst/>
@@ -9850,7 +9097,7 @@
           <p:cNvPr id="5" name="">
             <a:extLst xmlns:a="http://schemas.openxmlformats.org/drawingml/2006/main">
               <a:ext uri="{FF2B5EF4-FFF2-40B4-BE49-F238E27FC236}">
-                <a16:creationId xmlns:a16="http://schemas.microsoft.com/office/drawing/2014/main" id="{28BF94B1-0AEF-4DDD-8706-46976E69D994}"/>
+                <a16:creationId xmlns:a16="http://schemas.microsoft.com/office/drawing/2014/main" id="{2D9ACA0D-C47C-4C0C-BD79-7EECB823CDB9}"/>
               </a:ext>
             </a:extLst>
           </p:cNvPr>
@@ -9862,7 +9109,7 @@
         <p:spPr>
           <a:xfrm xmlns:a="http://schemas.openxmlformats.org/drawingml/2006/main">
             <a:off x="533400" y="1895475"/>
-            <a:ext cx="5410200" cy="1038225"/>
+            <a:ext cx="3505200" cy="1457325"/>
           </a:xfrm>
           <a:prstGeom xmlns:a="http://schemas.openxmlformats.org/drawingml/2006/main" prst="rect">
             <a:avLst/>
@@ -9899,23 +9146,23 @@
           <p:cNvPr id="6" name="">
             <a:extLst xmlns:a="http://schemas.openxmlformats.org/drawingml/2006/main">
               <a:ext uri="{FF2B5EF4-FFF2-40B4-BE49-F238E27FC236}">
-                <a16:creationId xmlns:a16="http://schemas.microsoft.com/office/drawing/2014/main" id="{EDA764C4-4150-47D3-A037-46F59799914F}"/>
-              </a:ext>
-            </a:extLst>
-          </p:cNvPr>
-          <p:cNvSpPr>
-            <a:spLocks xmlns:a="http://schemas.openxmlformats.org/drawingml/2006/main" noGrp="1"/>
-          </p:cNvSpPr>
-          <p:nvPr/>
-        </p:nvSpPr>
-        <p:spPr>
-          <a:xfrm xmlns:a="http://schemas.openxmlformats.org/drawingml/2006/main">
-            <a:off x="6153150" y="1381125"/>
-            <a:ext cx="5486400" cy="1514475"/>
+                <a16:creationId xmlns:a16="http://schemas.microsoft.com/office/drawing/2014/main" id="{4F5A985A-A832-4959-ACCC-60ADAA188C65}"/>
+              </a:ext>
+            </a:extLst>
+          </p:cNvPr>
+          <p:cNvSpPr>
+            <a:spLocks xmlns:a="http://schemas.openxmlformats.org/drawingml/2006/main" noGrp="1"/>
+          </p:cNvSpPr>
+          <p:nvPr/>
+        </p:nvSpPr>
+        <p:spPr>
+          <a:xfrm xmlns:a="http://schemas.openxmlformats.org/drawingml/2006/main">
+            <a:off x="4248150" y="1381125"/>
+            <a:ext cx="3581400" cy="1933575"/>
           </a:xfrm>
           <a:prstGeom xmlns:a="http://schemas.openxmlformats.org/drawingml/2006/main" prst="roundRect">
             <a:avLst>
-              <a:gd name="adj" fmla="val 5031"/>
+              <a:gd name="adj" fmla="val 3941"/>
             </a:avLst>
           </a:prstGeom>
           <a:solidFill xmlns:a="http://schemas.openxmlformats.org/drawingml/2006/main">
@@ -9931,19 +9178,19 @@
           <p:cNvPr id="7" name="">
             <a:extLst xmlns:a="http://schemas.openxmlformats.org/drawingml/2006/main">
               <a:ext uri="{FF2B5EF4-FFF2-40B4-BE49-F238E27FC236}">
-                <a16:creationId xmlns:a16="http://schemas.microsoft.com/office/drawing/2014/main" id="{BC66C176-A485-442B-8495-DE3178F6D800}"/>
-              </a:ext>
-            </a:extLst>
-          </p:cNvPr>
-          <p:cNvSpPr>
-            <a:spLocks xmlns:a="http://schemas.openxmlformats.org/drawingml/2006/main" noGrp="1"/>
-          </p:cNvSpPr>
-          <p:nvPr/>
-        </p:nvSpPr>
-        <p:spPr>
-          <a:xfrm xmlns:a="http://schemas.openxmlformats.org/drawingml/2006/main">
-            <a:off x="6248400" y="1457325"/>
-            <a:ext cx="5410200" cy="438150"/>
+                <a16:creationId xmlns:a16="http://schemas.microsoft.com/office/drawing/2014/main" id="{B5E952A7-6F8D-4C0A-8F30-DA319E13C4F4}"/>
+              </a:ext>
+            </a:extLst>
+          </p:cNvPr>
+          <p:cNvSpPr>
+            <a:spLocks xmlns:a="http://schemas.openxmlformats.org/drawingml/2006/main" noGrp="1"/>
+          </p:cNvSpPr>
+          <p:nvPr/>
+        </p:nvSpPr>
+        <p:spPr>
+          <a:xfrm xmlns:a="http://schemas.openxmlformats.org/drawingml/2006/main">
+            <a:off x="4343400" y="1457325"/>
+            <a:ext cx="3505200" cy="438150"/>
           </a:xfrm>
           <a:prstGeom xmlns:a="http://schemas.openxmlformats.org/drawingml/2006/main" prst="rect">
             <a:avLst/>
@@ -9988,19 +9235,19 @@
           <p:cNvPr id="8" name="">
             <a:extLst xmlns:a="http://schemas.openxmlformats.org/drawingml/2006/main">
               <a:ext uri="{FF2B5EF4-FFF2-40B4-BE49-F238E27FC236}">
-                <a16:creationId xmlns:a16="http://schemas.microsoft.com/office/drawing/2014/main" id="{AF421661-3911-4897-B5DD-09F96096A5D5}"/>
-              </a:ext>
-            </a:extLst>
-          </p:cNvPr>
-          <p:cNvSpPr>
-            <a:spLocks xmlns:a="http://schemas.openxmlformats.org/drawingml/2006/main" noGrp="1"/>
-          </p:cNvSpPr>
-          <p:nvPr/>
-        </p:nvSpPr>
-        <p:spPr>
-          <a:xfrm xmlns:a="http://schemas.openxmlformats.org/drawingml/2006/main">
-            <a:off x="6248400" y="1895475"/>
-            <a:ext cx="5410200" cy="1038225"/>
+                <a16:creationId xmlns:a16="http://schemas.microsoft.com/office/drawing/2014/main" id="{876F80FA-AF07-4629-9647-66224D5AF2F0}"/>
+              </a:ext>
+            </a:extLst>
+          </p:cNvPr>
+          <p:cNvSpPr>
+            <a:spLocks xmlns:a="http://schemas.openxmlformats.org/drawingml/2006/main" noGrp="1"/>
+          </p:cNvSpPr>
+          <p:nvPr/>
+        </p:nvSpPr>
+        <p:spPr>
+          <a:xfrm xmlns:a="http://schemas.openxmlformats.org/drawingml/2006/main">
+            <a:off x="4343400" y="1895475"/>
+            <a:ext cx="3505200" cy="1457325"/>
           </a:xfrm>
           <a:prstGeom xmlns:a="http://schemas.openxmlformats.org/drawingml/2006/main" prst="rect">
             <a:avLst/>
@@ -10037,23 +9284,23 @@
           <p:cNvPr id="9" name="">
             <a:extLst xmlns:a="http://schemas.openxmlformats.org/drawingml/2006/main">
               <a:ext uri="{FF2B5EF4-FFF2-40B4-BE49-F238E27FC236}">
-                <a16:creationId xmlns:a16="http://schemas.microsoft.com/office/drawing/2014/main" id="{2CCF9617-1096-4783-AA51-C91BC211700F}"/>
-              </a:ext>
-            </a:extLst>
-          </p:cNvPr>
-          <p:cNvSpPr>
-            <a:spLocks xmlns:a="http://schemas.openxmlformats.org/drawingml/2006/main" noGrp="1"/>
-          </p:cNvSpPr>
-          <p:nvPr/>
-        </p:nvSpPr>
-        <p:spPr>
-          <a:xfrm xmlns:a="http://schemas.openxmlformats.org/drawingml/2006/main">
-            <a:off x="438150" y="2990850"/>
-            <a:ext cx="5486400" cy="1266825"/>
+                <a16:creationId xmlns:a16="http://schemas.microsoft.com/office/drawing/2014/main" id="{E1ADF146-D443-4091-953D-DC3C4165E85A}"/>
+              </a:ext>
+            </a:extLst>
+          </p:cNvPr>
+          <p:cNvSpPr>
+            <a:spLocks xmlns:a="http://schemas.openxmlformats.org/drawingml/2006/main" noGrp="1"/>
+          </p:cNvSpPr>
+          <p:nvPr/>
+        </p:nvSpPr>
+        <p:spPr>
+          <a:xfrm xmlns:a="http://schemas.openxmlformats.org/drawingml/2006/main">
+            <a:off x="8058150" y="1381125"/>
+            <a:ext cx="3581400" cy="1933575"/>
           </a:xfrm>
           <a:prstGeom xmlns:a="http://schemas.openxmlformats.org/drawingml/2006/main" prst="roundRect">
             <a:avLst>
-              <a:gd name="adj" fmla="val 6015"/>
+              <a:gd name="adj" fmla="val 3941"/>
             </a:avLst>
           </a:prstGeom>
           <a:solidFill xmlns:a="http://schemas.openxmlformats.org/drawingml/2006/main">
@@ -10069,19 +9316,19 @@
           <p:cNvPr id="10" name="">
             <a:extLst xmlns:a="http://schemas.openxmlformats.org/drawingml/2006/main">
               <a:ext uri="{FF2B5EF4-FFF2-40B4-BE49-F238E27FC236}">
-                <a16:creationId xmlns:a16="http://schemas.microsoft.com/office/drawing/2014/main" id="{A60E2CCC-5AAA-4DF2-AF1E-2CC45C635C1F}"/>
-              </a:ext>
-            </a:extLst>
-          </p:cNvPr>
-          <p:cNvSpPr>
-            <a:spLocks xmlns:a="http://schemas.openxmlformats.org/drawingml/2006/main" noGrp="1"/>
-          </p:cNvSpPr>
-          <p:nvPr/>
-        </p:nvSpPr>
-        <p:spPr>
-          <a:xfrm xmlns:a="http://schemas.openxmlformats.org/drawingml/2006/main">
-            <a:off x="533400" y="3067050"/>
-            <a:ext cx="5410200" cy="438150"/>
+                <a16:creationId xmlns:a16="http://schemas.microsoft.com/office/drawing/2014/main" id="{D51672A7-A20B-4B8C-9F79-779EB36E1089}"/>
+              </a:ext>
+            </a:extLst>
+          </p:cNvPr>
+          <p:cNvSpPr>
+            <a:spLocks xmlns:a="http://schemas.openxmlformats.org/drawingml/2006/main" noGrp="1"/>
+          </p:cNvSpPr>
+          <p:nvPr/>
+        </p:nvSpPr>
+        <p:spPr>
+          <a:xfrm xmlns:a="http://schemas.openxmlformats.org/drawingml/2006/main">
+            <a:off x="8153400" y="1457325"/>
+            <a:ext cx="3505200" cy="438150"/>
           </a:xfrm>
           <a:prstGeom xmlns:a="http://schemas.openxmlformats.org/drawingml/2006/main" prst="rect">
             <a:avLst/>
@@ -10126,19 +9373,19 @@
           <p:cNvPr id="11" name="">
             <a:extLst xmlns:a="http://schemas.openxmlformats.org/drawingml/2006/main">
               <a:ext uri="{FF2B5EF4-FFF2-40B4-BE49-F238E27FC236}">
-                <a16:creationId xmlns:a16="http://schemas.microsoft.com/office/drawing/2014/main" id="{C863DD26-CEF1-4C69-B47D-2FCB8F54A5F8}"/>
-              </a:ext>
-            </a:extLst>
-          </p:cNvPr>
-          <p:cNvSpPr>
-            <a:spLocks xmlns:a="http://schemas.openxmlformats.org/drawingml/2006/main" noGrp="1"/>
-          </p:cNvSpPr>
-          <p:nvPr/>
-        </p:nvSpPr>
-        <p:spPr>
-          <a:xfrm xmlns:a="http://schemas.openxmlformats.org/drawingml/2006/main">
-            <a:off x="533400" y="3505200"/>
-            <a:ext cx="5410200" cy="790575"/>
+                <a16:creationId xmlns:a16="http://schemas.microsoft.com/office/drawing/2014/main" id="{12037210-FAF8-4177-A5DC-FC8AAAA7D928}"/>
+              </a:ext>
+            </a:extLst>
+          </p:cNvPr>
+          <p:cNvSpPr>
+            <a:spLocks xmlns:a="http://schemas.openxmlformats.org/drawingml/2006/main" noGrp="1"/>
+          </p:cNvSpPr>
+          <p:nvPr/>
+        </p:nvSpPr>
+        <p:spPr>
+          <a:xfrm xmlns:a="http://schemas.openxmlformats.org/drawingml/2006/main">
+            <a:off x="8153400" y="1895475"/>
+            <a:ext cx="3505200" cy="1457325"/>
           </a:xfrm>
           <a:prstGeom xmlns:a="http://schemas.openxmlformats.org/drawingml/2006/main" prst="rect">
             <a:avLst/>
@@ -10175,23 +9422,23 @@
           <p:cNvPr id="12" name="">
             <a:extLst xmlns:a="http://schemas.openxmlformats.org/drawingml/2006/main">
               <a:ext uri="{FF2B5EF4-FFF2-40B4-BE49-F238E27FC236}">
-                <a16:creationId xmlns:a16="http://schemas.microsoft.com/office/drawing/2014/main" id="{C4D04BE3-D272-4EA3-B3FA-5335A4A00A87}"/>
-              </a:ext>
-            </a:extLst>
-          </p:cNvPr>
-          <p:cNvSpPr>
-            <a:spLocks xmlns:a="http://schemas.openxmlformats.org/drawingml/2006/main" noGrp="1"/>
-          </p:cNvSpPr>
-          <p:nvPr/>
-        </p:nvSpPr>
-        <p:spPr>
-          <a:xfrm xmlns:a="http://schemas.openxmlformats.org/drawingml/2006/main">
-            <a:off x="6153150" y="2990850"/>
-            <a:ext cx="5486400" cy="1266825"/>
+                <a16:creationId xmlns:a16="http://schemas.microsoft.com/office/drawing/2014/main" id="{8403115F-D870-4CF9-8FB8-AA194C726A15}"/>
+              </a:ext>
+            </a:extLst>
+          </p:cNvPr>
+          <p:cNvSpPr>
+            <a:spLocks xmlns:a="http://schemas.openxmlformats.org/drawingml/2006/main" noGrp="1"/>
+          </p:cNvSpPr>
+          <p:nvPr/>
+        </p:nvSpPr>
+        <p:spPr>
+          <a:xfrm xmlns:a="http://schemas.openxmlformats.org/drawingml/2006/main">
+            <a:off x="438150" y="3409950"/>
+            <a:ext cx="3581400" cy="1438275"/>
           </a:xfrm>
           <a:prstGeom xmlns:a="http://schemas.openxmlformats.org/drawingml/2006/main" prst="roundRect">
             <a:avLst>
-              <a:gd name="adj" fmla="val 6015"/>
+              <a:gd name="adj" fmla="val 5298"/>
             </a:avLst>
           </a:prstGeom>
           <a:solidFill xmlns:a="http://schemas.openxmlformats.org/drawingml/2006/main">
@@ -10207,19 +9454,19 @@
           <p:cNvPr id="13" name="">
             <a:extLst xmlns:a="http://schemas.openxmlformats.org/drawingml/2006/main">
               <a:ext uri="{FF2B5EF4-FFF2-40B4-BE49-F238E27FC236}">
-                <a16:creationId xmlns:a16="http://schemas.microsoft.com/office/drawing/2014/main" id="{A181A645-34EC-4192-9BC9-35A9F9E2EB09}"/>
-              </a:ext>
-            </a:extLst>
-          </p:cNvPr>
-          <p:cNvSpPr>
-            <a:spLocks xmlns:a="http://schemas.openxmlformats.org/drawingml/2006/main" noGrp="1"/>
-          </p:cNvSpPr>
-          <p:nvPr/>
-        </p:nvSpPr>
-        <p:spPr>
-          <a:xfrm xmlns:a="http://schemas.openxmlformats.org/drawingml/2006/main">
-            <a:off x="6248400" y="3067050"/>
-            <a:ext cx="5410200" cy="438150"/>
+                <a16:creationId xmlns:a16="http://schemas.microsoft.com/office/drawing/2014/main" id="{1DFEB9D8-7713-4C17-BFE9-E421A7459F04}"/>
+              </a:ext>
+            </a:extLst>
+          </p:cNvPr>
+          <p:cNvSpPr>
+            <a:spLocks xmlns:a="http://schemas.openxmlformats.org/drawingml/2006/main" noGrp="1"/>
+          </p:cNvSpPr>
+          <p:nvPr/>
+        </p:nvSpPr>
+        <p:spPr>
+          <a:xfrm xmlns:a="http://schemas.openxmlformats.org/drawingml/2006/main">
+            <a:off x="533400" y="3486150"/>
+            <a:ext cx="3505200" cy="438150"/>
           </a:xfrm>
           <a:prstGeom xmlns:a="http://schemas.openxmlformats.org/drawingml/2006/main" prst="rect">
             <a:avLst/>
@@ -10264,19 +9511,19 @@
           <p:cNvPr id="14" name="">
             <a:extLst xmlns:a="http://schemas.openxmlformats.org/drawingml/2006/main">
               <a:ext uri="{FF2B5EF4-FFF2-40B4-BE49-F238E27FC236}">
-                <a16:creationId xmlns:a16="http://schemas.microsoft.com/office/drawing/2014/main" id="{8E70108A-8080-4888-AF34-41C24DC15030}"/>
-              </a:ext>
-            </a:extLst>
-          </p:cNvPr>
-          <p:cNvSpPr>
-            <a:spLocks xmlns:a="http://schemas.openxmlformats.org/drawingml/2006/main" noGrp="1"/>
-          </p:cNvSpPr>
-          <p:nvPr/>
-        </p:nvSpPr>
-        <p:spPr>
-          <a:xfrm xmlns:a="http://schemas.openxmlformats.org/drawingml/2006/main">
-            <a:off x="6248400" y="3505200"/>
-            <a:ext cx="5410200" cy="790575"/>
+                <a16:creationId xmlns:a16="http://schemas.microsoft.com/office/drawing/2014/main" id="{9389597D-5507-45AF-A8CE-2EDBEFABDF77}"/>
+              </a:ext>
+            </a:extLst>
+          </p:cNvPr>
+          <p:cNvSpPr>
+            <a:spLocks xmlns:a="http://schemas.openxmlformats.org/drawingml/2006/main" noGrp="1"/>
+          </p:cNvSpPr>
+          <p:nvPr/>
+        </p:nvSpPr>
+        <p:spPr>
+          <a:xfrm xmlns:a="http://schemas.openxmlformats.org/drawingml/2006/main">
+            <a:off x="533400" y="3924300"/>
+            <a:ext cx="3505200" cy="962025"/>
           </a:xfrm>
           <a:prstGeom xmlns:a="http://schemas.openxmlformats.org/drawingml/2006/main" prst="rect">
             <a:avLst/>
@@ -10313,23 +9560,23 @@
           <p:cNvPr id="15" name="">
             <a:extLst xmlns:a="http://schemas.openxmlformats.org/drawingml/2006/main">
               <a:ext uri="{FF2B5EF4-FFF2-40B4-BE49-F238E27FC236}">
-                <a16:creationId xmlns:a16="http://schemas.microsoft.com/office/drawing/2014/main" id="{9A669B5E-DAC2-4D22-BD3E-21333ED897CB}"/>
-              </a:ext>
-            </a:extLst>
-          </p:cNvPr>
-          <p:cNvSpPr>
-            <a:spLocks xmlns:a="http://schemas.openxmlformats.org/drawingml/2006/main" noGrp="1"/>
-          </p:cNvSpPr>
-          <p:nvPr/>
-        </p:nvSpPr>
-        <p:spPr>
-          <a:xfrm xmlns:a="http://schemas.openxmlformats.org/drawingml/2006/main">
-            <a:off x="438150" y="4352925"/>
-            <a:ext cx="5486400" cy="1266825"/>
+                <a16:creationId xmlns:a16="http://schemas.microsoft.com/office/drawing/2014/main" id="{A0DA65BE-569D-4EDB-A70E-07A9E6FCB8A4}"/>
+              </a:ext>
+            </a:extLst>
+          </p:cNvPr>
+          <p:cNvSpPr>
+            <a:spLocks xmlns:a="http://schemas.openxmlformats.org/drawingml/2006/main" noGrp="1"/>
+          </p:cNvSpPr>
+          <p:nvPr/>
+        </p:nvSpPr>
+        <p:spPr>
+          <a:xfrm xmlns:a="http://schemas.openxmlformats.org/drawingml/2006/main">
+            <a:off x="4248150" y="3409950"/>
+            <a:ext cx="3581400" cy="1438275"/>
           </a:xfrm>
           <a:prstGeom xmlns:a="http://schemas.openxmlformats.org/drawingml/2006/main" prst="roundRect">
             <a:avLst>
-              <a:gd name="adj" fmla="val 6015"/>
+              <a:gd name="adj" fmla="val 5298"/>
             </a:avLst>
           </a:prstGeom>
           <a:solidFill xmlns:a="http://schemas.openxmlformats.org/drawingml/2006/main">
@@ -10345,19 +9592,19 @@
           <p:cNvPr id="16" name="">
             <a:extLst xmlns:a="http://schemas.openxmlformats.org/drawingml/2006/main">
               <a:ext uri="{FF2B5EF4-FFF2-40B4-BE49-F238E27FC236}">
-                <a16:creationId xmlns:a16="http://schemas.microsoft.com/office/drawing/2014/main" id="{A149CEA1-EB6A-4404-A951-5CBD03255D5B}"/>
-              </a:ext>
-            </a:extLst>
-          </p:cNvPr>
-          <p:cNvSpPr>
-            <a:spLocks xmlns:a="http://schemas.openxmlformats.org/drawingml/2006/main" noGrp="1"/>
-          </p:cNvSpPr>
-          <p:nvPr/>
-        </p:nvSpPr>
-        <p:spPr>
-          <a:xfrm xmlns:a="http://schemas.openxmlformats.org/drawingml/2006/main">
-            <a:off x="533400" y="4429125"/>
-            <a:ext cx="5410200" cy="438150"/>
+                <a16:creationId xmlns:a16="http://schemas.microsoft.com/office/drawing/2014/main" id="{96B56C95-BC32-441C-BA97-5371C483ADF6}"/>
+              </a:ext>
+            </a:extLst>
+          </p:cNvPr>
+          <p:cNvSpPr>
+            <a:spLocks xmlns:a="http://schemas.openxmlformats.org/drawingml/2006/main" noGrp="1"/>
+          </p:cNvSpPr>
+          <p:nvPr/>
+        </p:nvSpPr>
+        <p:spPr>
+          <a:xfrm xmlns:a="http://schemas.openxmlformats.org/drawingml/2006/main">
+            <a:off x="4343400" y="3486150"/>
+            <a:ext cx="3505200" cy="438150"/>
           </a:xfrm>
           <a:prstGeom xmlns:a="http://schemas.openxmlformats.org/drawingml/2006/main" prst="rect">
             <a:avLst/>
@@ -10402,19 +9649,19 @@
           <p:cNvPr id="17" name="">
             <a:extLst xmlns:a="http://schemas.openxmlformats.org/drawingml/2006/main">
               <a:ext uri="{FF2B5EF4-FFF2-40B4-BE49-F238E27FC236}">
-                <a16:creationId xmlns:a16="http://schemas.microsoft.com/office/drawing/2014/main" id="{EE5F0A28-E950-47C4-B520-27F0C3518BEC}"/>
-              </a:ext>
-            </a:extLst>
-          </p:cNvPr>
-          <p:cNvSpPr>
-            <a:spLocks xmlns:a="http://schemas.openxmlformats.org/drawingml/2006/main" noGrp="1"/>
-          </p:cNvSpPr>
-          <p:nvPr/>
-        </p:nvSpPr>
-        <p:spPr>
-          <a:xfrm xmlns:a="http://schemas.openxmlformats.org/drawingml/2006/main">
-            <a:off x="533400" y="4867275"/>
-            <a:ext cx="5410200" cy="790575"/>
+                <a16:creationId xmlns:a16="http://schemas.microsoft.com/office/drawing/2014/main" id="{B8A427B1-8015-4263-B6C2-9DEE79B23B88}"/>
+              </a:ext>
+            </a:extLst>
+          </p:cNvPr>
+          <p:cNvSpPr>
+            <a:spLocks xmlns:a="http://schemas.openxmlformats.org/drawingml/2006/main" noGrp="1"/>
+          </p:cNvSpPr>
+          <p:nvPr/>
+        </p:nvSpPr>
+        <p:spPr>
+          <a:xfrm xmlns:a="http://schemas.openxmlformats.org/drawingml/2006/main">
+            <a:off x="4343400" y="3924300"/>
+            <a:ext cx="3505200" cy="962025"/>
           </a:xfrm>
           <a:prstGeom xmlns:a="http://schemas.openxmlformats.org/drawingml/2006/main" prst="rect">
             <a:avLst/>
@@ -10451,23 +9698,23 @@
           <p:cNvPr id="18" name="">
             <a:extLst xmlns:a="http://schemas.openxmlformats.org/drawingml/2006/main">
               <a:ext uri="{FF2B5EF4-FFF2-40B4-BE49-F238E27FC236}">
-                <a16:creationId xmlns:a16="http://schemas.microsoft.com/office/drawing/2014/main" id="{41599E84-22C2-494B-AF04-3E8FAF2A91B4}"/>
-              </a:ext>
-            </a:extLst>
-          </p:cNvPr>
-          <p:cNvSpPr>
-            <a:spLocks xmlns:a="http://schemas.openxmlformats.org/drawingml/2006/main" noGrp="1"/>
-          </p:cNvSpPr>
-          <p:nvPr/>
-        </p:nvSpPr>
-        <p:spPr>
-          <a:xfrm xmlns:a="http://schemas.openxmlformats.org/drawingml/2006/main">
-            <a:off x="6153150" y="4352925"/>
-            <a:ext cx="5486400" cy="1266825"/>
+                <a16:creationId xmlns:a16="http://schemas.microsoft.com/office/drawing/2014/main" id="{C719C23E-C217-47F1-9CB5-7A39A236D63C}"/>
+              </a:ext>
+            </a:extLst>
+          </p:cNvPr>
+          <p:cNvSpPr>
+            <a:spLocks xmlns:a="http://schemas.openxmlformats.org/drawingml/2006/main" noGrp="1"/>
+          </p:cNvSpPr>
+          <p:nvPr/>
+        </p:nvSpPr>
+        <p:spPr>
+          <a:xfrm xmlns:a="http://schemas.openxmlformats.org/drawingml/2006/main">
+            <a:off x="8058150" y="3409950"/>
+            <a:ext cx="3581400" cy="1438275"/>
           </a:xfrm>
           <a:prstGeom xmlns:a="http://schemas.openxmlformats.org/drawingml/2006/main" prst="roundRect">
             <a:avLst>
-              <a:gd name="adj" fmla="val 6015"/>
+              <a:gd name="adj" fmla="val 5298"/>
             </a:avLst>
           </a:prstGeom>
           <a:solidFill xmlns:a="http://schemas.openxmlformats.org/drawingml/2006/main">
@@ -10483,19 +9730,19 @@
           <p:cNvPr id="19" name="">
             <a:extLst xmlns:a="http://schemas.openxmlformats.org/drawingml/2006/main">
               <a:ext uri="{FF2B5EF4-FFF2-40B4-BE49-F238E27FC236}">
-                <a16:creationId xmlns:a16="http://schemas.microsoft.com/office/drawing/2014/main" id="{3DE080EF-7FDC-4E52-9EC3-7FC2CF47E3CC}"/>
-              </a:ext>
-            </a:extLst>
-          </p:cNvPr>
-          <p:cNvSpPr>
-            <a:spLocks xmlns:a="http://schemas.openxmlformats.org/drawingml/2006/main" noGrp="1"/>
-          </p:cNvSpPr>
-          <p:nvPr/>
-        </p:nvSpPr>
-        <p:spPr>
-          <a:xfrm xmlns:a="http://schemas.openxmlformats.org/drawingml/2006/main">
-            <a:off x="6248400" y="4429125"/>
-            <a:ext cx="5410200" cy="438150"/>
+                <a16:creationId xmlns:a16="http://schemas.microsoft.com/office/drawing/2014/main" id="{1E5FE357-E275-43F9-89BE-B010F8C1BA50}"/>
+              </a:ext>
+            </a:extLst>
+          </p:cNvPr>
+          <p:cNvSpPr>
+            <a:spLocks xmlns:a="http://schemas.openxmlformats.org/drawingml/2006/main" noGrp="1"/>
+          </p:cNvSpPr>
+          <p:nvPr/>
+        </p:nvSpPr>
+        <p:spPr>
+          <a:xfrm xmlns:a="http://schemas.openxmlformats.org/drawingml/2006/main">
+            <a:off x="8153400" y="3486150"/>
+            <a:ext cx="3505200" cy="438150"/>
           </a:xfrm>
           <a:prstGeom xmlns:a="http://schemas.openxmlformats.org/drawingml/2006/main" prst="rect">
             <a:avLst/>
@@ -10540,19 +9787,19 @@
           <p:cNvPr id="20" name="">
             <a:extLst xmlns:a="http://schemas.openxmlformats.org/drawingml/2006/main">
               <a:ext uri="{FF2B5EF4-FFF2-40B4-BE49-F238E27FC236}">
-                <a16:creationId xmlns:a16="http://schemas.microsoft.com/office/drawing/2014/main" id="{664AA88E-5CB4-41E3-9A94-0DDA431A05F8}"/>
-              </a:ext>
-            </a:extLst>
-          </p:cNvPr>
-          <p:cNvSpPr>
-            <a:spLocks xmlns:a="http://schemas.openxmlformats.org/drawingml/2006/main" noGrp="1"/>
-          </p:cNvSpPr>
-          <p:nvPr/>
-        </p:nvSpPr>
-        <p:spPr>
-          <a:xfrm xmlns:a="http://schemas.openxmlformats.org/drawingml/2006/main">
-            <a:off x="6248400" y="4867275"/>
-            <a:ext cx="5410200" cy="790575"/>
+                <a16:creationId xmlns:a16="http://schemas.microsoft.com/office/drawing/2014/main" id="{FE5963AF-0F1C-4795-B43A-342C71941A70}"/>
+              </a:ext>
+            </a:extLst>
+          </p:cNvPr>
+          <p:cNvSpPr>
+            <a:spLocks xmlns:a="http://schemas.openxmlformats.org/drawingml/2006/main" noGrp="1"/>
+          </p:cNvSpPr>
+          <p:nvPr/>
+        </p:nvSpPr>
+        <p:spPr>
+          <a:xfrm xmlns:a="http://schemas.openxmlformats.org/drawingml/2006/main">
+            <a:off x="8153400" y="3924300"/>
+            <a:ext cx="3505200" cy="962025"/>
           </a:xfrm>
           <a:prstGeom xmlns:a="http://schemas.openxmlformats.org/drawingml/2006/main" prst="rect">
             <a:avLst/>
@@ -10589,7 +9836,7 @@
           <p:cNvPr id="21" name="">
             <a:extLst xmlns:a="http://schemas.openxmlformats.org/drawingml/2006/main">
               <a:ext uri="{FF2B5EF4-FFF2-40B4-BE49-F238E27FC236}">
-                <a16:creationId xmlns:a16="http://schemas.microsoft.com/office/drawing/2014/main" id="{27D48861-1917-41E2-99B4-8C35664FCE8C}"/>
+                <a16:creationId xmlns:a16="http://schemas.microsoft.com/office/drawing/2014/main" id="{5838616F-2932-465A-9354-7C24150E9B18}"/>
               </a:ext>
             </a:extLst>
           </p:cNvPr>
@@ -10632,7 +9879,7 @@
             </a:r>
             <a:r>
               <a:rPr>
-                <a:hlinkClick xmlns:r="http://schemas.openxmlformats.org/officeDocument/2006/relationships" r:id="Rab203338fab4473d"/>
+                <a:hlinkClick xmlns:r="http://schemas.openxmlformats.org/officeDocument/2006/relationships" r:id="R0b052ac0e3954a2b"/>
               </a:rPr>
               <a:t>Quelle öffnen (beck-online.beck.de)</a:t>
             </a:r>
@@ -10647,7 +9894,7 @@
           <p:cNvPr id="22" name="">
             <a:extLst xmlns:a="http://schemas.openxmlformats.org/drawingml/2006/main">
               <a:ext uri="{FF2B5EF4-FFF2-40B4-BE49-F238E27FC236}">
-                <a16:creationId xmlns:a16="http://schemas.microsoft.com/office/drawing/2014/main" id="{2E17C794-6146-49ED-9221-9D6359FD7DC5}"/>
+                <a16:creationId xmlns:a16="http://schemas.microsoft.com/office/drawing/2014/main" id="{3F593258-EF05-4D89-994F-BEA8587D6343}"/>
               </a:ext>
             </a:extLst>
           </p:cNvPr>
@@ -10702,7 +9949,7 @@
     </p:spTree>
     <p:extLst>
       <p:ext uri="{BB962C8B-B14F-4D97-AF65-F5344CB8AC3E}">
-        <p14:creationId xmlns:p14="http://schemas.microsoft.com/office/powerpoint/2010/main" val="1087691068"/>
+        <p14:creationId xmlns:p14="http://schemas.microsoft.com/office/powerpoint/2010/main" val="120760637"/>
       </p:ext>
     </p:extLst>
   </p:cSld>
@@ -10733,7 +9980,7 @@
           <p:cNvPr id="17" name="">
             <a:extLst xmlns:a="http://schemas.openxmlformats.org/drawingml/2006/main">
               <a:ext uri="{FF2B5EF4-FFF2-40B4-BE49-F238E27FC236}">
-                <a16:creationId xmlns:a16="http://schemas.microsoft.com/office/drawing/2014/main" id="{2F4A9C6B-E3EC-40E2-96C6-0B40FCDF8146}"/>
+                <a16:creationId xmlns:a16="http://schemas.microsoft.com/office/drawing/2014/main" id="{AD89BC6B-D248-4137-A1C3-877A27227DE6}"/>
               </a:ext>
             </a:extLst>
           </p:cNvPr>
@@ -10790,7 +10037,7 @@
           <p:cNvPr id="2" name="">
             <a:extLst xmlns:a="http://schemas.openxmlformats.org/drawingml/2006/main">
               <a:ext uri="{FF2B5EF4-FFF2-40B4-BE49-F238E27FC236}">
-                <a16:creationId xmlns:a16="http://schemas.microsoft.com/office/drawing/2014/main" id="{DA571B30-22C4-43F8-9FDD-61467F920B4D}"/>
+                <a16:creationId xmlns:a16="http://schemas.microsoft.com/office/drawing/2014/main" id="{EFD8AAD1-4DE4-4478-8641-98069ED58294}"/>
               </a:ext>
             </a:extLst>
           </p:cNvPr>
@@ -10847,7 +10094,7 @@
           <p:cNvPr id="3" name="">
             <a:extLst xmlns:a="http://schemas.openxmlformats.org/drawingml/2006/main">
               <a:ext uri="{FF2B5EF4-FFF2-40B4-BE49-F238E27FC236}">
-                <a16:creationId xmlns:a16="http://schemas.microsoft.com/office/drawing/2014/main" id="{50874064-AA33-4B1D-A53A-F1B3E2C038C6}"/>
+                <a16:creationId xmlns:a16="http://schemas.microsoft.com/office/drawing/2014/main" id="{2BFA941F-13F8-46AF-8B01-8A672D8D48FC}"/>
               </a:ext>
             </a:extLst>
           </p:cNvPr>
@@ -10859,11 +10106,11 @@
         <p:spPr>
           <a:xfrm xmlns:a="http://schemas.openxmlformats.org/drawingml/2006/main">
             <a:off x="438150" y="1381125"/>
-            <a:ext cx="5486400" cy="1514475"/>
+            <a:ext cx="5486400" cy="1438275"/>
           </a:xfrm>
           <a:prstGeom xmlns:a="http://schemas.openxmlformats.org/drawingml/2006/main" prst="roundRect">
             <a:avLst>
-              <a:gd name="adj" fmla="val 5031"/>
+              <a:gd name="adj" fmla="val 5298"/>
             </a:avLst>
           </a:prstGeom>
           <a:solidFill xmlns:a="http://schemas.openxmlformats.org/drawingml/2006/main">
@@ -10879,7 +10126,7 @@
           <p:cNvPr id="4" name="">
             <a:extLst xmlns:a="http://schemas.openxmlformats.org/drawingml/2006/main">
               <a:ext uri="{FF2B5EF4-FFF2-40B4-BE49-F238E27FC236}">
-                <a16:creationId xmlns:a16="http://schemas.microsoft.com/office/drawing/2014/main" id="{0C762470-A89F-4CF3-A324-285E3A393689}"/>
+                <a16:creationId xmlns:a16="http://schemas.microsoft.com/office/drawing/2014/main" id="{7E18E02C-8BF9-4EC6-977E-DB4D93296E0F}"/>
               </a:ext>
             </a:extLst>
           </p:cNvPr>
@@ -10936,7 +10183,7 @@
           <p:cNvPr id="5" name="">
             <a:extLst xmlns:a="http://schemas.openxmlformats.org/drawingml/2006/main">
               <a:ext uri="{FF2B5EF4-FFF2-40B4-BE49-F238E27FC236}">
-                <a16:creationId xmlns:a16="http://schemas.microsoft.com/office/drawing/2014/main" id="{64D57C48-FBFD-4282-AEBF-B43830A7A86A}"/>
+                <a16:creationId xmlns:a16="http://schemas.microsoft.com/office/drawing/2014/main" id="{A641BC6F-26B8-4B85-9669-C636227598AC}"/>
               </a:ext>
             </a:extLst>
           </p:cNvPr>
@@ -10948,7 +10195,7 @@
         <p:spPr>
           <a:xfrm xmlns:a="http://schemas.openxmlformats.org/drawingml/2006/main">
             <a:off x="533400" y="1895475"/>
-            <a:ext cx="5410200" cy="1038225"/>
+            <a:ext cx="5410200" cy="962025"/>
           </a:xfrm>
           <a:prstGeom xmlns:a="http://schemas.openxmlformats.org/drawingml/2006/main" prst="rect">
             <a:avLst/>
@@ -10992,7 +10239,7 @@
           <p:cNvPr id="6" name="">
             <a:extLst xmlns:a="http://schemas.openxmlformats.org/drawingml/2006/main">
               <a:ext uri="{FF2B5EF4-FFF2-40B4-BE49-F238E27FC236}">
-                <a16:creationId xmlns:a16="http://schemas.microsoft.com/office/drawing/2014/main" id="{54F554EE-B99D-464C-9989-694CB42C715B}"/>
+                <a16:creationId xmlns:a16="http://schemas.microsoft.com/office/drawing/2014/main" id="{38822802-0AE7-4CE3-AC3E-8E3746E75387}"/>
               </a:ext>
             </a:extLst>
           </p:cNvPr>
@@ -11004,11 +10251,11 @@
         <p:spPr>
           <a:xfrm xmlns:a="http://schemas.openxmlformats.org/drawingml/2006/main">
             <a:off x="6153150" y="1381125"/>
-            <a:ext cx="5486400" cy="1514475"/>
+            <a:ext cx="5486400" cy="1438275"/>
           </a:xfrm>
           <a:prstGeom xmlns:a="http://schemas.openxmlformats.org/drawingml/2006/main" prst="roundRect">
             <a:avLst>
-              <a:gd name="adj" fmla="val 5031"/>
+              <a:gd name="adj" fmla="val 5298"/>
             </a:avLst>
           </a:prstGeom>
           <a:solidFill xmlns:a="http://schemas.openxmlformats.org/drawingml/2006/main">
@@ -11024,7 +10271,7 @@
           <p:cNvPr id="7" name="">
             <a:extLst xmlns:a="http://schemas.openxmlformats.org/drawingml/2006/main">
               <a:ext uri="{FF2B5EF4-FFF2-40B4-BE49-F238E27FC236}">
-                <a16:creationId xmlns:a16="http://schemas.microsoft.com/office/drawing/2014/main" id="{8399DCA7-0AF6-4F31-BDE8-E8A93E2C54D4}"/>
+                <a16:creationId xmlns:a16="http://schemas.microsoft.com/office/drawing/2014/main" id="{E154FB4A-429F-43C7-B35D-6290356B595B}"/>
               </a:ext>
             </a:extLst>
           </p:cNvPr>
@@ -11081,7 +10328,7 @@
           <p:cNvPr id="8" name="">
             <a:extLst xmlns:a="http://schemas.openxmlformats.org/drawingml/2006/main">
               <a:ext uri="{FF2B5EF4-FFF2-40B4-BE49-F238E27FC236}">
-                <a16:creationId xmlns:a16="http://schemas.microsoft.com/office/drawing/2014/main" id="{4B50E140-0313-4B08-BE2F-148271A30B81}"/>
+                <a16:creationId xmlns:a16="http://schemas.microsoft.com/office/drawing/2014/main" id="{D3FE05B8-EE7F-4DF1-B96C-56A70D4241A8}"/>
               </a:ext>
             </a:extLst>
           </p:cNvPr>
@@ -11093,7 +10340,7 @@
         <p:spPr>
           <a:xfrm xmlns:a="http://schemas.openxmlformats.org/drawingml/2006/main">
             <a:off x="6248400" y="1895475"/>
-            <a:ext cx="5410200" cy="1038225"/>
+            <a:ext cx="5410200" cy="962025"/>
           </a:xfrm>
           <a:prstGeom xmlns:a="http://schemas.openxmlformats.org/drawingml/2006/main" prst="rect">
             <a:avLst/>
@@ -11130,23 +10377,23 @@
           <p:cNvPr id="9" name="">
             <a:extLst xmlns:a="http://schemas.openxmlformats.org/drawingml/2006/main">
               <a:ext uri="{FF2B5EF4-FFF2-40B4-BE49-F238E27FC236}">
-                <a16:creationId xmlns:a16="http://schemas.microsoft.com/office/drawing/2014/main" id="{118ADEB3-3901-4176-A8C1-7EA5900C8817}"/>
-              </a:ext>
-            </a:extLst>
-          </p:cNvPr>
-          <p:cNvSpPr>
-            <a:spLocks xmlns:a="http://schemas.openxmlformats.org/drawingml/2006/main" noGrp="1"/>
-          </p:cNvSpPr>
-          <p:nvPr/>
-        </p:nvSpPr>
-        <p:spPr>
-          <a:xfrm xmlns:a="http://schemas.openxmlformats.org/drawingml/2006/main">
-            <a:off x="438150" y="2990850"/>
-            <a:ext cx="5486400" cy="1762125"/>
+                <a16:creationId xmlns:a16="http://schemas.microsoft.com/office/drawing/2014/main" id="{04695FAF-E434-487F-9D62-E6518B4B23C3}"/>
+              </a:ext>
+            </a:extLst>
+          </p:cNvPr>
+          <p:cNvSpPr>
+            <a:spLocks xmlns:a="http://schemas.openxmlformats.org/drawingml/2006/main" noGrp="1"/>
+          </p:cNvSpPr>
+          <p:nvPr/>
+        </p:nvSpPr>
+        <p:spPr>
+          <a:xfrm xmlns:a="http://schemas.openxmlformats.org/drawingml/2006/main">
+            <a:off x="438150" y="2914650"/>
+            <a:ext cx="5486400" cy="1685925"/>
           </a:xfrm>
           <a:prstGeom xmlns:a="http://schemas.openxmlformats.org/drawingml/2006/main" prst="roundRect">
             <a:avLst>
-              <a:gd name="adj" fmla="val 4324"/>
+              <a:gd name="adj" fmla="val 4520"/>
             </a:avLst>
           </a:prstGeom>
           <a:solidFill xmlns:a="http://schemas.openxmlformats.org/drawingml/2006/main">
@@ -11162,18 +10409,18 @@
           <p:cNvPr id="10" name="">
             <a:extLst xmlns:a="http://schemas.openxmlformats.org/drawingml/2006/main">
               <a:ext uri="{FF2B5EF4-FFF2-40B4-BE49-F238E27FC236}">
-                <a16:creationId xmlns:a16="http://schemas.microsoft.com/office/drawing/2014/main" id="{5A10BB6C-E9C4-404E-A858-E4B31EF5F040}"/>
-              </a:ext>
-            </a:extLst>
-          </p:cNvPr>
-          <p:cNvSpPr>
-            <a:spLocks xmlns:a="http://schemas.openxmlformats.org/drawingml/2006/main" noGrp="1"/>
-          </p:cNvSpPr>
-          <p:nvPr/>
-        </p:nvSpPr>
-        <p:spPr>
-          <a:xfrm xmlns:a="http://schemas.openxmlformats.org/drawingml/2006/main">
-            <a:off x="533400" y="3067050"/>
+                <a16:creationId xmlns:a16="http://schemas.microsoft.com/office/drawing/2014/main" id="{BA566171-3906-4931-A5C5-AF6C82E8A8E4}"/>
+              </a:ext>
+            </a:extLst>
+          </p:cNvPr>
+          <p:cNvSpPr>
+            <a:spLocks xmlns:a="http://schemas.openxmlformats.org/drawingml/2006/main" noGrp="1"/>
+          </p:cNvSpPr>
+          <p:nvPr/>
+        </p:nvSpPr>
+        <p:spPr>
+          <a:xfrm xmlns:a="http://schemas.openxmlformats.org/drawingml/2006/main">
+            <a:off x="533400" y="2990850"/>
             <a:ext cx="5410200" cy="438150"/>
           </a:xfrm>
           <a:prstGeom xmlns:a="http://schemas.openxmlformats.org/drawingml/2006/main" prst="rect">
@@ -11219,19 +10466,19 @@
           <p:cNvPr id="11" name="">
             <a:extLst xmlns:a="http://schemas.openxmlformats.org/drawingml/2006/main">
               <a:ext uri="{FF2B5EF4-FFF2-40B4-BE49-F238E27FC236}">
-                <a16:creationId xmlns:a16="http://schemas.microsoft.com/office/drawing/2014/main" id="{B511444D-B840-4F81-B49E-21FA4339100A}"/>
-              </a:ext>
-            </a:extLst>
-          </p:cNvPr>
-          <p:cNvSpPr>
-            <a:spLocks xmlns:a="http://schemas.openxmlformats.org/drawingml/2006/main" noGrp="1"/>
-          </p:cNvSpPr>
-          <p:nvPr/>
-        </p:nvSpPr>
-        <p:spPr>
-          <a:xfrm xmlns:a="http://schemas.openxmlformats.org/drawingml/2006/main">
-            <a:off x="533400" y="3505200"/>
-            <a:ext cx="5410200" cy="1285875"/>
+                <a16:creationId xmlns:a16="http://schemas.microsoft.com/office/drawing/2014/main" id="{4674B7E8-47A2-4E20-A015-09873B808F6B}"/>
+              </a:ext>
+            </a:extLst>
+          </p:cNvPr>
+          <p:cNvSpPr>
+            <a:spLocks xmlns:a="http://schemas.openxmlformats.org/drawingml/2006/main" noGrp="1"/>
+          </p:cNvSpPr>
+          <p:nvPr/>
+        </p:nvSpPr>
+        <p:spPr>
+          <a:xfrm xmlns:a="http://schemas.openxmlformats.org/drawingml/2006/main">
+            <a:off x="533400" y="3429000"/>
+            <a:ext cx="5410200" cy="1209675"/>
           </a:xfrm>
           <a:prstGeom xmlns:a="http://schemas.openxmlformats.org/drawingml/2006/main" prst="rect">
             <a:avLst/>
@@ -11268,23 +10515,23 @@
           <p:cNvPr id="12" name="">
             <a:extLst xmlns:a="http://schemas.openxmlformats.org/drawingml/2006/main">
               <a:ext uri="{FF2B5EF4-FFF2-40B4-BE49-F238E27FC236}">
-                <a16:creationId xmlns:a16="http://schemas.microsoft.com/office/drawing/2014/main" id="{C8D51294-00A9-4867-8551-B795F731D415}"/>
-              </a:ext>
-            </a:extLst>
-          </p:cNvPr>
-          <p:cNvSpPr>
-            <a:spLocks xmlns:a="http://schemas.openxmlformats.org/drawingml/2006/main" noGrp="1"/>
-          </p:cNvSpPr>
-          <p:nvPr/>
-        </p:nvSpPr>
-        <p:spPr>
-          <a:xfrm xmlns:a="http://schemas.openxmlformats.org/drawingml/2006/main">
-            <a:off x="6153150" y="2990850"/>
-            <a:ext cx="5486400" cy="1762125"/>
+                <a16:creationId xmlns:a16="http://schemas.microsoft.com/office/drawing/2014/main" id="{3BB65FBB-A147-4727-8B11-F4132DCB7C65}"/>
+              </a:ext>
+            </a:extLst>
+          </p:cNvPr>
+          <p:cNvSpPr>
+            <a:spLocks xmlns:a="http://schemas.openxmlformats.org/drawingml/2006/main" noGrp="1"/>
+          </p:cNvSpPr>
+          <p:nvPr/>
+        </p:nvSpPr>
+        <p:spPr>
+          <a:xfrm xmlns:a="http://schemas.openxmlformats.org/drawingml/2006/main">
+            <a:off x="6153150" y="2914650"/>
+            <a:ext cx="5486400" cy="1685925"/>
           </a:xfrm>
           <a:prstGeom xmlns:a="http://schemas.openxmlformats.org/drawingml/2006/main" prst="roundRect">
             <a:avLst>
-              <a:gd name="adj" fmla="val 4324"/>
+              <a:gd name="adj" fmla="val 4520"/>
             </a:avLst>
           </a:prstGeom>
           <a:solidFill xmlns:a="http://schemas.openxmlformats.org/drawingml/2006/main">
@@ -11300,18 +10547,18 @@
           <p:cNvPr id="13" name="">
             <a:extLst xmlns:a="http://schemas.openxmlformats.org/drawingml/2006/main">
               <a:ext uri="{FF2B5EF4-FFF2-40B4-BE49-F238E27FC236}">
-                <a16:creationId xmlns:a16="http://schemas.microsoft.com/office/drawing/2014/main" id="{F51A4245-1776-461E-A730-0F5CC945CA21}"/>
-              </a:ext>
-            </a:extLst>
-          </p:cNvPr>
-          <p:cNvSpPr>
-            <a:spLocks xmlns:a="http://schemas.openxmlformats.org/drawingml/2006/main" noGrp="1"/>
-          </p:cNvSpPr>
-          <p:nvPr/>
-        </p:nvSpPr>
-        <p:spPr>
-          <a:xfrm xmlns:a="http://schemas.openxmlformats.org/drawingml/2006/main">
-            <a:off x="6248400" y="3067050"/>
+                <a16:creationId xmlns:a16="http://schemas.microsoft.com/office/drawing/2014/main" id="{8E2FD9A0-B4E5-4BFD-BDF5-78C9CE13D240}"/>
+              </a:ext>
+            </a:extLst>
+          </p:cNvPr>
+          <p:cNvSpPr>
+            <a:spLocks xmlns:a="http://schemas.openxmlformats.org/drawingml/2006/main" noGrp="1"/>
+          </p:cNvSpPr>
+          <p:nvPr/>
+        </p:nvSpPr>
+        <p:spPr>
+          <a:xfrm xmlns:a="http://schemas.openxmlformats.org/drawingml/2006/main">
+            <a:off x="6248400" y="2990850"/>
             <a:ext cx="5410200" cy="438150"/>
           </a:xfrm>
           <a:prstGeom xmlns:a="http://schemas.openxmlformats.org/drawingml/2006/main" prst="rect">
@@ -11357,19 +10604,19 @@
           <p:cNvPr id="14" name="">
             <a:extLst xmlns:a="http://schemas.openxmlformats.org/drawingml/2006/main">
               <a:ext uri="{FF2B5EF4-FFF2-40B4-BE49-F238E27FC236}">
-                <a16:creationId xmlns:a16="http://schemas.microsoft.com/office/drawing/2014/main" id="{773F2B49-238D-45ED-964E-CC891C4732A8}"/>
-              </a:ext>
-            </a:extLst>
-          </p:cNvPr>
-          <p:cNvSpPr>
-            <a:spLocks xmlns:a="http://schemas.openxmlformats.org/drawingml/2006/main" noGrp="1"/>
-          </p:cNvSpPr>
-          <p:nvPr/>
-        </p:nvSpPr>
-        <p:spPr>
-          <a:xfrm xmlns:a="http://schemas.openxmlformats.org/drawingml/2006/main">
-            <a:off x="6248400" y="3505200"/>
-            <a:ext cx="5410200" cy="1285875"/>
+                <a16:creationId xmlns:a16="http://schemas.microsoft.com/office/drawing/2014/main" id="{66848773-7F5D-4465-91E1-F4784464C552}"/>
+              </a:ext>
+            </a:extLst>
+          </p:cNvPr>
+          <p:cNvSpPr>
+            <a:spLocks xmlns:a="http://schemas.openxmlformats.org/drawingml/2006/main" noGrp="1"/>
+          </p:cNvSpPr>
+          <p:nvPr/>
+        </p:nvSpPr>
+        <p:spPr>
+          <a:xfrm xmlns:a="http://schemas.openxmlformats.org/drawingml/2006/main">
+            <a:off x="6248400" y="3429000"/>
+            <a:ext cx="5410200" cy="1209675"/>
           </a:xfrm>
           <a:prstGeom xmlns:a="http://schemas.openxmlformats.org/drawingml/2006/main" prst="rect">
             <a:avLst/>
@@ -11406,7 +10653,7 @@
           <p:cNvPr id="15" name="">
             <a:extLst xmlns:a="http://schemas.openxmlformats.org/drawingml/2006/main">
               <a:ext uri="{FF2B5EF4-FFF2-40B4-BE49-F238E27FC236}">
-                <a16:creationId xmlns:a16="http://schemas.microsoft.com/office/drawing/2014/main" id="{59677974-7996-4BCE-9D19-A26AA0F6CC40}"/>
+                <a16:creationId xmlns:a16="http://schemas.microsoft.com/office/drawing/2014/main" id="{697BCA16-AA0A-47F2-A66A-B9FD5F54254B}"/>
               </a:ext>
             </a:extLst>
           </p:cNvPr>
@@ -11449,7 +10696,7 @@
             </a:r>
             <a:r>
               <a:rPr>
-                <a:hlinkClick xmlns:r="http://schemas.openxmlformats.org/officeDocument/2006/relationships" r:id="R7894801808744a41"/>
+                <a:hlinkClick xmlns:r="http://schemas.openxmlformats.org/officeDocument/2006/relationships" r:id="R634daece5a70407f"/>
               </a:rPr>
               <a:t>Quelle öffnen (podcasts.apple.com)</a:t>
             </a:r>
@@ -11464,7 +10711,7 @@
           <p:cNvPr id="16" name="">
             <a:extLst xmlns:a="http://schemas.openxmlformats.org/drawingml/2006/main">
               <a:ext uri="{FF2B5EF4-FFF2-40B4-BE49-F238E27FC236}">
-                <a16:creationId xmlns:a16="http://schemas.microsoft.com/office/drawing/2014/main" id="{2718FA27-7F28-4E3C-9131-DAE8B48974E8}"/>
+                <a16:creationId xmlns:a16="http://schemas.microsoft.com/office/drawing/2014/main" id="{BFAD2250-1704-4A3D-AA0B-E350E9D5E98E}"/>
               </a:ext>
             </a:extLst>
           </p:cNvPr>
@@ -11519,7 +10766,7 @@
     </p:spTree>
     <p:extLst>
       <p:ext uri="{BB962C8B-B14F-4D97-AF65-F5344CB8AC3E}">
-        <p14:creationId xmlns:p14="http://schemas.microsoft.com/office/powerpoint/2010/main" val="2055569816"/>
+        <p14:creationId xmlns:p14="http://schemas.microsoft.com/office/powerpoint/2010/main" val="8881807"/>
       </p:ext>
     </p:extLst>
   </p:cSld>
@@ -11547,10 +10794,10 @@
       </p:grpSpPr>
       <p:sp>
         <p:nvSpPr>
-          <p:cNvPr id="11" name="">
-            <a:extLst xmlns:a="http://schemas.openxmlformats.org/drawingml/2006/main">
-              <a:ext uri="{FF2B5EF4-FFF2-40B4-BE49-F238E27FC236}">
-                <a16:creationId xmlns:a16="http://schemas.microsoft.com/office/drawing/2014/main" id="{7FDAFB57-CBC6-4C0B-AFA4-EF61FE36DC6B}"/>
+          <p:cNvPr id="20" name="">
+            <a:extLst xmlns:a="http://schemas.openxmlformats.org/drawingml/2006/main">
+              <a:ext uri="{FF2B5EF4-FFF2-40B4-BE49-F238E27FC236}">
+                <a16:creationId xmlns:a16="http://schemas.microsoft.com/office/drawing/2014/main" id="{40C0486E-2168-4A28-BD82-38EFA916C11F}"/>
               </a:ext>
             </a:extLst>
           </p:cNvPr>
@@ -11607,7 +10854,7 @@
           <p:cNvPr id="2" name="">
             <a:extLst xmlns:a="http://schemas.openxmlformats.org/drawingml/2006/main">
               <a:ext uri="{FF2B5EF4-FFF2-40B4-BE49-F238E27FC236}">
-                <a16:creationId xmlns:a16="http://schemas.microsoft.com/office/drawing/2014/main" id="{4C429201-7A18-45AF-AB07-57117AECCC1F}"/>
+                <a16:creationId xmlns:a16="http://schemas.microsoft.com/office/drawing/2014/main" id="{E216CE7E-A74A-480C-AE88-CB0A019190A5}"/>
               </a:ext>
             </a:extLst>
           </p:cNvPr>
@@ -11664,7 +10911,39 @@
           <p:cNvPr id="3" name="">
             <a:extLst xmlns:a="http://schemas.openxmlformats.org/drawingml/2006/main">
               <a:ext uri="{FF2B5EF4-FFF2-40B4-BE49-F238E27FC236}">
-                <a16:creationId xmlns:a16="http://schemas.microsoft.com/office/drawing/2014/main" id="{03E8D9B7-6A6F-4485-8FFA-77B24AE1F5F2}"/>
+                <a16:creationId xmlns:a16="http://schemas.microsoft.com/office/drawing/2014/main" id="{0CCEDFC4-BE88-4B31-A065-A2196DCB7E65}"/>
+              </a:ext>
+            </a:extLst>
+          </p:cNvPr>
+          <p:cNvSpPr>
+            <a:spLocks xmlns:a="http://schemas.openxmlformats.org/drawingml/2006/main" noGrp="1"/>
+          </p:cNvSpPr>
+          <p:nvPr/>
+        </p:nvSpPr>
+        <p:spPr>
+          <a:xfrm xmlns:a="http://schemas.openxmlformats.org/drawingml/2006/main">
+            <a:off x="438150" y="1381125"/>
+            <a:ext cx="5486400" cy="1438275"/>
+          </a:xfrm>
+          <a:prstGeom xmlns:a="http://schemas.openxmlformats.org/drawingml/2006/main" prst="roundRect">
+            <a:avLst>
+              <a:gd name="adj" fmla="val 5298"/>
+            </a:avLst>
+          </a:prstGeom>
+          <a:solidFill xmlns:a="http://schemas.openxmlformats.org/drawingml/2006/main">
+            <a:srgbClr val="EDF5F1"/>
+          </a:solidFill>
+          <a:ln xmlns:a="http://schemas.openxmlformats.org/drawingml/2006/main" w="0">
+            <a:noFill/>
+          </a:ln>
+        </p:spPr>
+      </p:sp>
+      <p:sp>
+        <p:nvSpPr>
+          <p:cNvPr id="4" name="">
+            <a:extLst xmlns:a="http://schemas.openxmlformats.org/drawingml/2006/main">
+              <a:ext uri="{FF2B5EF4-FFF2-40B4-BE49-F238E27FC236}">
+                <a16:creationId xmlns:a16="http://schemas.microsoft.com/office/drawing/2014/main" id="{916FC7EB-E538-4827-B582-A282BDB84FDE}"/>
               </a:ext>
             </a:extLst>
           </p:cNvPr>
@@ -11676,24 +10955,24 @@
         <p:spPr>
           <a:xfrm xmlns:a="http://schemas.openxmlformats.org/drawingml/2006/main">
             <a:off x="533400" y="1457325"/>
-            <a:ext cx="11125200" cy="457200"/>
-          </a:xfrm>
-          <a:prstGeom xmlns:a="http://schemas.openxmlformats.org/drawingml/2006/main" prst="rect">
-            <a:avLst/>
-          </a:prstGeom>
-          <a:noFill xmlns:a="http://schemas.openxmlformats.org/drawingml/2006/main"/>
-          <a:ln xmlns:a="http://schemas.openxmlformats.org/drawingml/2006/main" w="0">
-            <a:noFill/>
-          </a:ln>
-        </p:spPr>
-        <p:txBody>
-          <a:bodyPr xmlns:a="http://schemas.openxmlformats.org/drawingml/2006/main">
-            <a:noAutofit/>
-          </a:bodyPr>
-          <a:lstStyle xmlns:a="http://schemas.openxmlformats.org/drawingml/2006/main"/>
-          <a:p xmlns:a="http://schemas.openxmlformats.org/drawingml/2006/main">
-            <a:pPr>
-              <a:defRPr sz="1800" b="1">
+            <a:ext cx="5410200" cy="438150"/>
+          </a:xfrm>
+          <a:prstGeom xmlns:a="http://schemas.openxmlformats.org/drawingml/2006/main" prst="rect">
+            <a:avLst/>
+          </a:prstGeom>
+          <a:noFill xmlns:a="http://schemas.openxmlformats.org/drawingml/2006/main"/>
+          <a:ln xmlns:a="http://schemas.openxmlformats.org/drawingml/2006/main" w="0">
+            <a:noFill/>
+          </a:ln>
+        </p:spPr>
+        <p:txBody>
+          <a:bodyPr xmlns:a="http://schemas.openxmlformats.org/drawingml/2006/main">
+            <a:noAutofit/>
+          </a:bodyPr>
+          <a:lstStyle xmlns:a="http://schemas.openxmlformats.org/drawingml/2006/main"/>
+          <a:p xmlns:a="http://schemas.openxmlformats.org/drawingml/2006/main">
+            <a:pPr>
+              <a:defRPr sz="1650" b="1">
                 <a:solidFill>
                   <a:srgbClr val="087F86"/>
                 </a:solidFill>
@@ -11703,7 +10982,7 @@
               </a:defRPr>
             </a:pPr>
             <a:r>
-              <a:rPr sz="1800" b="1">
+              <a:rPr sz="1650" b="1">
                 <a:solidFill>
                   <a:srgbClr val="087F86"/>
                 </a:solidFill>
@@ -11718,39 +10997,39 @@
       </p:sp>
       <p:sp>
         <p:nvSpPr>
-          <p:cNvPr id="4" name="">
-            <a:extLst xmlns:a="http://schemas.openxmlformats.org/drawingml/2006/main">
-              <a:ext uri="{FF2B5EF4-FFF2-40B4-BE49-F238E27FC236}">
-                <a16:creationId xmlns:a16="http://schemas.microsoft.com/office/drawing/2014/main" id="{6E34947A-7D62-4EB5-8B18-675F88ABF8DB}"/>
-              </a:ext>
-            </a:extLst>
-          </p:cNvPr>
-          <p:cNvSpPr>
-            <a:spLocks xmlns:a="http://schemas.openxmlformats.org/drawingml/2006/main" noGrp="1"/>
-          </p:cNvSpPr>
-          <p:nvPr/>
-        </p:nvSpPr>
-        <p:spPr>
-          <a:xfrm xmlns:a="http://schemas.openxmlformats.org/drawingml/2006/main">
-            <a:off x="533400" y="1914525"/>
-            <a:ext cx="11125200" cy="371475"/>
-          </a:xfrm>
-          <a:prstGeom xmlns:a="http://schemas.openxmlformats.org/drawingml/2006/main" prst="rect">
-            <a:avLst/>
-          </a:prstGeom>
-          <a:noFill xmlns:a="http://schemas.openxmlformats.org/drawingml/2006/main"/>
-          <a:ln xmlns:a="http://schemas.openxmlformats.org/drawingml/2006/main" w="0">
-            <a:noFill/>
-          </a:ln>
-        </p:spPr>
-        <p:txBody>
-          <a:bodyPr xmlns:a="http://schemas.openxmlformats.org/drawingml/2006/main">
-            <a:noAutofit/>
-          </a:bodyPr>
-          <a:lstStyle xmlns:a="http://schemas.openxmlformats.org/drawingml/2006/main"/>
-          <a:p xmlns:a="http://schemas.openxmlformats.org/drawingml/2006/main">
-            <a:pPr>
-              <a:defRPr sz="1725" b="0">
+          <p:cNvPr id="5" name="">
+            <a:extLst xmlns:a="http://schemas.openxmlformats.org/drawingml/2006/main">
+              <a:ext uri="{FF2B5EF4-FFF2-40B4-BE49-F238E27FC236}">
+                <a16:creationId xmlns:a16="http://schemas.microsoft.com/office/drawing/2014/main" id="{577DD585-2D76-4D0E-BD48-2AAA77EE3532}"/>
+              </a:ext>
+            </a:extLst>
+          </p:cNvPr>
+          <p:cNvSpPr>
+            <a:spLocks xmlns:a="http://schemas.openxmlformats.org/drawingml/2006/main" noGrp="1"/>
+          </p:cNvSpPr>
+          <p:nvPr/>
+        </p:nvSpPr>
+        <p:spPr>
+          <a:xfrm xmlns:a="http://schemas.openxmlformats.org/drawingml/2006/main">
+            <a:off x="533400" y="1895475"/>
+            <a:ext cx="5410200" cy="962025"/>
+          </a:xfrm>
+          <a:prstGeom xmlns:a="http://schemas.openxmlformats.org/drawingml/2006/main" prst="rect">
+            <a:avLst/>
+          </a:prstGeom>
+          <a:noFill xmlns:a="http://schemas.openxmlformats.org/drawingml/2006/main"/>
+          <a:ln xmlns:a="http://schemas.openxmlformats.org/drawingml/2006/main" w="0">
+            <a:noFill/>
+          </a:ln>
+        </p:spPr>
+        <p:txBody>
+          <a:bodyPr xmlns:a="http://schemas.openxmlformats.org/drawingml/2006/main">
+            <a:noAutofit/>
+          </a:bodyPr>
+          <a:lstStyle xmlns:a="http://schemas.openxmlformats.org/drawingml/2006/main"/>
+          <a:p xmlns:a="http://schemas.openxmlformats.org/drawingml/2006/main">
+            <a:pPr>
+              <a:defRPr sz="1575" b="0">
                 <a:solidFill>
                   <a:srgbClr val="071D33"/>
                 </a:solidFill>
@@ -11767,39 +11046,71 @@
       </p:sp>
       <p:sp>
         <p:nvSpPr>
-          <p:cNvPr id="5" name="">
-            <a:extLst xmlns:a="http://schemas.openxmlformats.org/drawingml/2006/main">
-              <a:ext uri="{FF2B5EF4-FFF2-40B4-BE49-F238E27FC236}">
-                <a16:creationId xmlns:a16="http://schemas.microsoft.com/office/drawing/2014/main" id="{56758601-A043-4EF8-861B-2D23E3A9637E}"/>
-              </a:ext>
-            </a:extLst>
-          </p:cNvPr>
-          <p:cNvSpPr>
-            <a:spLocks xmlns:a="http://schemas.openxmlformats.org/drawingml/2006/main" noGrp="1"/>
-          </p:cNvSpPr>
-          <p:nvPr/>
-        </p:nvSpPr>
-        <p:spPr>
-          <a:xfrm xmlns:a="http://schemas.openxmlformats.org/drawingml/2006/main">
-            <a:off x="533400" y="2286000"/>
-            <a:ext cx="11125200" cy="457200"/>
-          </a:xfrm>
-          <a:prstGeom xmlns:a="http://schemas.openxmlformats.org/drawingml/2006/main" prst="rect">
-            <a:avLst/>
-          </a:prstGeom>
-          <a:noFill xmlns:a="http://schemas.openxmlformats.org/drawingml/2006/main"/>
-          <a:ln xmlns:a="http://schemas.openxmlformats.org/drawingml/2006/main" w="0">
-            <a:noFill/>
-          </a:ln>
-        </p:spPr>
-        <p:txBody>
-          <a:bodyPr xmlns:a="http://schemas.openxmlformats.org/drawingml/2006/main">
-            <a:noAutofit/>
-          </a:bodyPr>
-          <a:lstStyle xmlns:a="http://schemas.openxmlformats.org/drawingml/2006/main"/>
-          <a:p xmlns:a="http://schemas.openxmlformats.org/drawingml/2006/main">
-            <a:pPr>
-              <a:defRPr sz="1800" b="1">
+          <p:cNvPr id="6" name="">
+            <a:extLst xmlns:a="http://schemas.openxmlformats.org/drawingml/2006/main">
+              <a:ext uri="{FF2B5EF4-FFF2-40B4-BE49-F238E27FC236}">
+                <a16:creationId xmlns:a16="http://schemas.microsoft.com/office/drawing/2014/main" id="{08CC5B98-21DB-4627-B79F-42C89C96CB34}"/>
+              </a:ext>
+            </a:extLst>
+          </p:cNvPr>
+          <p:cNvSpPr>
+            <a:spLocks xmlns:a="http://schemas.openxmlformats.org/drawingml/2006/main" noGrp="1"/>
+          </p:cNvSpPr>
+          <p:nvPr/>
+        </p:nvSpPr>
+        <p:spPr>
+          <a:xfrm xmlns:a="http://schemas.openxmlformats.org/drawingml/2006/main">
+            <a:off x="6153150" y="1381125"/>
+            <a:ext cx="5486400" cy="1438275"/>
+          </a:xfrm>
+          <a:prstGeom xmlns:a="http://schemas.openxmlformats.org/drawingml/2006/main" prst="roundRect">
+            <a:avLst>
+              <a:gd name="adj" fmla="val 5298"/>
+            </a:avLst>
+          </a:prstGeom>
+          <a:solidFill xmlns:a="http://schemas.openxmlformats.org/drawingml/2006/main">
+            <a:srgbClr val="EDF5F1"/>
+          </a:solidFill>
+          <a:ln xmlns:a="http://schemas.openxmlformats.org/drawingml/2006/main" w="0">
+            <a:noFill/>
+          </a:ln>
+        </p:spPr>
+      </p:sp>
+      <p:sp>
+        <p:nvSpPr>
+          <p:cNvPr id="7" name="">
+            <a:extLst xmlns:a="http://schemas.openxmlformats.org/drawingml/2006/main">
+              <a:ext uri="{FF2B5EF4-FFF2-40B4-BE49-F238E27FC236}">
+                <a16:creationId xmlns:a16="http://schemas.microsoft.com/office/drawing/2014/main" id="{753A5DF4-2600-4F21-AA7D-B4466DF6EF22}"/>
+              </a:ext>
+            </a:extLst>
+          </p:cNvPr>
+          <p:cNvSpPr>
+            <a:spLocks xmlns:a="http://schemas.openxmlformats.org/drawingml/2006/main" noGrp="1"/>
+          </p:cNvSpPr>
+          <p:nvPr/>
+        </p:nvSpPr>
+        <p:spPr>
+          <a:xfrm xmlns:a="http://schemas.openxmlformats.org/drawingml/2006/main">
+            <a:off x="6248400" y="1457325"/>
+            <a:ext cx="5410200" cy="438150"/>
+          </a:xfrm>
+          <a:prstGeom xmlns:a="http://schemas.openxmlformats.org/drawingml/2006/main" prst="rect">
+            <a:avLst/>
+          </a:prstGeom>
+          <a:noFill xmlns:a="http://schemas.openxmlformats.org/drawingml/2006/main"/>
+          <a:ln xmlns:a="http://schemas.openxmlformats.org/drawingml/2006/main" w="0">
+            <a:noFill/>
+          </a:ln>
+        </p:spPr>
+        <p:txBody>
+          <a:bodyPr xmlns:a="http://schemas.openxmlformats.org/drawingml/2006/main">
+            <a:noAutofit/>
+          </a:bodyPr>
+          <a:lstStyle xmlns:a="http://schemas.openxmlformats.org/drawingml/2006/main"/>
+          <a:p xmlns:a="http://schemas.openxmlformats.org/drawingml/2006/main">
+            <a:pPr>
+              <a:defRPr sz="1650" b="1">
                 <a:solidFill>
                   <a:srgbClr val="087F86"/>
                 </a:solidFill>
@@ -11809,7 +11120,7 @@
               </a:defRPr>
             </a:pPr>
             <a:r>
-              <a:rPr sz="1800" b="1">
+              <a:rPr sz="1650" b="1">
                 <a:solidFill>
                   <a:srgbClr val="087F86"/>
                 </a:solidFill>
@@ -11824,39 +11135,39 @@
       </p:sp>
       <p:sp>
         <p:nvSpPr>
-          <p:cNvPr id="6" name="">
-            <a:extLst xmlns:a="http://schemas.openxmlformats.org/drawingml/2006/main">
-              <a:ext uri="{FF2B5EF4-FFF2-40B4-BE49-F238E27FC236}">
-                <a16:creationId xmlns:a16="http://schemas.microsoft.com/office/drawing/2014/main" id="{68725178-3B45-41A4-8B77-A9F7C00576D4}"/>
-              </a:ext>
-            </a:extLst>
-          </p:cNvPr>
-          <p:cNvSpPr>
-            <a:spLocks xmlns:a="http://schemas.openxmlformats.org/drawingml/2006/main" noGrp="1"/>
-          </p:cNvSpPr>
-          <p:nvPr/>
-        </p:nvSpPr>
-        <p:spPr>
-          <a:xfrm xmlns:a="http://schemas.openxmlformats.org/drawingml/2006/main">
-            <a:off x="533400" y="2743200"/>
-            <a:ext cx="11125200" cy="647700"/>
-          </a:xfrm>
-          <a:prstGeom xmlns:a="http://schemas.openxmlformats.org/drawingml/2006/main" prst="rect">
-            <a:avLst/>
-          </a:prstGeom>
-          <a:noFill xmlns:a="http://schemas.openxmlformats.org/drawingml/2006/main"/>
-          <a:ln xmlns:a="http://schemas.openxmlformats.org/drawingml/2006/main" w="0">
-            <a:noFill/>
-          </a:ln>
-        </p:spPr>
-        <p:txBody>
-          <a:bodyPr xmlns:a="http://schemas.openxmlformats.org/drawingml/2006/main">
-            <a:noAutofit/>
-          </a:bodyPr>
-          <a:lstStyle xmlns:a="http://schemas.openxmlformats.org/drawingml/2006/main"/>
-          <a:p xmlns:a="http://schemas.openxmlformats.org/drawingml/2006/main">
-            <a:pPr>
-              <a:defRPr sz="1725" b="0">
+          <p:cNvPr id="8" name="">
+            <a:extLst xmlns:a="http://schemas.openxmlformats.org/drawingml/2006/main">
+              <a:ext uri="{FF2B5EF4-FFF2-40B4-BE49-F238E27FC236}">
+                <a16:creationId xmlns:a16="http://schemas.microsoft.com/office/drawing/2014/main" id="{EBC80F8C-CADC-47DE-AB24-F5FF7421E62D}"/>
+              </a:ext>
+            </a:extLst>
+          </p:cNvPr>
+          <p:cNvSpPr>
+            <a:spLocks xmlns:a="http://schemas.openxmlformats.org/drawingml/2006/main" noGrp="1"/>
+          </p:cNvSpPr>
+          <p:nvPr/>
+        </p:nvSpPr>
+        <p:spPr>
+          <a:xfrm xmlns:a="http://schemas.openxmlformats.org/drawingml/2006/main">
+            <a:off x="6248400" y="1895475"/>
+            <a:ext cx="5410200" cy="962025"/>
+          </a:xfrm>
+          <a:prstGeom xmlns:a="http://schemas.openxmlformats.org/drawingml/2006/main" prst="rect">
+            <a:avLst/>
+          </a:prstGeom>
+          <a:noFill xmlns:a="http://schemas.openxmlformats.org/drawingml/2006/main"/>
+          <a:ln xmlns:a="http://schemas.openxmlformats.org/drawingml/2006/main" w="0">
+            <a:noFill/>
+          </a:ln>
+        </p:spPr>
+        <p:txBody>
+          <a:bodyPr xmlns:a="http://schemas.openxmlformats.org/drawingml/2006/main">
+            <a:noAutofit/>
+          </a:bodyPr>
+          <a:lstStyle xmlns:a="http://schemas.openxmlformats.org/drawingml/2006/main"/>
+          <a:p xmlns:a="http://schemas.openxmlformats.org/drawingml/2006/main">
+            <a:pPr>
+              <a:defRPr sz="1575" b="0">
                 <a:solidFill>
                   <a:srgbClr val="071D33"/>
                 </a:solidFill>
@@ -11873,39 +11184,71 @@
       </p:sp>
       <p:sp>
         <p:nvSpPr>
-          <p:cNvPr id="7" name="">
-            <a:extLst xmlns:a="http://schemas.openxmlformats.org/drawingml/2006/main">
-              <a:ext uri="{FF2B5EF4-FFF2-40B4-BE49-F238E27FC236}">
-                <a16:creationId xmlns:a16="http://schemas.microsoft.com/office/drawing/2014/main" id="{ED098A88-5E02-4C06-BFC9-4ED13FF5C57C}"/>
-              </a:ext>
-            </a:extLst>
-          </p:cNvPr>
-          <p:cNvSpPr>
-            <a:spLocks xmlns:a="http://schemas.openxmlformats.org/drawingml/2006/main" noGrp="1"/>
-          </p:cNvSpPr>
-          <p:nvPr/>
-        </p:nvSpPr>
-        <p:spPr>
-          <a:xfrm xmlns:a="http://schemas.openxmlformats.org/drawingml/2006/main">
-            <a:off x="533400" y="3390900"/>
-            <a:ext cx="11125200" cy="457200"/>
-          </a:xfrm>
-          <a:prstGeom xmlns:a="http://schemas.openxmlformats.org/drawingml/2006/main" prst="rect">
-            <a:avLst/>
-          </a:prstGeom>
-          <a:noFill xmlns:a="http://schemas.openxmlformats.org/drawingml/2006/main"/>
-          <a:ln xmlns:a="http://schemas.openxmlformats.org/drawingml/2006/main" w="0">
-            <a:noFill/>
-          </a:ln>
-        </p:spPr>
-        <p:txBody>
-          <a:bodyPr xmlns:a="http://schemas.openxmlformats.org/drawingml/2006/main">
-            <a:noAutofit/>
-          </a:bodyPr>
-          <a:lstStyle xmlns:a="http://schemas.openxmlformats.org/drawingml/2006/main"/>
-          <a:p xmlns:a="http://schemas.openxmlformats.org/drawingml/2006/main">
-            <a:pPr>
-              <a:defRPr sz="1800" b="1">
+          <p:cNvPr id="9" name="">
+            <a:extLst xmlns:a="http://schemas.openxmlformats.org/drawingml/2006/main">
+              <a:ext uri="{FF2B5EF4-FFF2-40B4-BE49-F238E27FC236}">
+                <a16:creationId xmlns:a16="http://schemas.microsoft.com/office/drawing/2014/main" id="{302098C3-EF11-48BE-8915-498E774861E7}"/>
+              </a:ext>
+            </a:extLst>
+          </p:cNvPr>
+          <p:cNvSpPr>
+            <a:spLocks xmlns:a="http://schemas.openxmlformats.org/drawingml/2006/main" noGrp="1"/>
+          </p:cNvSpPr>
+          <p:nvPr/>
+        </p:nvSpPr>
+        <p:spPr>
+          <a:xfrm xmlns:a="http://schemas.openxmlformats.org/drawingml/2006/main">
+            <a:off x="438150" y="2914650"/>
+            <a:ext cx="5486400" cy="1438275"/>
+          </a:xfrm>
+          <a:prstGeom xmlns:a="http://schemas.openxmlformats.org/drawingml/2006/main" prst="roundRect">
+            <a:avLst>
+              <a:gd name="adj" fmla="val 5298"/>
+            </a:avLst>
+          </a:prstGeom>
+          <a:solidFill xmlns:a="http://schemas.openxmlformats.org/drawingml/2006/main">
+            <a:srgbClr val="EDF5F1"/>
+          </a:solidFill>
+          <a:ln xmlns:a="http://schemas.openxmlformats.org/drawingml/2006/main" w="0">
+            <a:noFill/>
+          </a:ln>
+        </p:spPr>
+      </p:sp>
+      <p:sp>
+        <p:nvSpPr>
+          <p:cNvPr id="10" name="">
+            <a:extLst xmlns:a="http://schemas.openxmlformats.org/drawingml/2006/main">
+              <a:ext uri="{FF2B5EF4-FFF2-40B4-BE49-F238E27FC236}">
+                <a16:creationId xmlns:a16="http://schemas.microsoft.com/office/drawing/2014/main" id="{57D43380-CCEB-4AF3-AD70-20279F0D5541}"/>
+              </a:ext>
+            </a:extLst>
+          </p:cNvPr>
+          <p:cNvSpPr>
+            <a:spLocks xmlns:a="http://schemas.openxmlformats.org/drawingml/2006/main" noGrp="1"/>
+          </p:cNvSpPr>
+          <p:nvPr/>
+        </p:nvSpPr>
+        <p:spPr>
+          <a:xfrm xmlns:a="http://schemas.openxmlformats.org/drawingml/2006/main">
+            <a:off x="533400" y="2990850"/>
+            <a:ext cx="5410200" cy="438150"/>
+          </a:xfrm>
+          <a:prstGeom xmlns:a="http://schemas.openxmlformats.org/drawingml/2006/main" prst="rect">
+            <a:avLst/>
+          </a:prstGeom>
+          <a:noFill xmlns:a="http://schemas.openxmlformats.org/drawingml/2006/main"/>
+          <a:ln xmlns:a="http://schemas.openxmlformats.org/drawingml/2006/main" w="0">
+            <a:noFill/>
+          </a:ln>
+        </p:spPr>
+        <p:txBody>
+          <a:bodyPr xmlns:a="http://schemas.openxmlformats.org/drawingml/2006/main">
+            <a:noAutofit/>
+          </a:bodyPr>
+          <a:lstStyle xmlns:a="http://schemas.openxmlformats.org/drawingml/2006/main"/>
+          <a:p xmlns:a="http://schemas.openxmlformats.org/drawingml/2006/main">
+            <a:pPr>
+              <a:defRPr sz="1650" b="1">
                 <a:solidFill>
                   <a:srgbClr val="087F86"/>
                 </a:solidFill>
@@ -11915,7 +11258,7 @@
               </a:defRPr>
             </a:pPr>
             <a:r>
-              <a:rPr sz="1800" b="1">
+              <a:rPr sz="1650" b="1">
                 <a:solidFill>
                   <a:srgbClr val="087F86"/>
                 </a:solidFill>
@@ -11930,39 +11273,39 @@
       </p:sp>
       <p:sp>
         <p:nvSpPr>
-          <p:cNvPr id="8" name="">
-            <a:extLst xmlns:a="http://schemas.openxmlformats.org/drawingml/2006/main">
-              <a:ext uri="{FF2B5EF4-FFF2-40B4-BE49-F238E27FC236}">
-                <a16:creationId xmlns:a16="http://schemas.microsoft.com/office/drawing/2014/main" id="{FA8E20FB-6A50-465F-9DBB-BE28FEA327AA}"/>
-              </a:ext>
-            </a:extLst>
-          </p:cNvPr>
-          <p:cNvSpPr>
-            <a:spLocks xmlns:a="http://schemas.openxmlformats.org/drawingml/2006/main" noGrp="1"/>
-          </p:cNvSpPr>
-          <p:nvPr/>
-        </p:nvSpPr>
-        <p:spPr>
-          <a:xfrm xmlns:a="http://schemas.openxmlformats.org/drawingml/2006/main">
-            <a:off x="533400" y="3848100"/>
-            <a:ext cx="11125200" cy="647700"/>
-          </a:xfrm>
-          <a:prstGeom xmlns:a="http://schemas.openxmlformats.org/drawingml/2006/main" prst="rect">
-            <a:avLst/>
-          </a:prstGeom>
-          <a:noFill xmlns:a="http://schemas.openxmlformats.org/drawingml/2006/main"/>
-          <a:ln xmlns:a="http://schemas.openxmlformats.org/drawingml/2006/main" w="0">
-            <a:noFill/>
-          </a:ln>
-        </p:spPr>
-        <p:txBody>
-          <a:bodyPr xmlns:a="http://schemas.openxmlformats.org/drawingml/2006/main">
-            <a:noAutofit/>
-          </a:bodyPr>
-          <a:lstStyle xmlns:a="http://schemas.openxmlformats.org/drawingml/2006/main"/>
-          <a:p xmlns:a="http://schemas.openxmlformats.org/drawingml/2006/main">
-            <a:pPr>
-              <a:defRPr sz="1725" b="0">
+          <p:cNvPr id="11" name="">
+            <a:extLst xmlns:a="http://schemas.openxmlformats.org/drawingml/2006/main">
+              <a:ext uri="{FF2B5EF4-FFF2-40B4-BE49-F238E27FC236}">
+                <a16:creationId xmlns:a16="http://schemas.microsoft.com/office/drawing/2014/main" id="{B9053F71-D3D5-4223-BA93-73CFFC527DC7}"/>
+              </a:ext>
+            </a:extLst>
+          </p:cNvPr>
+          <p:cNvSpPr>
+            <a:spLocks xmlns:a="http://schemas.openxmlformats.org/drawingml/2006/main" noGrp="1"/>
+          </p:cNvSpPr>
+          <p:nvPr/>
+        </p:nvSpPr>
+        <p:spPr>
+          <a:xfrm xmlns:a="http://schemas.openxmlformats.org/drawingml/2006/main">
+            <a:off x="533400" y="3429000"/>
+            <a:ext cx="5410200" cy="962025"/>
+          </a:xfrm>
+          <a:prstGeom xmlns:a="http://schemas.openxmlformats.org/drawingml/2006/main" prst="rect">
+            <a:avLst/>
+          </a:prstGeom>
+          <a:noFill xmlns:a="http://schemas.openxmlformats.org/drawingml/2006/main"/>
+          <a:ln xmlns:a="http://schemas.openxmlformats.org/drawingml/2006/main" w="0">
+            <a:noFill/>
+          </a:ln>
+        </p:spPr>
+        <p:txBody>
+          <a:bodyPr xmlns:a="http://schemas.openxmlformats.org/drawingml/2006/main">
+            <a:noAutofit/>
+          </a:bodyPr>
+          <a:lstStyle xmlns:a="http://schemas.openxmlformats.org/drawingml/2006/main"/>
+          <a:p xmlns:a="http://schemas.openxmlformats.org/drawingml/2006/main">
+            <a:pPr>
+              <a:defRPr sz="1575" b="0">
                 <a:solidFill>
                   <a:srgbClr val="071D33"/>
                 </a:solidFill>
@@ -11986,10 +11329,286 @@
       </p:sp>
       <p:sp>
         <p:nvSpPr>
-          <p:cNvPr id="9" name="">
-            <a:extLst xmlns:a="http://schemas.openxmlformats.org/drawingml/2006/main">
-              <a:ext uri="{FF2B5EF4-FFF2-40B4-BE49-F238E27FC236}">
-                <a16:creationId xmlns:a16="http://schemas.microsoft.com/office/drawing/2014/main" id="{2D0D1F53-BFCB-40A2-8C2C-3C10B17A969A}"/>
+          <p:cNvPr id="12" name="">
+            <a:extLst xmlns:a="http://schemas.openxmlformats.org/drawingml/2006/main">
+              <a:ext uri="{FF2B5EF4-FFF2-40B4-BE49-F238E27FC236}">
+                <a16:creationId xmlns:a16="http://schemas.microsoft.com/office/drawing/2014/main" id="{F77C2B5A-1486-4991-ADE8-96F1623F95B0}"/>
+              </a:ext>
+            </a:extLst>
+          </p:cNvPr>
+          <p:cNvSpPr>
+            <a:spLocks xmlns:a="http://schemas.openxmlformats.org/drawingml/2006/main" noGrp="1"/>
+          </p:cNvSpPr>
+          <p:nvPr/>
+        </p:nvSpPr>
+        <p:spPr>
+          <a:xfrm xmlns:a="http://schemas.openxmlformats.org/drawingml/2006/main">
+            <a:off x="6153150" y="2914650"/>
+            <a:ext cx="5486400" cy="1438275"/>
+          </a:xfrm>
+          <a:prstGeom xmlns:a="http://schemas.openxmlformats.org/drawingml/2006/main" prst="roundRect">
+            <a:avLst>
+              <a:gd name="adj" fmla="val 5298"/>
+            </a:avLst>
+          </a:prstGeom>
+          <a:solidFill xmlns:a="http://schemas.openxmlformats.org/drawingml/2006/main">
+            <a:srgbClr val="EDF5F1"/>
+          </a:solidFill>
+          <a:ln xmlns:a="http://schemas.openxmlformats.org/drawingml/2006/main" w="0">
+            <a:noFill/>
+          </a:ln>
+        </p:spPr>
+      </p:sp>
+      <p:sp>
+        <p:nvSpPr>
+          <p:cNvPr id="13" name="">
+            <a:extLst xmlns:a="http://schemas.openxmlformats.org/drawingml/2006/main">
+              <a:ext uri="{FF2B5EF4-FFF2-40B4-BE49-F238E27FC236}">
+                <a16:creationId xmlns:a16="http://schemas.microsoft.com/office/drawing/2014/main" id="{9DEAD406-D558-409C-8127-69DC69D11159}"/>
+              </a:ext>
+            </a:extLst>
+          </p:cNvPr>
+          <p:cNvSpPr>
+            <a:spLocks xmlns:a="http://schemas.openxmlformats.org/drawingml/2006/main" noGrp="1"/>
+          </p:cNvSpPr>
+          <p:nvPr/>
+        </p:nvSpPr>
+        <p:spPr>
+          <a:xfrm xmlns:a="http://schemas.openxmlformats.org/drawingml/2006/main">
+            <a:off x="6248400" y="2990850"/>
+            <a:ext cx="5410200" cy="438150"/>
+          </a:xfrm>
+          <a:prstGeom xmlns:a="http://schemas.openxmlformats.org/drawingml/2006/main" prst="rect">
+            <a:avLst/>
+          </a:prstGeom>
+          <a:noFill xmlns:a="http://schemas.openxmlformats.org/drawingml/2006/main"/>
+          <a:ln xmlns:a="http://schemas.openxmlformats.org/drawingml/2006/main" w="0">
+            <a:noFill/>
+          </a:ln>
+        </p:spPr>
+        <p:txBody>
+          <a:bodyPr xmlns:a="http://schemas.openxmlformats.org/drawingml/2006/main">
+            <a:noAutofit/>
+          </a:bodyPr>
+          <a:lstStyle xmlns:a="http://schemas.openxmlformats.org/drawingml/2006/main"/>
+          <a:p xmlns:a="http://schemas.openxmlformats.org/drawingml/2006/main">
+            <a:pPr>
+              <a:defRPr sz="1650" b="1">
+                <a:solidFill>
+                  <a:srgbClr val="087F86"/>
+                </a:solidFill>
+                <a:latin typeface="Arial"/>
+                <a:ea typeface="Arial"/>
+                <a:cs typeface="Arial"/>
+              </a:defRPr>
+            </a:pPr>
+            <a:r>
+              <a:rPr sz="1650" b="1">
+                <a:solidFill>
+                  <a:srgbClr val="087F86"/>
+                </a:solidFill>
+                <a:latin typeface="Arial"/>
+                <a:ea typeface="Arial"/>
+                <a:cs typeface="Arial"/>
+              </a:rPr>
+              <a:t>Familie und Totenfürsorge</a:t>
+            </a:r>
+          </a:p>
+        </p:txBody>
+      </p:sp>
+      <p:sp>
+        <p:nvSpPr>
+          <p:cNvPr id="14" name="">
+            <a:extLst xmlns:a="http://schemas.openxmlformats.org/drawingml/2006/main">
+              <a:ext uri="{FF2B5EF4-FFF2-40B4-BE49-F238E27FC236}">
+                <a16:creationId xmlns:a16="http://schemas.microsoft.com/office/drawing/2014/main" id="{8A14F313-71F1-4D79-A45E-D84750B8920E}"/>
+              </a:ext>
+            </a:extLst>
+          </p:cNvPr>
+          <p:cNvSpPr>
+            <a:spLocks xmlns:a="http://schemas.openxmlformats.org/drawingml/2006/main" noGrp="1"/>
+          </p:cNvSpPr>
+          <p:nvPr/>
+        </p:nvSpPr>
+        <p:spPr>
+          <a:xfrm xmlns:a="http://schemas.openxmlformats.org/drawingml/2006/main">
+            <a:off x="6248400" y="3429000"/>
+            <a:ext cx="5410200" cy="962025"/>
+          </a:xfrm>
+          <a:prstGeom xmlns:a="http://schemas.openxmlformats.org/drawingml/2006/main" prst="rect">
+            <a:avLst/>
+          </a:prstGeom>
+          <a:noFill xmlns:a="http://schemas.openxmlformats.org/drawingml/2006/main"/>
+          <a:ln xmlns:a="http://schemas.openxmlformats.org/drawingml/2006/main" w="0">
+            <a:noFill/>
+          </a:ln>
+        </p:spPr>
+        <p:txBody>
+          <a:bodyPr xmlns:a="http://schemas.openxmlformats.org/drawingml/2006/main">
+            <a:noAutofit/>
+          </a:bodyPr>
+          <a:lstStyle xmlns:a="http://schemas.openxmlformats.org/drawingml/2006/main"/>
+          <a:p xmlns:a="http://schemas.openxmlformats.org/drawingml/2006/main">
+            <a:pPr>
+              <a:defRPr sz="1575" b="0">
+                <a:solidFill>
+                  <a:srgbClr val="071D33"/>
+                </a:solidFill>
+                <a:latin typeface="Arial"/>
+                <a:ea typeface="Arial"/>
+                <a:cs typeface="Arial"/>
+              </a:defRPr>
+            </a:pPr>
+            <a:r>
+              <a:t>wichtige Informationen und eigene Belastung; Angehörige entscheiden nicht automatisch über jede medizinische Maßnahme</a:t>
+            </a:r>
+          </a:p>
+        </p:txBody>
+      </p:sp>
+      <p:sp>
+        <p:nvSpPr>
+          <p:cNvPr id="15" name="">
+            <a:extLst xmlns:a="http://schemas.openxmlformats.org/drawingml/2006/main">
+              <a:ext uri="{FF2B5EF4-FFF2-40B4-BE49-F238E27FC236}">
+                <a16:creationId xmlns:a16="http://schemas.microsoft.com/office/drawing/2014/main" id="{E4DBE936-F435-43C8-BE88-B6DD0171D30E}"/>
+              </a:ext>
+            </a:extLst>
+          </p:cNvPr>
+          <p:cNvSpPr>
+            <a:spLocks xmlns:a="http://schemas.openxmlformats.org/drawingml/2006/main" noGrp="1"/>
+          </p:cNvSpPr>
+          <p:nvPr/>
+        </p:nvSpPr>
+        <p:spPr>
+          <a:xfrm xmlns:a="http://schemas.openxmlformats.org/drawingml/2006/main">
+            <a:off x="438150" y="4448175"/>
+            <a:ext cx="11201400" cy="942975"/>
+          </a:xfrm>
+          <a:prstGeom xmlns:a="http://schemas.openxmlformats.org/drawingml/2006/main" prst="roundRect">
+            <a:avLst>
+              <a:gd name="adj" fmla="val 8081"/>
+            </a:avLst>
+          </a:prstGeom>
+          <a:solidFill xmlns:a="http://schemas.openxmlformats.org/drawingml/2006/main">
+            <a:srgbClr val="EDF5F1"/>
+          </a:solidFill>
+          <a:ln xmlns:a="http://schemas.openxmlformats.org/drawingml/2006/main" w="0">
+            <a:noFill/>
+          </a:ln>
+        </p:spPr>
+      </p:sp>
+      <p:sp>
+        <p:nvSpPr>
+          <p:cNvPr id="16" name="">
+            <a:extLst xmlns:a="http://schemas.openxmlformats.org/drawingml/2006/main">
+              <a:ext uri="{FF2B5EF4-FFF2-40B4-BE49-F238E27FC236}">
+                <a16:creationId xmlns:a16="http://schemas.microsoft.com/office/drawing/2014/main" id="{467A7E9D-6589-48DA-8B02-594B22B14A3C}"/>
+              </a:ext>
+            </a:extLst>
+          </p:cNvPr>
+          <p:cNvSpPr>
+            <a:spLocks xmlns:a="http://schemas.openxmlformats.org/drawingml/2006/main" noGrp="1"/>
+          </p:cNvSpPr>
+          <p:nvPr/>
+        </p:nvSpPr>
+        <p:spPr>
+          <a:xfrm xmlns:a="http://schemas.openxmlformats.org/drawingml/2006/main">
+            <a:off x="533400" y="4524375"/>
+            <a:ext cx="11125200" cy="438150"/>
+          </a:xfrm>
+          <a:prstGeom xmlns:a="http://schemas.openxmlformats.org/drawingml/2006/main" prst="rect">
+            <a:avLst/>
+          </a:prstGeom>
+          <a:noFill xmlns:a="http://schemas.openxmlformats.org/drawingml/2006/main"/>
+          <a:ln xmlns:a="http://schemas.openxmlformats.org/drawingml/2006/main" w="0">
+            <a:noFill/>
+          </a:ln>
+        </p:spPr>
+        <p:txBody>
+          <a:bodyPr xmlns:a="http://schemas.openxmlformats.org/drawingml/2006/main">
+            <a:noAutofit/>
+          </a:bodyPr>
+          <a:lstStyle xmlns:a="http://schemas.openxmlformats.org/drawingml/2006/main"/>
+          <a:p xmlns:a="http://schemas.openxmlformats.org/drawingml/2006/main">
+            <a:pPr>
+              <a:defRPr sz="1650" b="1">
+                <a:solidFill>
+                  <a:srgbClr val="087F86"/>
+                </a:solidFill>
+                <a:latin typeface="Arial"/>
+                <a:ea typeface="Arial"/>
+                <a:cs typeface="Arial"/>
+              </a:defRPr>
+            </a:pPr>
+            <a:r>
+              <a:rPr sz="1650" b="1">
+                <a:solidFill>
+                  <a:srgbClr val="087F86"/>
+                </a:solidFill>
+                <a:latin typeface="Arial"/>
+                <a:ea typeface="Arial"/>
+                <a:cs typeface="Arial"/>
+              </a:rPr>
+              <a:t>Behandlungsteam</a:t>
+            </a:r>
+          </a:p>
+        </p:txBody>
+      </p:sp>
+      <p:sp>
+        <p:nvSpPr>
+          <p:cNvPr id="17" name="">
+            <a:extLst xmlns:a="http://schemas.openxmlformats.org/drawingml/2006/main">
+              <a:ext uri="{FF2B5EF4-FFF2-40B4-BE49-F238E27FC236}">
+                <a16:creationId xmlns:a16="http://schemas.microsoft.com/office/drawing/2014/main" id="{BD22BEC8-C615-497A-A6FE-698D66976A33}"/>
+              </a:ext>
+            </a:extLst>
+          </p:cNvPr>
+          <p:cNvSpPr>
+            <a:spLocks xmlns:a="http://schemas.openxmlformats.org/drawingml/2006/main" noGrp="1"/>
+          </p:cNvSpPr>
+          <p:nvPr/>
+        </p:nvSpPr>
+        <p:spPr>
+          <a:xfrm xmlns:a="http://schemas.openxmlformats.org/drawingml/2006/main">
+            <a:off x="533400" y="4962525"/>
+            <a:ext cx="11125200" cy="466725"/>
+          </a:xfrm>
+          <a:prstGeom xmlns:a="http://schemas.openxmlformats.org/drawingml/2006/main" prst="rect">
+            <a:avLst/>
+          </a:prstGeom>
+          <a:noFill xmlns:a="http://schemas.openxmlformats.org/drawingml/2006/main"/>
+          <a:ln xmlns:a="http://schemas.openxmlformats.org/drawingml/2006/main" w="0">
+            <a:noFill/>
+          </a:ln>
+        </p:spPr>
+        <p:txBody>
+          <a:bodyPr xmlns:a="http://schemas.openxmlformats.org/drawingml/2006/main">
+            <a:noAutofit/>
+          </a:bodyPr>
+          <a:lstStyle xmlns:a="http://schemas.openxmlformats.org/drawingml/2006/main"/>
+          <a:p xmlns:a="http://schemas.openxmlformats.org/drawingml/2006/main">
+            <a:pPr>
+              <a:defRPr sz="1575" b="0">
+                <a:solidFill>
+                  <a:srgbClr val="071D33"/>
+                </a:solidFill>
+                <a:latin typeface="Arial"/>
+                <a:ea typeface="Arial"/>
+                <a:cs typeface="Arial"/>
+              </a:defRPr>
+            </a:pPr>
+            <a:r>
+              <a:t>Todesfeststellung, medizinische Indikation, Prognose, Ressourcen, interprofessionelle Beratung und Dokumentation</a:t>
+            </a:r>
+          </a:p>
+        </p:txBody>
+      </p:sp>
+      <p:sp>
+        <p:nvSpPr>
+          <p:cNvPr id="18" name="">
+            <a:extLst xmlns:a="http://schemas.openxmlformats.org/drawingml/2006/main">
+              <a:ext uri="{FF2B5EF4-FFF2-40B4-BE49-F238E27FC236}">
+                <a16:creationId xmlns:a16="http://schemas.microsoft.com/office/drawing/2014/main" id="{9356F0C2-9A94-4E3A-A654-60AF0A4D95AA}"/>
               </a:ext>
             </a:extLst>
           </p:cNvPr>
@@ -12032,7 +11651,7 @@
             </a:r>
             <a:r>
               <a:rPr>
-                <a:hlinkClick xmlns:r="http://schemas.openxmlformats.org/officeDocument/2006/relationships" r:id="R3b89ffd5683a400c"/>
+                <a:hlinkClick xmlns:r="http://schemas.openxmlformats.org/officeDocument/2006/relationships" r:id="R5e74c2c24293471f"/>
               </a:rPr>
               <a:t>Quelle öffnen (beck-online.beck.de)</a:t>
             </a:r>
@@ -12041,7 +11660,7 @@
             </a:r>
             <a:r>
               <a:rPr>
-                <a:hlinkClick xmlns:r="http://schemas.openxmlformats.org/officeDocument/2006/relationships" r:id="R5edae0746cdb4eb8"/>
+                <a:hlinkClick xmlns:r="http://schemas.openxmlformats.org/officeDocument/2006/relationships" r:id="R1fca32fbdbf44714"/>
               </a:rPr>
               <a:t>Quelle öffnen (bundesverfassungsgericht.de)</a:t>
             </a:r>
@@ -12053,10 +11672,10 @@
       </p:sp>
       <p:sp>
         <p:nvSpPr>
-          <p:cNvPr id="10" name="">
-            <a:extLst xmlns:a="http://schemas.openxmlformats.org/drawingml/2006/main">
-              <a:ext uri="{FF2B5EF4-FFF2-40B4-BE49-F238E27FC236}">
-                <a16:creationId xmlns:a16="http://schemas.microsoft.com/office/drawing/2014/main" id="{22B1F364-8B4E-49BD-A0F6-695BC499BBF2}"/>
+          <p:cNvPr id="19" name="">
+            <a:extLst xmlns:a="http://schemas.openxmlformats.org/drawingml/2006/main">
+              <a:ext uri="{FF2B5EF4-FFF2-40B4-BE49-F238E27FC236}">
+                <a16:creationId xmlns:a16="http://schemas.microsoft.com/office/drawing/2014/main" id="{43D7153D-82C9-48AC-828D-0AB0F0F93D11}"/>
               </a:ext>
             </a:extLst>
           </p:cNvPr>
@@ -12103,7 +11722,7 @@
                 <a:ea typeface="Arial"/>
                 <a:cs typeface="Arial"/>
               </a:rPr>
-              <a:t>Recht Medizinisch · Folie 6 · Seite 1/2</a:t>
+              <a:t>Recht Medizinisch · Folie 6 · Seite 1/1</a:t>
             </a:r>
           </a:p>
         </p:txBody>
@@ -12111,7 +11730,7 @@
     </p:spTree>
     <p:extLst>
       <p:ext uri="{BB962C8B-B14F-4D97-AF65-F5344CB8AC3E}">
-        <p14:creationId xmlns:p14="http://schemas.microsoft.com/office/powerpoint/2010/main" val="261721963"/>
+        <p14:creationId xmlns:p14="http://schemas.microsoft.com/office/powerpoint/2010/main" val="1105268620"/>
       </p:ext>
     </p:extLst>
   </p:cSld>
@@ -12124,7 +11743,7 @@
     <p:bg>
       <p:bgPr>
         <a:solidFill xmlns:a="http://schemas.openxmlformats.org/drawingml/2006/main">
-          <a:srgbClr val="F8F5ED"/>
+          <a:srgbClr val="071D33"/>
         </a:solidFill>
       </p:bgPr>
     </p:bg>
@@ -12139,10 +11758,10 @@
       </p:grpSpPr>
       <p:sp>
         <p:nvSpPr>
-          <p:cNvPr id="9" name="">
-            <a:extLst xmlns:a="http://schemas.openxmlformats.org/drawingml/2006/main">
-              <a:ext uri="{FF2B5EF4-FFF2-40B4-BE49-F238E27FC236}">
-                <a16:creationId xmlns:a16="http://schemas.microsoft.com/office/drawing/2014/main" id="{39E7A67A-3982-4077-8650-8E93B892515E}"/>
+          <p:cNvPr id="11" name="">
+            <a:extLst xmlns:a="http://schemas.openxmlformats.org/drawingml/2006/main">
+              <a:ext uri="{FF2B5EF4-FFF2-40B4-BE49-F238E27FC236}">
+                <a16:creationId xmlns:a16="http://schemas.microsoft.com/office/drawing/2014/main" id="{0AB38D60-3C8E-4CB8-908C-B942BB0B3192}"/>
               </a:ext>
             </a:extLst>
           </p:cNvPr>
@@ -12173,7 +11792,7 @@
             <a:pPr>
               <a:defRPr sz="1125" b="1">
                 <a:solidFill>
-                  <a:srgbClr val="087F86"/>
+                  <a:srgbClr val="59D7D1"/>
                 </a:solidFill>
                 <a:latin typeface="Arial"/>
                 <a:ea typeface="Arial"/>
@@ -12183,13 +11802,13 @@
             <a:r>
               <a:rPr sz="1125" b="1">
                 <a:solidFill>
-                  <a:srgbClr val="087F86"/>
+                  <a:srgbClr val="59D7D1"/>
                 </a:solidFill>
                 <a:latin typeface="Arial"/>
                 <a:ea typeface="Arial"/>
                 <a:cs typeface="Arial"/>
               </a:rPr>
-              <a:t>INTERESSEN UND VERANTWORTUNG</a:t>
+              <a:t>ERST TATSACHEN, DANN RECHT</a:t>
             </a:r>
           </a:p>
         </p:txBody>
@@ -12199,7 +11818,7 @@
           <p:cNvPr id="2" name="">
             <a:extLst xmlns:a="http://schemas.openxmlformats.org/drawingml/2006/main">
               <a:ext uri="{FF2B5EF4-FFF2-40B4-BE49-F238E27FC236}">
-                <a16:creationId xmlns:a16="http://schemas.microsoft.com/office/drawing/2014/main" id="{ED48D037-5C51-4928-86D4-F646469408D5}"/>
+                <a16:creationId xmlns:a16="http://schemas.microsoft.com/office/drawing/2014/main" id="{A4015E04-B017-4084-A7CE-37411BDFECE1}"/>
               </a:ext>
             </a:extLst>
           </p:cNvPr>
@@ -12230,7 +11849,7 @@
             <a:pPr>
               <a:defRPr sz="2850" b="1">
                 <a:solidFill>
-                  <a:srgbClr val="071D33"/>
+                  <a:srgbClr val="FFFFFF"/>
                 </a:solidFill>
                 <a:latin typeface="Georgia"/>
                 <a:ea typeface="Georgia"/>
@@ -12240,13 +11859,13 @@
             <a:r>
               <a:rPr sz="2850" b="1">
                 <a:solidFill>
-                  <a:srgbClr val="071D33"/>
+                  <a:srgbClr val="FFFFFF"/>
                 </a:solidFill>
                 <a:latin typeface="Georgia"/>
                 <a:ea typeface="Georgia"/>
                 <a:cs typeface="Georgia"/>
               </a:rPr>
-              <a:t>Wer steht im Konflikt?</a:t>
+              <a:t>Fünf Fragen vor der Entscheidung</a:t>
             </a:r>
           </a:p>
         </p:txBody>
@@ -12256,7 +11875,7 @@
           <p:cNvPr id="3" name="">
             <a:extLst xmlns:a="http://schemas.openxmlformats.org/drawingml/2006/main">
               <a:ext uri="{FF2B5EF4-FFF2-40B4-BE49-F238E27FC236}">
-                <a16:creationId xmlns:a16="http://schemas.microsoft.com/office/drawing/2014/main" id="{D7A53E07-EE39-4847-BFD8-776524A2F101}"/>
+                <a16:creationId xmlns:a16="http://schemas.microsoft.com/office/drawing/2014/main" id="{A7405D9B-35B0-47E9-9930-2ED6D6664EB5}"/>
               </a:ext>
             </a:extLst>
           </p:cNvPr>
@@ -12287,7 +11906,7 @@
             <a:pPr>
               <a:defRPr sz="1800" b="1">
                 <a:solidFill>
-                  <a:srgbClr val="087F86"/>
+                  <a:srgbClr val="59D7D1"/>
                 </a:solidFill>
                 <a:latin typeface="Arial"/>
                 <a:ea typeface="Arial"/>
@@ -12297,13 +11916,13 @@
             <a:r>
               <a:rPr sz="1800" b="1">
                 <a:solidFill>
-                  <a:srgbClr val="087F86"/>
+                  <a:srgbClr val="59D7D1"/>
                 </a:solidFill>
                 <a:latin typeface="Arial"/>
                 <a:ea typeface="Arial"/>
                 <a:cs typeface="Arial"/>
               </a:rPr>
-              <a:t>Familie und Totenfürsorge</a:t>
+              <a:t>① Tod feststellen</a:t>
             </a:r>
           </a:p>
         </p:txBody>
@@ -12313,7 +11932,7 @@
           <p:cNvPr id="4" name="">
             <a:extLst xmlns:a="http://schemas.openxmlformats.org/drawingml/2006/main">
               <a:ext uri="{FF2B5EF4-FFF2-40B4-BE49-F238E27FC236}">
-                <a16:creationId xmlns:a16="http://schemas.microsoft.com/office/drawing/2014/main" id="{F65C8203-12B5-44DC-B7CF-F595470FF375}"/>
+                <a16:creationId xmlns:a16="http://schemas.microsoft.com/office/drawing/2014/main" id="{E77B1BC0-FF10-4494-B8B3-45A8CE1D18F5}"/>
               </a:ext>
             </a:extLst>
           </p:cNvPr>
@@ -12325,6 +11944,218 @@
         <p:spPr>
           <a:xfrm xmlns:a="http://schemas.openxmlformats.org/drawingml/2006/main">
             <a:off x="533400" y="1914525"/>
+            <a:ext cx="11125200" cy="914400"/>
+          </a:xfrm>
+          <a:prstGeom xmlns:a="http://schemas.openxmlformats.org/drawingml/2006/main" prst="rect">
+            <a:avLst/>
+          </a:prstGeom>
+          <a:noFill xmlns:a="http://schemas.openxmlformats.org/drawingml/2006/main"/>
+          <a:ln xmlns:a="http://schemas.openxmlformats.org/drawingml/2006/main" w="0">
+            <a:noFill/>
+          </a:ln>
+        </p:spPr>
+        <p:txBody>
+          <a:bodyPr xmlns:a="http://schemas.openxmlformats.org/drawingml/2006/main">
+            <a:noAutofit/>
+          </a:bodyPr>
+          <a:lstStyle xmlns:a="http://schemas.openxmlformats.org/drawingml/2006/main"/>
+          <a:p xmlns:a="http://schemas.openxmlformats.org/drawingml/2006/main">
+            <a:pPr>
+              <a:defRPr sz="1725" b="0">
+                <a:solidFill>
+                  <a:srgbClr val="FFFFFF"/>
+                </a:solidFill>
+                <a:latin typeface="Arial"/>
+                <a:ea typeface="Arial"/>
+                <a:cs typeface="Arial"/>
+              </a:defRPr>
+            </a:pPr>
+            <a:r>
+              <a:t>Ist der irreversible Hirnfunktionsausfall nach der einschlägigen Richtlinie der Bundesärztekammer sicher festgestellt? Die Diagnostik umfasst Voraussetzungen, klinische Ausfallsymptome und den Nachweis der Irreversibilität.</a:t>
+            </a:r>
+          </a:p>
+        </p:txBody>
+      </p:sp>
+      <p:sp>
+        <p:nvSpPr>
+          <p:cNvPr id="5" name="">
+            <a:extLst xmlns:a="http://schemas.openxmlformats.org/drawingml/2006/main">
+              <a:ext uri="{FF2B5EF4-FFF2-40B4-BE49-F238E27FC236}">
+                <a16:creationId xmlns:a16="http://schemas.microsoft.com/office/drawing/2014/main" id="{C207290B-0B55-41B4-9C62-8A19C1CE1986}"/>
+              </a:ext>
+            </a:extLst>
+          </p:cNvPr>
+          <p:cNvSpPr>
+            <a:spLocks xmlns:a="http://schemas.openxmlformats.org/drawingml/2006/main" noGrp="1"/>
+          </p:cNvSpPr>
+          <p:nvPr/>
+        </p:nvSpPr>
+        <p:spPr>
+          <a:xfrm xmlns:a="http://schemas.openxmlformats.org/drawingml/2006/main">
+            <a:off x="533400" y="2828925"/>
+            <a:ext cx="11125200" cy="457200"/>
+          </a:xfrm>
+          <a:prstGeom xmlns:a="http://schemas.openxmlformats.org/drawingml/2006/main" prst="rect">
+            <a:avLst/>
+          </a:prstGeom>
+          <a:noFill xmlns:a="http://schemas.openxmlformats.org/drawingml/2006/main"/>
+          <a:ln xmlns:a="http://schemas.openxmlformats.org/drawingml/2006/main" w="0">
+            <a:noFill/>
+          </a:ln>
+        </p:spPr>
+        <p:txBody>
+          <a:bodyPr xmlns:a="http://schemas.openxmlformats.org/drawingml/2006/main">
+            <a:noAutofit/>
+          </a:bodyPr>
+          <a:lstStyle xmlns:a="http://schemas.openxmlformats.org/drawingml/2006/main"/>
+          <a:p xmlns:a="http://schemas.openxmlformats.org/drawingml/2006/main">
+            <a:pPr>
+              <a:defRPr sz="1800" b="1">
+                <a:solidFill>
+                  <a:srgbClr val="59D7D1"/>
+                </a:solidFill>
+                <a:latin typeface="Arial"/>
+                <a:ea typeface="Arial"/>
+                <a:cs typeface="Arial"/>
+              </a:defRPr>
+            </a:pPr>
+            <a:r>
+              <a:rPr sz="1800" b="1">
+                <a:solidFill>
+                  <a:srgbClr val="59D7D1"/>
+                </a:solidFill>
+                <a:latin typeface="Arial"/>
+                <a:ea typeface="Arial"/>
+                <a:cs typeface="Arial"/>
+              </a:rPr>
+              <a:t>② Prognose klären</a:t>
+            </a:r>
+          </a:p>
+        </p:txBody>
+      </p:sp>
+      <p:sp>
+        <p:nvSpPr>
+          <p:cNvPr id="6" name="">
+            <a:extLst xmlns:a="http://schemas.openxmlformats.org/drawingml/2006/main">
+              <a:ext uri="{FF2B5EF4-FFF2-40B4-BE49-F238E27FC236}">
+                <a16:creationId xmlns:a16="http://schemas.microsoft.com/office/drawing/2014/main" id="{236013AE-698A-4F06-8419-FA8A9C9B731C}"/>
+              </a:ext>
+            </a:extLst>
+          </p:cNvPr>
+          <p:cNvSpPr>
+            <a:spLocks xmlns:a="http://schemas.openxmlformats.org/drawingml/2006/main" noGrp="1"/>
+          </p:cNvSpPr>
+          <p:nvPr/>
+        </p:nvSpPr>
+        <p:spPr>
+          <a:xfrm xmlns:a="http://schemas.openxmlformats.org/drawingml/2006/main">
+            <a:off x="533400" y="3286125"/>
+            <a:ext cx="11125200" cy="371475"/>
+          </a:xfrm>
+          <a:prstGeom xmlns:a="http://schemas.openxmlformats.org/drawingml/2006/main" prst="rect">
+            <a:avLst/>
+          </a:prstGeom>
+          <a:noFill xmlns:a="http://schemas.openxmlformats.org/drawingml/2006/main"/>
+          <a:ln xmlns:a="http://schemas.openxmlformats.org/drawingml/2006/main" w="0">
+            <a:noFill/>
+          </a:ln>
+        </p:spPr>
+        <p:txBody>
+          <a:bodyPr xmlns:a="http://schemas.openxmlformats.org/drawingml/2006/main">
+            <a:noAutofit/>
+          </a:bodyPr>
+          <a:lstStyle xmlns:a="http://schemas.openxmlformats.org/drawingml/2006/main"/>
+          <a:p xmlns:a="http://schemas.openxmlformats.org/drawingml/2006/main">
+            <a:pPr>
+              <a:defRPr sz="1725" b="0">
+                <a:solidFill>
+                  <a:srgbClr val="FFFFFF"/>
+                </a:solidFill>
+                <a:latin typeface="Arial"/>
+                <a:ea typeface="Arial"/>
+                <a:cs typeface="Arial"/>
+              </a:defRPr>
+            </a:pPr>
+            <a:r>
+              <a:t>Welche realistische Überlebenschance hat die Leibesfrucht, mit welcher Belastung und in welchem Zeitraum?</a:t>
+            </a:r>
+          </a:p>
+        </p:txBody>
+      </p:sp>
+      <p:sp>
+        <p:nvSpPr>
+          <p:cNvPr id="7" name="">
+            <a:extLst xmlns:a="http://schemas.openxmlformats.org/drawingml/2006/main">
+              <a:ext uri="{FF2B5EF4-FFF2-40B4-BE49-F238E27FC236}">
+                <a16:creationId xmlns:a16="http://schemas.microsoft.com/office/drawing/2014/main" id="{DA145B6F-D55B-472B-AB5B-47D029EC90F7}"/>
+              </a:ext>
+            </a:extLst>
+          </p:cNvPr>
+          <p:cNvSpPr>
+            <a:spLocks xmlns:a="http://schemas.openxmlformats.org/drawingml/2006/main" noGrp="1"/>
+          </p:cNvSpPr>
+          <p:nvPr/>
+        </p:nvSpPr>
+        <p:spPr>
+          <a:xfrm xmlns:a="http://schemas.openxmlformats.org/drawingml/2006/main">
+            <a:off x="533400" y="3657600"/>
+            <a:ext cx="11125200" cy="457200"/>
+          </a:xfrm>
+          <a:prstGeom xmlns:a="http://schemas.openxmlformats.org/drawingml/2006/main" prst="rect">
+            <a:avLst/>
+          </a:prstGeom>
+          <a:noFill xmlns:a="http://schemas.openxmlformats.org/drawingml/2006/main"/>
+          <a:ln xmlns:a="http://schemas.openxmlformats.org/drawingml/2006/main" w="0">
+            <a:noFill/>
+          </a:ln>
+        </p:spPr>
+        <p:txBody>
+          <a:bodyPr xmlns:a="http://schemas.openxmlformats.org/drawingml/2006/main">
+            <a:noAutofit/>
+          </a:bodyPr>
+          <a:lstStyle xmlns:a="http://schemas.openxmlformats.org/drawingml/2006/main"/>
+          <a:p xmlns:a="http://schemas.openxmlformats.org/drawingml/2006/main">
+            <a:pPr>
+              <a:defRPr sz="1800" b="1">
+                <a:solidFill>
+                  <a:srgbClr val="59D7D1"/>
+                </a:solidFill>
+                <a:latin typeface="Arial"/>
+                <a:ea typeface="Arial"/>
+                <a:cs typeface="Arial"/>
+              </a:defRPr>
+            </a:pPr>
+            <a:r>
+              <a:rPr sz="1800" b="1">
+                <a:solidFill>
+                  <a:srgbClr val="59D7D1"/>
+                </a:solidFill>
+                <a:latin typeface="Arial"/>
+                <a:ea typeface="Arial"/>
+                <a:cs typeface="Arial"/>
+              </a:rPr>
+              <a:t>③ Willen ermitteln</a:t>
+            </a:r>
+          </a:p>
+        </p:txBody>
+      </p:sp>
+      <p:sp>
+        <p:nvSpPr>
+          <p:cNvPr id="8" name="">
+            <a:extLst xmlns:a="http://schemas.openxmlformats.org/drawingml/2006/main">
+              <a:ext uri="{FF2B5EF4-FFF2-40B4-BE49-F238E27FC236}">
+                <a16:creationId xmlns:a16="http://schemas.microsoft.com/office/drawing/2014/main" id="{DCD687E5-03CC-4DB1-A492-C5CB199944F9}"/>
+              </a:ext>
+            </a:extLst>
+          </p:cNvPr>
+          <p:cNvSpPr>
+            <a:spLocks xmlns:a="http://schemas.openxmlformats.org/drawingml/2006/main" noGrp="1"/>
+          </p:cNvSpPr>
+          <p:nvPr/>
+        </p:nvSpPr>
+        <p:spPr>
+          <a:xfrm xmlns:a="http://schemas.openxmlformats.org/drawingml/2006/main">
+            <a:off x="533400" y="4114800"/>
             <a:ext cx="11125200" cy="647700"/>
           </a:xfrm>
           <a:prstGeom xmlns:a="http://schemas.openxmlformats.org/drawingml/2006/main" prst="rect">
@@ -12344,185 +12175,70 @@
             <a:pPr>
               <a:defRPr sz="1725" b="0">
                 <a:solidFill>
-                  <a:srgbClr val="071D33"/>
-                </a:solidFill>
-                <a:latin typeface="Arial"/>
-                <a:ea typeface="Arial"/>
-                <a:cs typeface="Arial"/>
-              </a:defRPr>
-            </a:pPr>
-            <a:r>
-              <a:t>wichtige Informationen und eigene Belastung; Angehörige entscheiden nicht automatisch über jede medizinische Maßnahme</a:t>
-            </a:r>
-          </a:p>
-        </p:txBody>
-      </p:sp>
-      <p:sp>
-        <p:nvSpPr>
-          <p:cNvPr id="5" name="">
-            <a:extLst xmlns:a="http://schemas.openxmlformats.org/drawingml/2006/main">
-              <a:ext uri="{FF2B5EF4-FFF2-40B4-BE49-F238E27FC236}">
-                <a16:creationId xmlns:a16="http://schemas.microsoft.com/office/drawing/2014/main" id="{024632BA-A2DE-4E6A-BC31-10713D8A20F3}"/>
-              </a:ext>
-            </a:extLst>
-          </p:cNvPr>
-          <p:cNvSpPr>
-            <a:spLocks xmlns:a="http://schemas.openxmlformats.org/drawingml/2006/main" noGrp="1"/>
-          </p:cNvSpPr>
-          <p:nvPr/>
-        </p:nvSpPr>
-        <p:spPr>
-          <a:xfrm xmlns:a="http://schemas.openxmlformats.org/drawingml/2006/main">
-            <a:off x="533400" y="2562225"/>
-            <a:ext cx="11125200" cy="457200"/>
-          </a:xfrm>
-          <a:prstGeom xmlns:a="http://schemas.openxmlformats.org/drawingml/2006/main" prst="rect">
-            <a:avLst/>
-          </a:prstGeom>
-          <a:noFill xmlns:a="http://schemas.openxmlformats.org/drawingml/2006/main"/>
-          <a:ln xmlns:a="http://schemas.openxmlformats.org/drawingml/2006/main" w="0">
-            <a:noFill/>
-          </a:ln>
-        </p:spPr>
-        <p:txBody>
-          <a:bodyPr xmlns:a="http://schemas.openxmlformats.org/drawingml/2006/main">
-            <a:noAutofit/>
-          </a:bodyPr>
-          <a:lstStyle xmlns:a="http://schemas.openxmlformats.org/drawingml/2006/main"/>
-          <a:p xmlns:a="http://schemas.openxmlformats.org/drawingml/2006/main">
-            <a:pPr>
-              <a:defRPr sz="1800" b="1">
-                <a:solidFill>
-                  <a:srgbClr val="087F86"/>
-                </a:solidFill>
-                <a:latin typeface="Arial"/>
-                <a:ea typeface="Arial"/>
-                <a:cs typeface="Arial"/>
-              </a:defRPr>
-            </a:pPr>
-            <a:r>
-              <a:rPr sz="1800" b="1">
-                <a:solidFill>
-                  <a:srgbClr val="087F86"/>
-                </a:solidFill>
-                <a:latin typeface="Arial"/>
-                <a:ea typeface="Arial"/>
-                <a:cs typeface="Arial"/>
+                  <a:srgbClr val="FFFFFF"/>
+                </a:solidFill>
+                <a:latin typeface="Arial"/>
+                <a:ea typeface="Arial"/>
+                <a:cs typeface="Arial"/>
+              </a:defRPr>
+            </a:pPr>
+            <a:r>
+              <a:t>Gibt es frühere Äußerungen der Frau zur Schwangerschaft, Intensivmedizin, Organspende oder zum Umgang mit ihrem Körper nach dem Tod?</a:t>
+            </a:r>
+          </a:p>
+        </p:txBody>
+      </p:sp>
+      <p:sp>
+        <p:nvSpPr>
+          <p:cNvPr id="9" name="">
+            <a:extLst xmlns:a="http://schemas.openxmlformats.org/drawingml/2006/main">
+              <a:ext uri="{FF2B5EF4-FFF2-40B4-BE49-F238E27FC236}">
+                <a16:creationId xmlns:a16="http://schemas.microsoft.com/office/drawing/2014/main" id="{478B3A2C-6A62-4481-8A2D-0F396AA0C0FD}"/>
+              </a:ext>
+            </a:extLst>
+          </p:cNvPr>
+          <p:cNvSpPr>
+            <a:spLocks xmlns:a="http://schemas.openxmlformats.org/drawingml/2006/main" noGrp="1"/>
+          </p:cNvSpPr>
+          <p:nvPr/>
+        </p:nvSpPr>
+        <p:spPr>
+          <a:xfrm xmlns:a="http://schemas.openxmlformats.org/drawingml/2006/main">
+            <a:off x="533400" y="5810250"/>
+            <a:ext cx="11125200" cy="381000"/>
+          </a:xfrm>
+          <a:prstGeom xmlns:a="http://schemas.openxmlformats.org/drawingml/2006/main" prst="rect">
+            <a:avLst/>
+          </a:prstGeom>
+          <a:noFill xmlns:a="http://schemas.openxmlformats.org/drawingml/2006/main"/>
+          <a:ln xmlns:a="http://schemas.openxmlformats.org/drawingml/2006/main" w="0">
+            <a:noFill/>
+          </a:ln>
+        </p:spPr>
+        <p:txBody>
+          <a:bodyPr xmlns:a="http://schemas.openxmlformats.org/drawingml/2006/main">
+            <a:noAutofit/>
+          </a:bodyPr>
+          <a:lstStyle xmlns:a="http://schemas.openxmlformats.org/drawingml/2006/main"/>
+          <a:p xmlns:a="http://schemas.openxmlformats.org/drawingml/2006/main">
+            <a:pPr>
+              <a:defRPr sz="900" b="0">
+                <a:solidFill>
+                  <a:srgbClr val="B7D8D5"/>
+                </a:solidFill>
+                <a:latin typeface="Arial"/>
+                <a:ea typeface="Arial"/>
+                <a:cs typeface="Arial"/>
+              </a:defRPr>
+            </a:pPr>
+            <a:r>
+              <a:t>Quelle: Recht Medizinisch · allgemeine Lernfassung. Zur Todesfeststellung: Bundesärztekammer, Richtlinie zum irreversiblen Hirnfunktionsausfall, Fünfte Fortschreibung (2022), geprüft 07.09.2026 · </a:t>
+            </a:r>
+            <a:r>
+              <a:rPr>
+                <a:hlinkClick xmlns:r="http://schemas.openxmlformats.org/officeDocument/2006/relationships" r:id="R9d3301e7589549ce"/>
               </a:rPr>
-              <a:t>Behandlungsteam</a:t>
-            </a:r>
-          </a:p>
-        </p:txBody>
-      </p:sp>
-      <p:sp>
-        <p:nvSpPr>
-          <p:cNvPr id="6" name="">
-            <a:extLst xmlns:a="http://schemas.openxmlformats.org/drawingml/2006/main">
-              <a:ext uri="{FF2B5EF4-FFF2-40B4-BE49-F238E27FC236}">
-                <a16:creationId xmlns:a16="http://schemas.microsoft.com/office/drawing/2014/main" id="{E57BA256-B00E-4B5D-AD15-E7059D1A8492}"/>
-              </a:ext>
-            </a:extLst>
-          </p:cNvPr>
-          <p:cNvSpPr>
-            <a:spLocks xmlns:a="http://schemas.openxmlformats.org/drawingml/2006/main" noGrp="1"/>
-          </p:cNvSpPr>
-          <p:nvPr/>
-        </p:nvSpPr>
-        <p:spPr>
-          <a:xfrm xmlns:a="http://schemas.openxmlformats.org/drawingml/2006/main">
-            <a:off x="533400" y="3019425"/>
-            <a:ext cx="11125200" cy="647700"/>
-          </a:xfrm>
-          <a:prstGeom xmlns:a="http://schemas.openxmlformats.org/drawingml/2006/main" prst="rect">
-            <a:avLst/>
-          </a:prstGeom>
-          <a:noFill xmlns:a="http://schemas.openxmlformats.org/drawingml/2006/main"/>
-          <a:ln xmlns:a="http://schemas.openxmlformats.org/drawingml/2006/main" w="0">
-            <a:noFill/>
-          </a:ln>
-        </p:spPr>
-        <p:txBody>
-          <a:bodyPr xmlns:a="http://schemas.openxmlformats.org/drawingml/2006/main">
-            <a:noAutofit/>
-          </a:bodyPr>
-          <a:lstStyle xmlns:a="http://schemas.openxmlformats.org/drawingml/2006/main"/>
-          <a:p xmlns:a="http://schemas.openxmlformats.org/drawingml/2006/main">
-            <a:pPr>
-              <a:defRPr sz="1725" b="0">
-                <a:solidFill>
-                  <a:srgbClr val="071D33"/>
-                </a:solidFill>
-                <a:latin typeface="Arial"/>
-                <a:ea typeface="Arial"/>
-                <a:cs typeface="Arial"/>
-              </a:defRPr>
-            </a:pPr>
-            <a:r>
-              <a:t>Todesfeststellung, medizinische Indikation, Prognose, Ressourcen, interprofessionelle Beratung und Dokumentation</a:t>
-            </a:r>
-          </a:p>
-        </p:txBody>
-      </p:sp>
-      <p:sp>
-        <p:nvSpPr>
-          <p:cNvPr id="7" name="">
-            <a:extLst xmlns:a="http://schemas.openxmlformats.org/drawingml/2006/main">
-              <a:ext uri="{FF2B5EF4-FFF2-40B4-BE49-F238E27FC236}">
-                <a16:creationId xmlns:a16="http://schemas.microsoft.com/office/drawing/2014/main" id="{C81013BD-8533-4383-8DE3-80E8F3C22BAB}"/>
-              </a:ext>
-            </a:extLst>
-          </p:cNvPr>
-          <p:cNvSpPr>
-            <a:spLocks xmlns:a="http://schemas.openxmlformats.org/drawingml/2006/main" noGrp="1"/>
-          </p:cNvSpPr>
-          <p:nvPr/>
-        </p:nvSpPr>
-        <p:spPr>
-          <a:xfrm xmlns:a="http://schemas.openxmlformats.org/drawingml/2006/main">
-            <a:off x="533400" y="5953125"/>
-            <a:ext cx="11125200" cy="238125"/>
-          </a:xfrm>
-          <a:prstGeom xmlns:a="http://schemas.openxmlformats.org/drawingml/2006/main" prst="rect">
-            <a:avLst/>
-          </a:prstGeom>
-          <a:noFill xmlns:a="http://schemas.openxmlformats.org/drawingml/2006/main"/>
-          <a:ln xmlns:a="http://schemas.openxmlformats.org/drawingml/2006/main" w="0">
-            <a:noFill/>
-          </a:ln>
-        </p:spPr>
-        <p:txBody>
-          <a:bodyPr xmlns:a="http://schemas.openxmlformats.org/drawingml/2006/main">
-            <a:noAutofit/>
-          </a:bodyPr>
-          <a:lstStyle xmlns:a="http://schemas.openxmlformats.org/drawingml/2006/main"/>
-          <a:p xmlns:a="http://schemas.openxmlformats.org/drawingml/2006/main">
-            <a:pPr>
-              <a:defRPr sz="900" b="0">
-                <a:solidFill>
-                  <a:srgbClr val="526D75"/>
-                </a:solidFill>
-                <a:latin typeface="Arial"/>
-                <a:ea typeface="Arial"/>
-                <a:cs typeface="Arial"/>
-              </a:defRPr>
-            </a:pPr>
-            <a:r>
-              <a:t>Quelle: AG Hersbruck, Beschl. v. 16.10.1992 – XVII 1556/92, NJW 1992, 3245 · BVerfG, Urt. v. 28.05.1993 – 2 BvF 2/90 · </a:t>
-            </a:r>
-            <a:r>
-              <a:rPr>
-                <a:hlinkClick xmlns:r="http://schemas.openxmlformats.org/officeDocument/2006/relationships" r:id="Rdd11ce322e3145f8"/>
-              </a:rPr>
-              <a:t>Quelle öffnen (beck-online.beck.de)</a:t>
-            </a:r>
-            <a:r>
-              <a:t> · </a:t>
-            </a:r>
-            <a:r>
-              <a:rPr>
-                <a:hlinkClick xmlns:r="http://schemas.openxmlformats.org/officeDocument/2006/relationships" r:id="R06d1797d8a784749"/>
-              </a:rPr>
-              <a:t>Quelle öffnen (bundesverfassungsgericht.de)</a:t>
+              <a:t>Quelle öffnen (wbbaek.de)</a:t>
             </a:r>
             <a:r>
               <a:t/>
@@ -12532,10 +12248,10 @@
       </p:sp>
       <p:sp>
         <p:nvSpPr>
-          <p:cNvPr id="8" name="">
-            <a:extLst xmlns:a="http://schemas.openxmlformats.org/drawingml/2006/main">
-              <a:ext uri="{FF2B5EF4-FFF2-40B4-BE49-F238E27FC236}">
-                <a16:creationId xmlns:a16="http://schemas.microsoft.com/office/drawing/2014/main" id="{B3D2A617-7D99-465A-BAAD-8ACC044D7D24}"/>
+          <p:cNvPr id="10" name="">
+            <a:extLst xmlns:a="http://schemas.openxmlformats.org/drawingml/2006/main">
+              <a:ext uri="{FF2B5EF4-FFF2-40B4-BE49-F238E27FC236}">
+                <a16:creationId xmlns:a16="http://schemas.microsoft.com/office/drawing/2014/main" id="{9FA7253B-29BD-4C83-A509-F3A452FBF4FA}"/>
               </a:ext>
             </a:extLst>
           </p:cNvPr>
@@ -12566,7 +12282,7 @@
             <a:pPr>
               <a:defRPr sz="1050" b="0">
                 <a:solidFill>
-                  <a:srgbClr val="526D75"/>
+                  <a:srgbClr val="B7D8D5"/>
                 </a:solidFill>
                 <a:latin typeface="Arial"/>
                 <a:ea typeface="Arial"/>
@@ -12576,13 +12292,13 @@
             <a:r>
               <a:rPr sz="1050" b="0">
                 <a:solidFill>
-                  <a:srgbClr val="526D75"/>
+                  <a:srgbClr val="B7D8D5"/>
                 </a:solidFill>
                 <a:latin typeface="Arial"/>
                 <a:ea typeface="Arial"/>
                 <a:cs typeface="Arial"/>
               </a:rPr>
-              <a:t>Recht Medizinisch · Folie 6 · Seite 2/2</a:t>
+              <a:t>Recht Medizinisch · Folie 7 · Seite 1/2</a:t>
             </a:r>
           </a:p>
         </p:txBody>
@@ -12590,7 +12306,7 @@
     </p:spTree>
     <p:extLst>
       <p:ext uri="{BB962C8B-B14F-4D97-AF65-F5344CB8AC3E}">
-        <p14:creationId xmlns:p14="http://schemas.microsoft.com/office/powerpoint/2010/main" val="1180454501"/>
+        <p14:creationId xmlns:p14="http://schemas.microsoft.com/office/powerpoint/2010/main" val="445126839"/>
       </p:ext>
     </p:extLst>
   </p:cSld>
@@ -12621,7 +12337,7 @@
           <p:cNvPr id="11" name="">
             <a:extLst xmlns:a="http://schemas.openxmlformats.org/drawingml/2006/main">
               <a:ext uri="{FF2B5EF4-FFF2-40B4-BE49-F238E27FC236}">
-                <a16:creationId xmlns:a16="http://schemas.microsoft.com/office/drawing/2014/main" id="{0722786E-F8BD-4BFC-B6DB-98343767E419}"/>
+                <a16:creationId xmlns:a16="http://schemas.microsoft.com/office/drawing/2014/main" id="{1D266763-7BC8-4CB6-8281-3BFD796305CF}"/>
               </a:ext>
             </a:extLst>
           </p:cNvPr>
@@ -12678,7 +12394,7 @@
           <p:cNvPr id="2" name="">
             <a:extLst xmlns:a="http://schemas.openxmlformats.org/drawingml/2006/main">
               <a:ext uri="{FF2B5EF4-FFF2-40B4-BE49-F238E27FC236}">
-                <a16:creationId xmlns:a16="http://schemas.microsoft.com/office/drawing/2014/main" id="{D37C1CA2-CEF7-4C70-9BCA-7A3743EF66C4}"/>
+                <a16:creationId xmlns:a16="http://schemas.microsoft.com/office/drawing/2014/main" id="{163E6503-54B3-4D50-9AF3-216190635E25}"/>
               </a:ext>
             </a:extLst>
           </p:cNvPr>
@@ -12735,7 +12451,7 @@
           <p:cNvPr id="3" name="">
             <a:extLst xmlns:a="http://schemas.openxmlformats.org/drawingml/2006/main">
               <a:ext uri="{FF2B5EF4-FFF2-40B4-BE49-F238E27FC236}">
-                <a16:creationId xmlns:a16="http://schemas.microsoft.com/office/drawing/2014/main" id="{4C2CE3E7-F5B1-4D9D-A70B-C16B6E078E61}"/>
+                <a16:creationId xmlns:a16="http://schemas.microsoft.com/office/drawing/2014/main" id="{44172321-AA5F-4F8B-8DD4-A360687EAF03}"/>
               </a:ext>
             </a:extLst>
           </p:cNvPr>
@@ -12782,7 +12498,7 @@
                 <a:ea typeface="Arial"/>
                 <a:cs typeface="Arial"/>
               </a:rPr>
-              <a:t>1 Tod feststellen</a:t>
+              <a:t>④ Rollen trennen</a:t>
             </a:r>
           </a:p>
         </p:txBody>
@@ -12792,7 +12508,7 @@
           <p:cNvPr id="4" name="">
             <a:extLst xmlns:a="http://schemas.openxmlformats.org/drawingml/2006/main">
               <a:ext uri="{FF2B5EF4-FFF2-40B4-BE49-F238E27FC236}">
-                <a16:creationId xmlns:a16="http://schemas.microsoft.com/office/drawing/2014/main" id="{E6C0F666-9951-4E70-95BB-23C06A636F01}"/>
+                <a16:creationId xmlns:a16="http://schemas.microsoft.com/office/drawing/2014/main" id="{A2152A23-6879-42AE-83EC-FC913C1F14BB}"/>
               </a:ext>
             </a:extLst>
           </p:cNvPr>
@@ -12804,7 +12520,7 @@
         <p:spPr>
           <a:xfrm xmlns:a="http://schemas.openxmlformats.org/drawingml/2006/main">
             <a:off x="533400" y="1914525"/>
-            <a:ext cx="11125200" cy="914400"/>
+            <a:ext cx="11125200" cy="647700"/>
           </a:xfrm>
           <a:prstGeom xmlns:a="http://schemas.openxmlformats.org/drawingml/2006/main" prst="rect">
             <a:avLst/>
@@ -12831,7 +12547,7 @@
               </a:defRPr>
             </a:pPr>
             <a:r>
-              <a:t>Ist der irreversible Hirnfunktionsausfall nach der einschlägigen Richtlinie der Bundesärztekammer sicher festgestellt? Die Diagnostik umfasst Voraussetzungen, klinische Ausfallsymptome und den Nachweis der Irreversibilität.</a:t>
+              <a:t>Wer liefert Tatsachen, wer vertritt wessen Interessen, wer prüft die medizinische Indikation und wer entscheidet rechtlich?</a:t>
             </a:r>
           </a:p>
         </p:txBody>
@@ -12841,18 +12557,18 @@
           <p:cNvPr id="5" name="">
             <a:extLst xmlns:a="http://schemas.openxmlformats.org/drawingml/2006/main">
               <a:ext uri="{FF2B5EF4-FFF2-40B4-BE49-F238E27FC236}">
-                <a16:creationId xmlns:a16="http://schemas.microsoft.com/office/drawing/2014/main" id="{E80A8A3E-7601-4F04-96A5-4DE0C1038419}"/>
-              </a:ext>
-            </a:extLst>
-          </p:cNvPr>
-          <p:cNvSpPr>
-            <a:spLocks xmlns:a="http://schemas.openxmlformats.org/drawingml/2006/main" noGrp="1"/>
-          </p:cNvSpPr>
-          <p:nvPr/>
-        </p:nvSpPr>
-        <p:spPr>
-          <a:xfrm xmlns:a="http://schemas.openxmlformats.org/drawingml/2006/main">
-            <a:off x="533400" y="2828925"/>
+                <a16:creationId xmlns:a16="http://schemas.microsoft.com/office/drawing/2014/main" id="{8D1E2B89-40C9-4B23-AB15-122429167D85}"/>
+              </a:ext>
+            </a:extLst>
+          </p:cNvPr>
+          <p:cNvSpPr>
+            <a:spLocks xmlns:a="http://schemas.openxmlformats.org/drawingml/2006/main" noGrp="1"/>
+          </p:cNvSpPr>
+          <p:nvPr/>
+        </p:nvSpPr>
+        <p:spPr>
+          <a:xfrm xmlns:a="http://schemas.openxmlformats.org/drawingml/2006/main">
+            <a:off x="533400" y="2562225"/>
             <a:ext cx="11125200" cy="457200"/>
           </a:xfrm>
           <a:prstGeom xmlns:a="http://schemas.openxmlformats.org/drawingml/2006/main" prst="rect">
@@ -12888,7 +12604,7 @@
                 <a:ea typeface="Arial"/>
                 <a:cs typeface="Arial"/>
               </a:rPr>
-              <a:t>2 Prognose klären</a:t>
+              <a:t>⑤ Prozess sichern</a:t>
             </a:r>
           </a:p>
         </p:txBody>
@@ -12898,19 +12614,19 @@
           <p:cNvPr id="6" name="">
             <a:extLst xmlns:a="http://schemas.openxmlformats.org/drawingml/2006/main">
               <a:ext uri="{FF2B5EF4-FFF2-40B4-BE49-F238E27FC236}">
-                <a16:creationId xmlns:a16="http://schemas.microsoft.com/office/drawing/2014/main" id="{DB659ED1-A405-4B03-8A64-528BBD2DC045}"/>
-              </a:ext>
-            </a:extLst>
-          </p:cNvPr>
-          <p:cNvSpPr>
-            <a:spLocks xmlns:a="http://schemas.openxmlformats.org/drawingml/2006/main" noGrp="1"/>
-          </p:cNvSpPr>
-          <p:nvPr/>
-        </p:nvSpPr>
-        <p:spPr>
-          <a:xfrm xmlns:a="http://schemas.openxmlformats.org/drawingml/2006/main">
-            <a:off x="533400" y="3286125"/>
-            <a:ext cx="11125200" cy="371475"/>
+                <a16:creationId xmlns:a16="http://schemas.microsoft.com/office/drawing/2014/main" id="{F0BC9DD8-31EE-4FC3-887E-9FD32D946A51}"/>
+              </a:ext>
+            </a:extLst>
+          </p:cNvPr>
+          <p:cNvSpPr>
+            <a:spLocks xmlns:a="http://schemas.openxmlformats.org/drawingml/2006/main" noGrp="1"/>
+          </p:cNvSpPr>
+          <p:nvPr/>
+        </p:nvSpPr>
+        <p:spPr>
+          <a:xfrm xmlns:a="http://schemas.openxmlformats.org/drawingml/2006/main">
+            <a:off x="533400" y="3019425"/>
+            <a:ext cx="11125200" cy="647700"/>
           </a:xfrm>
           <a:prstGeom xmlns:a="http://schemas.openxmlformats.org/drawingml/2006/main" prst="rect">
             <a:avLst/>
@@ -12937,7 +12653,7 @@
               </a:defRPr>
             </a:pPr>
             <a:r>
-              <a:t>Welche realistische Überlebenschance hat die Leibesfrucht, mit welcher Belastung und in welchem Zeitraum?</a:t>
+              <a:t>Zeitfenster, Dissens, Ethikberatung, gerichtliche Kontaktaufnahme und Gründe der Zwischenentscheidung dokumentieren.</a:t>
             </a:r>
           </a:p>
         </p:txBody>
@@ -12947,18 +12663,18 @@
           <p:cNvPr id="7" name="">
             <a:extLst xmlns:a="http://schemas.openxmlformats.org/drawingml/2006/main">
               <a:ext uri="{FF2B5EF4-FFF2-40B4-BE49-F238E27FC236}">
-                <a16:creationId xmlns:a16="http://schemas.microsoft.com/office/drawing/2014/main" id="{F0313DA1-E35F-4A18-8287-CFE632EBDF29}"/>
-              </a:ext>
-            </a:extLst>
-          </p:cNvPr>
-          <p:cNvSpPr>
-            <a:spLocks xmlns:a="http://schemas.openxmlformats.org/drawingml/2006/main" noGrp="1"/>
-          </p:cNvSpPr>
-          <p:nvPr/>
-        </p:nvSpPr>
-        <p:spPr>
-          <a:xfrm xmlns:a="http://schemas.openxmlformats.org/drawingml/2006/main">
-            <a:off x="533400" y="3657600"/>
+                <a16:creationId xmlns:a16="http://schemas.microsoft.com/office/drawing/2014/main" id="{4B3B60CB-DAC7-4370-B12C-C88277C4092A}"/>
+              </a:ext>
+            </a:extLst>
+          </p:cNvPr>
+          <p:cNvSpPr>
+            <a:spLocks xmlns:a="http://schemas.openxmlformats.org/drawingml/2006/main" noGrp="1"/>
+          </p:cNvSpPr>
+          <p:nvPr/>
+        </p:nvSpPr>
+        <p:spPr>
+          <a:xfrm xmlns:a="http://schemas.openxmlformats.org/drawingml/2006/main">
+            <a:off x="533400" y="3667125"/>
             <a:ext cx="11125200" cy="457200"/>
           </a:xfrm>
           <a:prstGeom xmlns:a="http://schemas.openxmlformats.org/drawingml/2006/main" prst="rect">
@@ -12994,7 +12710,7 @@
                 <a:ea typeface="Arial"/>
                 <a:cs typeface="Arial"/>
               </a:rPr>
-              <a:t>3 Willen ermitteln</a:t>
+              <a:t>💡 Praxis-Merksatz</a:t>
             </a:r>
           </a:p>
         </p:txBody>
@@ -13004,18 +12720,18 @@
           <p:cNvPr id="8" name="">
             <a:extLst xmlns:a="http://schemas.openxmlformats.org/drawingml/2006/main">
               <a:ext uri="{FF2B5EF4-FFF2-40B4-BE49-F238E27FC236}">
-                <a16:creationId xmlns:a16="http://schemas.microsoft.com/office/drawing/2014/main" id="{F0A2B81A-0A5D-4B28-84E8-24C84C526964}"/>
-              </a:ext>
-            </a:extLst>
-          </p:cNvPr>
-          <p:cNvSpPr>
-            <a:spLocks xmlns:a="http://schemas.openxmlformats.org/drawingml/2006/main" noGrp="1"/>
-          </p:cNvSpPr>
-          <p:nvPr/>
-        </p:nvSpPr>
-        <p:spPr>
-          <a:xfrm xmlns:a="http://schemas.openxmlformats.org/drawingml/2006/main">
-            <a:off x="533400" y="4114800"/>
+                <a16:creationId xmlns:a16="http://schemas.microsoft.com/office/drawing/2014/main" id="{354757E7-F1A0-4F97-8E37-96CC56336A70}"/>
+              </a:ext>
+            </a:extLst>
+          </p:cNvPr>
+          <p:cNvSpPr>
+            <a:spLocks xmlns:a="http://schemas.openxmlformats.org/drawingml/2006/main" noGrp="1"/>
+          </p:cNvSpPr>
+          <p:nvPr/>
+        </p:nvSpPr>
+        <p:spPr>
+          <a:xfrm xmlns:a="http://schemas.openxmlformats.org/drawingml/2006/main">
+            <a:off x="533400" y="4124325"/>
             <a:ext cx="11125200" cy="647700"/>
           </a:xfrm>
           <a:prstGeom xmlns:a="http://schemas.openxmlformats.org/drawingml/2006/main" prst="rect">
@@ -13043,7 +12759,7 @@
               </a:defRPr>
             </a:pPr>
             <a:r>
-              <a:t>Gibt es frühere Äußerungen der Frau zur Schwangerschaft, Intensivmedizin, Organspende oder zum Umgang mit ihrem Körper nach dem Tod?</a:t>
+              <a:t>In Grenzfällen ist ein transparentes, überprüfbares Verfahren oft rechtlich wichtiger als eine scheinbar schnelle Gewissheit.</a:t>
             </a:r>
           </a:p>
         </p:txBody>
@@ -13053,7 +12769,7 @@
           <p:cNvPr id="9" name="">
             <a:extLst xmlns:a="http://schemas.openxmlformats.org/drawingml/2006/main">
               <a:ext uri="{FF2B5EF4-FFF2-40B4-BE49-F238E27FC236}">
-                <a16:creationId xmlns:a16="http://schemas.microsoft.com/office/drawing/2014/main" id="{18D110F5-BB28-4745-8A69-3ED15228AB3D}"/>
+                <a16:creationId xmlns:a16="http://schemas.microsoft.com/office/drawing/2014/main" id="{755E0067-4175-44E3-A0B0-3B5A03641E19}"/>
               </a:ext>
             </a:extLst>
           </p:cNvPr>
@@ -13096,7 +12812,7 @@
             </a:r>
             <a:r>
               <a:rPr>
-                <a:hlinkClick xmlns:r="http://schemas.openxmlformats.org/officeDocument/2006/relationships" r:id="R84e4d52aa1b449a7"/>
+                <a:hlinkClick xmlns:r="http://schemas.openxmlformats.org/officeDocument/2006/relationships" r:id="Ra2b40cdbf9fd4ea0"/>
               </a:rPr>
               <a:t>Quelle öffnen (wbbaek.de)</a:t>
             </a:r>
@@ -13111,7 +12827,7 @@
           <p:cNvPr id="10" name="">
             <a:extLst xmlns:a="http://schemas.openxmlformats.org/drawingml/2006/main">
               <a:ext uri="{FF2B5EF4-FFF2-40B4-BE49-F238E27FC236}">
-                <a16:creationId xmlns:a16="http://schemas.microsoft.com/office/drawing/2014/main" id="{2C1E609E-F3C6-44EB-BB16-4AC894859FA9}"/>
+                <a16:creationId xmlns:a16="http://schemas.microsoft.com/office/drawing/2014/main" id="{7779AFEE-2406-4F0E-9C2D-22C67964B6DA}"/>
               </a:ext>
             </a:extLst>
           </p:cNvPr>
@@ -13158,7 +12874,7 @@
                 <a:ea typeface="Arial"/>
                 <a:cs typeface="Arial"/>
               </a:rPr>
-              <a:t>Recht Medizinisch · Folie 7 · Seite 1/2</a:t>
+              <a:t>Recht Medizinisch · Folie 7 · Seite 2/2</a:t>
             </a:r>
           </a:p>
         </p:txBody>
@@ -13166,7 +12882,7 @@
     </p:spTree>
     <p:extLst>
       <p:ext uri="{BB962C8B-B14F-4D97-AF65-F5344CB8AC3E}">
-        <p14:creationId xmlns:p14="http://schemas.microsoft.com/office/powerpoint/2010/main" val="1846240078"/>
+        <p14:creationId xmlns:p14="http://schemas.microsoft.com/office/powerpoint/2010/main" val="1148430653"/>
       </p:ext>
     </p:extLst>
   </p:cSld>
@@ -13179,7 +12895,7 @@
     <p:bg>
       <p:bgPr>
         <a:solidFill xmlns:a="http://schemas.openxmlformats.org/drawingml/2006/main">
-          <a:srgbClr val="071D33"/>
+          <a:srgbClr val="DFF1EB"/>
         </a:solidFill>
       </p:bgPr>
     </p:bg>
@@ -13194,10 +12910,10 @@
       </p:grpSpPr>
       <p:sp>
         <p:nvSpPr>
-          <p:cNvPr id="11" name="">
-            <a:extLst xmlns:a="http://schemas.openxmlformats.org/drawingml/2006/main">
-              <a:ext uri="{FF2B5EF4-FFF2-40B4-BE49-F238E27FC236}">
-                <a16:creationId xmlns:a16="http://schemas.microsoft.com/office/drawing/2014/main" id="{B6EC1747-26EA-4E13-80D7-C49CA0BFC495}"/>
+          <p:cNvPr id="13" name="">
+            <a:extLst xmlns:a="http://schemas.openxmlformats.org/drawingml/2006/main">
+              <a:ext uri="{FF2B5EF4-FFF2-40B4-BE49-F238E27FC236}">
+                <a16:creationId xmlns:a16="http://schemas.microsoft.com/office/drawing/2014/main" id="{2B034DDA-4D46-4085-B8DE-3B418A645AA1}"/>
               </a:ext>
             </a:extLst>
           </p:cNvPr>
@@ -13228,7 +12944,7 @@
             <a:pPr>
               <a:defRPr sz="1125" b="1">
                 <a:solidFill>
-                  <a:srgbClr val="59D7D1"/>
+                  <a:srgbClr val="087F86"/>
                 </a:solidFill>
                 <a:latin typeface="Arial"/>
                 <a:ea typeface="Arial"/>
@@ -13238,13 +12954,13 @@
             <a:r>
               <a:rPr sz="1125" b="1">
                 <a:solidFill>
-                  <a:srgbClr val="59D7D1"/>
+                  <a:srgbClr val="087F86"/>
                 </a:solidFill>
                 <a:latin typeface="Arial"/>
                 <a:ea typeface="Arial"/>
                 <a:cs typeface="Arial"/>
               </a:rPr>
-              <a:t>ERST TATSACHEN, DANN RECHT</a:t>
+              <a:t>AG HERSBRUCK · BESCHLUSS 1992</a:t>
             </a:r>
           </a:p>
         </p:txBody>
@@ -13254,7 +12970,7 @@
           <p:cNvPr id="2" name="">
             <a:extLst xmlns:a="http://schemas.openxmlformats.org/drawingml/2006/main">
               <a:ext uri="{FF2B5EF4-FFF2-40B4-BE49-F238E27FC236}">
-                <a16:creationId xmlns:a16="http://schemas.microsoft.com/office/drawing/2014/main" id="{E4556A7A-0B40-4FC7-A413-D43A4ADE6FD3}"/>
+                <a16:creationId xmlns:a16="http://schemas.microsoft.com/office/drawing/2014/main" id="{6753B3F9-4194-403B-9352-539B2F0E3AE5}"/>
               </a:ext>
             </a:extLst>
           </p:cNvPr>
@@ -13285,7 +13001,7 @@
             <a:pPr>
               <a:defRPr sz="2850" b="1">
                 <a:solidFill>
-                  <a:srgbClr val="FFFFFF"/>
+                  <a:srgbClr val="071D33"/>
                 </a:solidFill>
                 <a:latin typeface="Georgia"/>
                 <a:ea typeface="Georgia"/>
@@ -13295,13 +13011,13 @@
             <a:r>
               <a:rPr sz="2850" b="1">
                 <a:solidFill>
-                  <a:srgbClr val="FFFFFF"/>
+                  <a:srgbClr val="071D33"/>
                 </a:solidFill>
                 <a:latin typeface="Georgia"/>
                 <a:ea typeface="Georgia"/>
                 <a:cs typeface="Georgia"/>
               </a:rPr>
-              <a:t>Fünf Fragen vor der Entscheidung</a:t>
+              <a:t>Eine umstrittene Zwischenlösung</a:t>
             </a:r>
           </a:p>
         </p:txBody>
@@ -13311,7 +13027,7 @@
           <p:cNvPr id="3" name="">
             <a:extLst xmlns:a="http://schemas.openxmlformats.org/drawingml/2006/main">
               <a:ext uri="{FF2B5EF4-FFF2-40B4-BE49-F238E27FC236}">
-                <a16:creationId xmlns:a16="http://schemas.microsoft.com/office/drawing/2014/main" id="{E1EE16AB-50F0-4F05-8253-EDF5E52F74AC}"/>
+                <a16:creationId xmlns:a16="http://schemas.microsoft.com/office/drawing/2014/main" id="{6DE483F2-9FBF-419E-9404-7B829A50FD10}"/>
               </a:ext>
             </a:extLst>
           </p:cNvPr>
@@ -13342,7 +13058,7 @@
             <a:pPr>
               <a:defRPr sz="1800" b="1">
                 <a:solidFill>
-                  <a:srgbClr val="59D7D1"/>
+                  <a:srgbClr val="087F86"/>
                 </a:solidFill>
                 <a:latin typeface="Arial"/>
                 <a:ea typeface="Arial"/>
@@ -13352,13 +13068,13 @@
             <a:r>
               <a:rPr sz="1800" b="1">
                 <a:solidFill>
-                  <a:srgbClr val="59D7D1"/>
+                  <a:srgbClr val="087F86"/>
                 </a:solidFill>
                 <a:latin typeface="Arial"/>
                 <a:ea typeface="Arial"/>
                 <a:cs typeface="Arial"/>
               </a:rPr>
-              <a:t>4 Rollen trennen</a:t>
+              <a:t>⚖ Entscheidung</a:t>
             </a:r>
           </a:p>
         </p:txBody>
@@ -13368,7 +13084,7 @@
           <p:cNvPr id="4" name="">
             <a:extLst xmlns:a="http://schemas.openxmlformats.org/drawingml/2006/main">
               <a:ext uri="{FF2B5EF4-FFF2-40B4-BE49-F238E27FC236}">
-                <a16:creationId xmlns:a16="http://schemas.microsoft.com/office/drawing/2014/main" id="{7ABA79A0-F9CE-4478-A558-CA25620CE427}"/>
+                <a16:creationId xmlns:a16="http://schemas.microsoft.com/office/drawing/2014/main" id="{2586D090-376B-4AEF-8A42-262A52D62C80}"/>
               </a:ext>
             </a:extLst>
           </p:cNvPr>
@@ -13380,6 +13096,218 @@
         <p:spPr>
           <a:xfrm xmlns:a="http://schemas.openxmlformats.org/drawingml/2006/main">
             <a:off x="533400" y="1914525"/>
+            <a:ext cx="11125200" cy="371475"/>
+          </a:xfrm>
+          <a:prstGeom xmlns:a="http://schemas.openxmlformats.org/drawingml/2006/main" prst="rect">
+            <a:avLst/>
+          </a:prstGeom>
+          <a:noFill xmlns:a="http://schemas.openxmlformats.org/drawingml/2006/main"/>
+          <a:ln xmlns:a="http://schemas.openxmlformats.org/drawingml/2006/main" w="0">
+            <a:noFill/>
+          </a:ln>
+        </p:spPr>
+        <p:txBody>
+          <a:bodyPr xmlns:a="http://schemas.openxmlformats.org/drawingml/2006/main">
+            <a:noAutofit/>
+          </a:bodyPr>
+          <a:lstStyle xmlns:a="http://schemas.openxmlformats.org/drawingml/2006/main"/>
+          <a:p xmlns:a="http://schemas.openxmlformats.org/drawingml/2006/main">
+            <a:pPr>
+              <a:defRPr sz="1725" b="0">
+                <a:solidFill>
+                  <a:srgbClr val="071D33"/>
+                </a:solidFill>
+                <a:latin typeface="Arial"/>
+                <a:ea typeface="Arial"/>
+                <a:cs typeface="Arial"/>
+              </a:defRPr>
+            </a:pPr>
+            <a:r>
+              <a:t>AG Hersbruck · 16.10.1992 · XVII 1556/92 · damals als nicht rechtskräftig veröffentlicht</a:t>
+            </a:r>
+          </a:p>
+        </p:txBody>
+      </p:sp>
+      <p:sp>
+        <p:nvSpPr>
+          <p:cNvPr id="5" name="">
+            <a:extLst xmlns:a="http://schemas.openxmlformats.org/drawingml/2006/main">
+              <a:ext uri="{FF2B5EF4-FFF2-40B4-BE49-F238E27FC236}">
+                <a16:creationId xmlns:a16="http://schemas.microsoft.com/office/drawing/2014/main" id="{58073C13-AB96-463F-A969-C45225223F92}"/>
+              </a:ext>
+            </a:extLst>
+          </p:cNvPr>
+          <p:cNvSpPr>
+            <a:spLocks xmlns:a="http://schemas.openxmlformats.org/drawingml/2006/main" noGrp="1"/>
+          </p:cNvSpPr>
+          <p:nvPr/>
+        </p:nvSpPr>
+        <p:spPr>
+          <a:xfrm xmlns:a="http://schemas.openxmlformats.org/drawingml/2006/main">
+            <a:off x="533400" y="2286000"/>
+            <a:ext cx="11125200" cy="457200"/>
+          </a:xfrm>
+          <a:prstGeom xmlns:a="http://schemas.openxmlformats.org/drawingml/2006/main" prst="rect">
+            <a:avLst/>
+          </a:prstGeom>
+          <a:noFill xmlns:a="http://schemas.openxmlformats.org/drawingml/2006/main"/>
+          <a:ln xmlns:a="http://schemas.openxmlformats.org/drawingml/2006/main" w="0">
+            <a:noFill/>
+          </a:ln>
+        </p:spPr>
+        <p:txBody>
+          <a:bodyPr xmlns:a="http://schemas.openxmlformats.org/drawingml/2006/main">
+            <a:noAutofit/>
+          </a:bodyPr>
+          <a:lstStyle xmlns:a="http://schemas.openxmlformats.org/drawingml/2006/main"/>
+          <a:p xmlns:a="http://schemas.openxmlformats.org/drawingml/2006/main">
+            <a:pPr>
+              <a:defRPr sz="1800" b="1">
+                <a:solidFill>
+                  <a:srgbClr val="087F86"/>
+                </a:solidFill>
+                <a:latin typeface="Arial"/>
+                <a:ea typeface="Arial"/>
+                <a:cs typeface="Arial"/>
+              </a:defRPr>
+            </a:pPr>
+            <a:r>
+              <a:rPr sz="1800" b="1">
+                <a:solidFill>
+                  <a:srgbClr val="087F86"/>
+                </a:solidFill>
+                <a:latin typeface="Arial"/>
+                <a:ea typeface="Arial"/>
+                <a:cs typeface="Arial"/>
+              </a:rPr>
+              <a:t>📚 Fundstellen</a:t>
+            </a:r>
+          </a:p>
+        </p:txBody>
+      </p:sp>
+      <p:sp>
+        <p:nvSpPr>
+          <p:cNvPr id="6" name="">
+            <a:extLst xmlns:a="http://schemas.openxmlformats.org/drawingml/2006/main">
+              <a:ext uri="{FF2B5EF4-FFF2-40B4-BE49-F238E27FC236}">
+                <a16:creationId xmlns:a16="http://schemas.microsoft.com/office/drawing/2014/main" id="{8A33E581-2D3C-4073-AEE4-A12468839E70}"/>
+              </a:ext>
+            </a:extLst>
+          </p:cNvPr>
+          <p:cNvSpPr>
+            <a:spLocks xmlns:a="http://schemas.openxmlformats.org/drawingml/2006/main" noGrp="1"/>
+          </p:cNvSpPr>
+          <p:nvPr/>
+        </p:nvSpPr>
+        <p:spPr>
+          <a:xfrm xmlns:a="http://schemas.openxmlformats.org/drawingml/2006/main">
+            <a:off x="533400" y="2743200"/>
+            <a:ext cx="11125200" cy="371475"/>
+          </a:xfrm>
+          <a:prstGeom xmlns:a="http://schemas.openxmlformats.org/drawingml/2006/main" prst="rect">
+            <a:avLst/>
+          </a:prstGeom>
+          <a:noFill xmlns:a="http://schemas.openxmlformats.org/drawingml/2006/main"/>
+          <a:ln xmlns:a="http://schemas.openxmlformats.org/drawingml/2006/main" w="0">
+            <a:noFill/>
+          </a:ln>
+        </p:spPr>
+        <p:txBody>
+          <a:bodyPr xmlns:a="http://schemas.openxmlformats.org/drawingml/2006/main">
+            <a:noAutofit/>
+          </a:bodyPr>
+          <a:lstStyle xmlns:a="http://schemas.openxmlformats.org/drawingml/2006/main"/>
+          <a:p xmlns:a="http://schemas.openxmlformats.org/drawingml/2006/main">
+            <a:pPr>
+              <a:defRPr sz="1725" b="0">
+                <a:solidFill>
+                  <a:srgbClr val="071D33"/>
+                </a:solidFill>
+                <a:latin typeface="Arial"/>
+                <a:ea typeface="Arial"/>
+                <a:cs typeface="Arial"/>
+              </a:defRPr>
+            </a:pPr>
+            <a:r>
+              <a:t>NJW 1992, 3245 · FamRZ 1992, 1471</a:t>
+            </a:r>
+          </a:p>
+        </p:txBody>
+      </p:sp>
+      <p:sp>
+        <p:nvSpPr>
+          <p:cNvPr id="7" name="">
+            <a:extLst xmlns:a="http://schemas.openxmlformats.org/drawingml/2006/main">
+              <a:ext uri="{FF2B5EF4-FFF2-40B4-BE49-F238E27FC236}">
+                <a16:creationId xmlns:a16="http://schemas.microsoft.com/office/drawing/2014/main" id="{5F16A3E4-6EA1-4856-A1E4-D2A5BE3B1CC8}"/>
+              </a:ext>
+            </a:extLst>
+          </p:cNvPr>
+          <p:cNvSpPr>
+            <a:spLocks xmlns:a="http://schemas.openxmlformats.org/drawingml/2006/main" noGrp="1"/>
+          </p:cNvSpPr>
+          <p:nvPr/>
+        </p:nvSpPr>
+        <p:spPr>
+          <a:xfrm xmlns:a="http://schemas.openxmlformats.org/drawingml/2006/main">
+            <a:off x="533400" y="3114675"/>
+            <a:ext cx="11125200" cy="457200"/>
+          </a:xfrm>
+          <a:prstGeom xmlns:a="http://schemas.openxmlformats.org/drawingml/2006/main" prst="rect">
+            <a:avLst/>
+          </a:prstGeom>
+          <a:noFill xmlns:a="http://schemas.openxmlformats.org/drawingml/2006/main"/>
+          <a:ln xmlns:a="http://schemas.openxmlformats.org/drawingml/2006/main" w="0">
+            <a:noFill/>
+          </a:ln>
+        </p:spPr>
+        <p:txBody>
+          <a:bodyPr xmlns:a="http://schemas.openxmlformats.org/drawingml/2006/main">
+            <a:noAutofit/>
+          </a:bodyPr>
+          <a:lstStyle xmlns:a="http://schemas.openxmlformats.org/drawingml/2006/main"/>
+          <a:p xmlns:a="http://schemas.openxmlformats.org/drawingml/2006/main">
+            <a:pPr>
+              <a:defRPr sz="1800" b="1">
+                <a:solidFill>
+                  <a:srgbClr val="087F86"/>
+                </a:solidFill>
+                <a:latin typeface="Arial"/>
+                <a:ea typeface="Arial"/>
+                <a:cs typeface="Arial"/>
+              </a:defRPr>
+            </a:pPr>
+            <a:r>
+              <a:rPr sz="1800" b="1">
+                <a:solidFill>
+                  <a:srgbClr val="087F86"/>
+                </a:solidFill>
+                <a:latin typeface="Arial"/>
+                <a:ea typeface="Arial"/>
+                <a:cs typeface="Arial"/>
+              </a:rPr>
+              <a:t>🧩 Sachverhalt</a:t>
+            </a:r>
+          </a:p>
+        </p:txBody>
+      </p:sp>
+      <p:sp>
+        <p:nvSpPr>
+          <p:cNvPr id="8" name="">
+            <a:extLst xmlns:a="http://schemas.openxmlformats.org/drawingml/2006/main">
+              <a:ext uri="{FF2B5EF4-FFF2-40B4-BE49-F238E27FC236}">
+                <a16:creationId xmlns:a16="http://schemas.microsoft.com/office/drawing/2014/main" id="{5AACE782-74B7-45D2-9049-EBD2B44C75AD}"/>
+              </a:ext>
+            </a:extLst>
+          </p:cNvPr>
+          <p:cNvSpPr>
+            <a:spLocks xmlns:a="http://schemas.openxmlformats.org/drawingml/2006/main" noGrp="1"/>
+          </p:cNvSpPr>
+          <p:nvPr/>
+        </p:nvSpPr>
+        <p:spPr>
+          <a:xfrm xmlns:a="http://schemas.openxmlformats.org/drawingml/2006/main">
+            <a:off x="533400" y="3571875"/>
             <a:ext cx="11125200" cy="647700"/>
           </a:xfrm>
           <a:prstGeom xmlns:a="http://schemas.openxmlformats.org/drawingml/2006/main" prst="rect">
@@ -13399,36 +13327,36 @@
             <a:pPr>
               <a:defRPr sz="1725" b="0">
                 <a:solidFill>
-                  <a:srgbClr val="FFFFFF"/>
-                </a:solidFill>
-                <a:latin typeface="Arial"/>
-                <a:ea typeface="Arial"/>
-                <a:cs typeface="Arial"/>
-              </a:defRPr>
-            </a:pPr>
-            <a:r>
-              <a:t>Wer liefert Tatsachen, wer vertritt wessen Interessen, wer prüft die medizinische Indikation und wer entscheidet rechtlich?</a:t>
-            </a:r>
-          </a:p>
-        </p:txBody>
-      </p:sp>
-      <p:sp>
-        <p:nvSpPr>
-          <p:cNvPr id="5" name="">
-            <a:extLst xmlns:a="http://schemas.openxmlformats.org/drawingml/2006/main">
-              <a:ext uri="{FF2B5EF4-FFF2-40B4-BE49-F238E27FC236}">
-                <a16:creationId xmlns:a16="http://schemas.microsoft.com/office/drawing/2014/main" id="{FEA773F2-2D9B-42A0-8285-37A5A9F2EB95}"/>
-              </a:ext>
-            </a:extLst>
-          </p:cNvPr>
-          <p:cNvSpPr>
-            <a:spLocks xmlns:a="http://schemas.openxmlformats.org/drawingml/2006/main" noGrp="1"/>
-          </p:cNvSpPr>
-          <p:nvPr/>
-        </p:nvSpPr>
-        <p:spPr>
-          <a:xfrm xmlns:a="http://schemas.openxmlformats.org/drawingml/2006/main">
-            <a:off x="533400" y="2562225"/>
+                  <a:srgbClr val="071D33"/>
+                </a:solidFill>
+                <a:latin typeface="Arial"/>
+                <a:ea typeface="Arial"/>
+                <a:cs typeface="Arial"/>
+              </a:defRPr>
+            </a:pPr>
+            <a:r>
+              <a:t>Das Gericht bestellte für die hirntote Schwangere eine vorläufige Betreuerin, obwohl es die Frau als rechtlich tot ansah. Kreislauf und Atmung wurden wegen der Schwangerschaft künstlich aufrechterhalten.</a:t>
+            </a:r>
+          </a:p>
+        </p:txBody>
+      </p:sp>
+      <p:sp>
+        <p:nvSpPr>
+          <p:cNvPr id="9" name="">
+            <a:extLst xmlns:a="http://schemas.openxmlformats.org/drawingml/2006/main">
+              <a:ext uri="{FF2B5EF4-FFF2-40B4-BE49-F238E27FC236}">
+                <a16:creationId xmlns:a16="http://schemas.microsoft.com/office/drawing/2014/main" id="{C42FDCC6-7DFD-401D-87FF-48F49D395996}"/>
+              </a:ext>
+            </a:extLst>
+          </p:cNvPr>
+          <p:cNvSpPr>
+            <a:spLocks xmlns:a="http://schemas.openxmlformats.org/drawingml/2006/main" noGrp="1"/>
+          </p:cNvSpPr>
+          <p:nvPr/>
+        </p:nvSpPr>
+        <p:spPr>
+          <a:xfrm xmlns:a="http://schemas.openxmlformats.org/drawingml/2006/main">
+            <a:off x="533400" y="4219575"/>
             <a:ext cx="11125200" cy="457200"/>
           </a:xfrm>
           <a:prstGeom xmlns:a="http://schemas.openxmlformats.org/drawingml/2006/main" prst="rect">
@@ -13448,7 +13376,7 @@
             <a:pPr>
               <a:defRPr sz="1800" b="1">
                 <a:solidFill>
-                  <a:srgbClr val="59D7D1"/>
+                  <a:srgbClr val="087F86"/>
                 </a:solidFill>
                 <a:latin typeface="Arial"/>
                 <a:ea typeface="Arial"/>
@@ -13458,35 +13386,35 @@
             <a:r>
               <a:rPr sz="1800" b="1">
                 <a:solidFill>
-                  <a:srgbClr val="59D7D1"/>
+                  <a:srgbClr val="087F86"/>
                 </a:solidFill>
                 <a:latin typeface="Arial"/>
                 <a:ea typeface="Arial"/>
                 <a:cs typeface="Arial"/>
               </a:rPr>
-              <a:t>5 Prozess sichern</a:t>
-            </a:r>
-          </a:p>
-        </p:txBody>
-      </p:sp>
-      <p:sp>
-        <p:nvSpPr>
-          <p:cNvPr id="6" name="">
-            <a:extLst xmlns:a="http://schemas.openxmlformats.org/drawingml/2006/main">
-              <a:ext uri="{FF2B5EF4-FFF2-40B4-BE49-F238E27FC236}">
-                <a16:creationId xmlns:a16="http://schemas.microsoft.com/office/drawing/2014/main" id="{3CFFE864-95D4-44C8-9C63-760E2CC32042}"/>
-              </a:ext>
-            </a:extLst>
-          </p:cNvPr>
-          <p:cNvSpPr>
-            <a:spLocks xmlns:a="http://schemas.openxmlformats.org/drawingml/2006/main" noGrp="1"/>
-          </p:cNvSpPr>
-          <p:nvPr/>
-        </p:nvSpPr>
-        <p:spPr>
-          <a:xfrm xmlns:a="http://schemas.openxmlformats.org/drawingml/2006/main">
-            <a:off x="533400" y="3019425"/>
-            <a:ext cx="11125200" cy="647700"/>
+              <a:t>❝ Tragende Aussage</a:t>
+            </a:r>
+          </a:p>
+        </p:txBody>
+      </p:sp>
+      <p:sp>
+        <p:nvSpPr>
+          <p:cNvPr id="10" name="">
+            <a:extLst xmlns:a="http://schemas.openxmlformats.org/drawingml/2006/main">
+              <a:ext uri="{FF2B5EF4-FFF2-40B4-BE49-F238E27FC236}">
+                <a16:creationId xmlns:a16="http://schemas.microsoft.com/office/drawing/2014/main" id="{B3C3DBBB-F3A5-4EEA-9AAF-3C3AC05E587B}"/>
+              </a:ext>
+            </a:extLst>
+          </p:cNvPr>
+          <p:cNvSpPr>
+            <a:spLocks xmlns:a="http://schemas.openxmlformats.org/drawingml/2006/main" noGrp="1"/>
+          </p:cNvSpPr>
+          <p:nvPr/>
+        </p:nvSpPr>
+        <p:spPr>
+          <a:xfrm xmlns:a="http://schemas.openxmlformats.org/drawingml/2006/main">
+            <a:off x="533400" y="4676775"/>
+            <a:ext cx="11125200" cy="914400"/>
           </a:xfrm>
           <a:prstGeom xmlns:a="http://schemas.openxmlformats.org/drawingml/2006/main" prst="rect">
             <a:avLst/>
@@ -13505,176 +13433,70 @@
             <a:pPr>
               <a:defRPr sz="1725" b="0">
                 <a:solidFill>
-                  <a:srgbClr val="FFFFFF"/>
-                </a:solidFill>
-                <a:latin typeface="Arial"/>
-                <a:ea typeface="Arial"/>
-                <a:cs typeface="Arial"/>
-              </a:defRPr>
-            </a:pPr>
-            <a:r>
-              <a:t>Zeitfenster, Dissens, Ethikberatung, gerichtliche Kontaktaufnahme und Gründe der Zwischenentscheidung dokumentieren.</a:t>
-            </a:r>
-          </a:p>
-        </p:txBody>
-      </p:sp>
-      <p:sp>
-        <p:nvSpPr>
-          <p:cNvPr id="7" name="">
-            <a:extLst xmlns:a="http://schemas.openxmlformats.org/drawingml/2006/main">
-              <a:ext uri="{FF2B5EF4-FFF2-40B4-BE49-F238E27FC236}">
-                <a16:creationId xmlns:a16="http://schemas.microsoft.com/office/drawing/2014/main" id="{0C6DFA0A-1D11-4447-84A7-2C18143E00B6}"/>
-              </a:ext>
-            </a:extLst>
-          </p:cNvPr>
-          <p:cNvSpPr>
-            <a:spLocks xmlns:a="http://schemas.openxmlformats.org/drawingml/2006/main" noGrp="1"/>
-          </p:cNvSpPr>
-          <p:nvPr/>
-        </p:nvSpPr>
-        <p:spPr>
-          <a:xfrm xmlns:a="http://schemas.openxmlformats.org/drawingml/2006/main">
-            <a:off x="533400" y="3667125"/>
-            <a:ext cx="11125200" cy="457200"/>
-          </a:xfrm>
-          <a:prstGeom xmlns:a="http://schemas.openxmlformats.org/drawingml/2006/main" prst="rect">
-            <a:avLst/>
-          </a:prstGeom>
-          <a:noFill xmlns:a="http://schemas.openxmlformats.org/drawingml/2006/main"/>
-          <a:ln xmlns:a="http://schemas.openxmlformats.org/drawingml/2006/main" w="0">
-            <a:noFill/>
-          </a:ln>
-        </p:spPr>
-        <p:txBody>
-          <a:bodyPr xmlns:a="http://schemas.openxmlformats.org/drawingml/2006/main">
-            <a:noAutofit/>
-          </a:bodyPr>
-          <a:lstStyle xmlns:a="http://schemas.openxmlformats.org/drawingml/2006/main"/>
-          <a:p xmlns:a="http://schemas.openxmlformats.org/drawingml/2006/main">
-            <a:pPr>
-              <a:defRPr sz="1800" b="1">
-                <a:solidFill>
-                  <a:srgbClr val="59D7D1"/>
-                </a:solidFill>
-                <a:latin typeface="Arial"/>
-                <a:ea typeface="Arial"/>
-                <a:cs typeface="Arial"/>
-              </a:defRPr>
-            </a:pPr>
-            <a:r>
-              <a:rPr sz="1800" b="1">
-                <a:solidFill>
-                  <a:srgbClr val="59D7D1"/>
-                </a:solidFill>
-                <a:latin typeface="Arial"/>
-                <a:ea typeface="Arial"/>
-                <a:cs typeface="Arial"/>
+                  <a:srgbClr val="071D33"/>
+                </a:solidFill>
+                <a:latin typeface="Arial"/>
+                <a:ea typeface="Arial"/>
+                <a:cs typeface="Arial"/>
+              </a:defRPr>
+            </a:pPr>
+            <a:r>
+              <a:t>Nach dem Beschluss bedurfte das Abschalten der funktionserhaltenden Apparate vor der Entbindung oder dem Tod des ungeborenen Kindes einer gerichtlichen Genehmigung. Danach sollte dieser Genehmigungsvorbehalt entfallen.</a:t>
+            </a:r>
+          </a:p>
+        </p:txBody>
+      </p:sp>
+      <p:sp>
+        <p:nvSpPr>
+          <p:cNvPr id="11" name="">
+            <a:extLst xmlns:a="http://schemas.openxmlformats.org/drawingml/2006/main">
+              <a:ext uri="{FF2B5EF4-FFF2-40B4-BE49-F238E27FC236}">
+                <a16:creationId xmlns:a16="http://schemas.microsoft.com/office/drawing/2014/main" id="{C55B4ADD-8EF4-418E-89E7-FB9AA3E2A01A}"/>
+              </a:ext>
+            </a:extLst>
+          </p:cNvPr>
+          <p:cNvSpPr>
+            <a:spLocks xmlns:a="http://schemas.openxmlformats.org/drawingml/2006/main" noGrp="1"/>
+          </p:cNvSpPr>
+          <p:nvPr/>
+        </p:nvSpPr>
+        <p:spPr>
+          <a:xfrm xmlns:a="http://schemas.openxmlformats.org/drawingml/2006/main">
+            <a:off x="533400" y="5953125"/>
+            <a:ext cx="11125200" cy="238125"/>
+          </a:xfrm>
+          <a:prstGeom xmlns:a="http://schemas.openxmlformats.org/drawingml/2006/main" prst="rect">
+            <a:avLst/>
+          </a:prstGeom>
+          <a:noFill xmlns:a="http://schemas.openxmlformats.org/drawingml/2006/main"/>
+          <a:ln xmlns:a="http://schemas.openxmlformats.org/drawingml/2006/main" w="0">
+            <a:noFill/>
+          </a:ln>
+        </p:spPr>
+        <p:txBody>
+          <a:bodyPr xmlns:a="http://schemas.openxmlformats.org/drawingml/2006/main">
+            <a:noAutofit/>
+          </a:bodyPr>
+          <a:lstStyle xmlns:a="http://schemas.openxmlformats.org/drawingml/2006/main"/>
+          <a:p xmlns:a="http://schemas.openxmlformats.org/drawingml/2006/main">
+            <a:pPr>
+              <a:defRPr sz="900" b="0">
+                <a:solidFill>
+                  <a:srgbClr val="526D75"/>
+                </a:solidFill>
+                <a:latin typeface="Arial"/>
+                <a:ea typeface="Arial"/>
+                <a:cs typeface="Arial"/>
+              </a:defRPr>
+            </a:pPr>
+            <a:r>
+              <a:t>Quelle: AG Hersbruck, Beschl. v. 16.10.1992 – XVII 1556/92, NJW 1992, 3245; veröffentlichter Beschlusstext geprüft am 09.09.2026 · </a:t>
+            </a:r>
+            <a:r>
+              <a:rPr>
+                <a:hlinkClick xmlns:r="http://schemas.openxmlformats.org/officeDocument/2006/relationships" r:id="R1351e92449054729"/>
               </a:rPr>
-              <a:t>💡 Praxis-Merksatz</a:t>
-            </a:r>
-          </a:p>
-        </p:txBody>
-      </p:sp>
-      <p:sp>
-        <p:nvSpPr>
-          <p:cNvPr id="8" name="">
-            <a:extLst xmlns:a="http://schemas.openxmlformats.org/drawingml/2006/main">
-              <a:ext uri="{FF2B5EF4-FFF2-40B4-BE49-F238E27FC236}">
-                <a16:creationId xmlns:a16="http://schemas.microsoft.com/office/drawing/2014/main" id="{70B46DC4-897E-4F73-82AE-CF74B958970C}"/>
-              </a:ext>
-            </a:extLst>
-          </p:cNvPr>
-          <p:cNvSpPr>
-            <a:spLocks xmlns:a="http://schemas.openxmlformats.org/drawingml/2006/main" noGrp="1"/>
-          </p:cNvSpPr>
-          <p:nvPr/>
-        </p:nvSpPr>
-        <p:spPr>
-          <a:xfrm xmlns:a="http://schemas.openxmlformats.org/drawingml/2006/main">
-            <a:off x="533400" y="4124325"/>
-            <a:ext cx="11125200" cy="647700"/>
-          </a:xfrm>
-          <a:prstGeom xmlns:a="http://schemas.openxmlformats.org/drawingml/2006/main" prst="rect">
-            <a:avLst/>
-          </a:prstGeom>
-          <a:noFill xmlns:a="http://schemas.openxmlformats.org/drawingml/2006/main"/>
-          <a:ln xmlns:a="http://schemas.openxmlformats.org/drawingml/2006/main" w="0">
-            <a:noFill/>
-          </a:ln>
-        </p:spPr>
-        <p:txBody>
-          <a:bodyPr xmlns:a="http://schemas.openxmlformats.org/drawingml/2006/main">
-            <a:noAutofit/>
-          </a:bodyPr>
-          <a:lstStyle xmlns:a="http://schemas.openxmlformats.org/drawingml/2006/main"/>
-          <a:p xmlns:a="http://schemas.openxmlformats.org/drawingml/2006/main">
-            <a:pPr>
-              <a:defRPr sz="1725" b="0">
-                <a:solidFill>
-                  <a:srgbClr val="FFFFFF"/>
-                </a:solidFill>
-                <a:latin typeface="Arial"/>
-                <a:ea typeface="Arial"/>
-                <a:cs typeface="Arial"/>
-              </a:defRPr>
-            </a:pPr>
-            <a:r>
-              <a:t>In Grenzfällen ist ein transparentes, überprüfbares Verfahren oft rechtlich wichtiger als eine scheinbar schnelle Gewissheit.</a:t>
-            </a:r>
-          </a:p>
-        </p:txBody>
-      </p:sp>
-      <p:sp>
-        <p:nvSpPr>
-          <p:cNvPr id="9" name="">
-            <a:extLst xmlns:a="http://schemas.openxmlformats.org/drawingml/2006/main">
-              <a:ext uri="{FF2B5EF4-FFF2-40B4-BE49-F238E27FC236}">
-                <a16:creationId xmlns:a16="http://schemas.microsoft.com/office/drawing/2014/main" id="{C6F3982E-2EE6-4AB2-A0A6-72E0474E74EF}"/>
-              </a:ext>
-            </a:extLst>
-          </p:cNvPr>
-          <p:cNvSpPr>
-            <a:spLocks xmlns:a="http://schemas.openxmlformats.org/drawingml/2006/main" noGrp="1"/>
-          </p:cNvSpPr>
-          <p:nvPr/>
-        </p:nvSpPr>
-        <p:spPr>
-          <a:xfrm xmlns:a="http://schemas.openxmlformats.org/drawingml/2006/main">
-            <a:off x="533400" y="5810250"/>
-            <a:ext cx="11125200" cy="381000"/>
-          </a:xfrm>
-          <a:prstGeom xmlns:a="http://schemas.openxmlformats.org/drawingml/2006/main" prst="rect">
-            <a:avLst/>
-          </a:prstGeom>
-          <a:noFill xmlns:a="http://schemas.openxmlformats.org/drawingml/2006/main"/>
-          <a:ln xmlns:a="http://schemas.openxmlformats.org/drawingml/2006/main" w="0">
-            <a:noFill/>
-          </a:ln>
-        </p:spPr>
-        <p:txBody>
-          <a:bodyPr xmlns:a="http://schemas.openxmlformats.org/drawingml/2006/main">
-            <a:noAutofit/>
-          </a:bodyPr>
-          <a:lstStyle xmlns:a="http://schemas.openxmlformats.org/drawingml/2006/main"/>
-          <a:p xmlns:a="http://schemas.openxmlformats.org/drawingml/2006/main">
-            <a:pPr>
-              <a:defRPr sz="900" b="0">
-                <a:solidFill>
-                  <a:srgbClr val="B7D8D5"/>
-                </a:solidFill>
-                <a:latin typeface="Arial"/>
-                <a:ea typeface="Arial"/>
-                <a:cs typeface="Arial"/>
-              </a:defRPr>
-            </a:pPr>
-            <a:r>
-              <a:t>Quelle: Recht Medizinisch · allgemeine Lernfassung. Zur Todesfeststellung: Bundesärztekammer, Richtlinie zum irreversiblen Hirnfunktionsausfall, Fünfte Fortschreibung (2022), geprüft 07.09.2026 · </a:t>
-            </a:r>
-            <a:r>
-              <a:rPr>
-                <a:hlinkClick xmlns:r="http://schemas.openxmlformats.org/officeDocument/2006/relationships" r:id="Rd792f39239354cac"/>
-              </a:rPr>
-              <a:t>Quelle öffnen (wbbaek.de)</a:t>
+              <a:t>Quelle öffnen (beck-online.beck.de)</a:t>
             </a:r>
             <a:r>
               <a:t/>
@@ -13684,10 +13506,10 @@
       </p:sp>
       <p:sp>
         <p:nvSpPr>
-          <p:cNvPr id="10" name="">
-            <a:extLst xmlns:a="http://schemas.openxmlformats.org/drawingml/2006/main">
-              <a:ext uri="{FF2B5EF4-FFF2-40B4-BE49-F238E27FC236}">
-                <a16:creationId xmlns:a16="http://schemas.microsoft.com/office/drawing/2014/main" id="{32D45FEF-8642-4613-BBCC-262681E27356}"/>
+          <p:cNvPr id="12" name="">
+            <a:extLst xmlns:a="http://schemas.openxmlformats.org/drawingml/2006/main">
+              <a:ext uri="{FF2B5EF4-FFF2-40B4-BE49-F238E27FC236}">
+                <a16:creationId xmlns:a16="http://schemas.microsoft.com/office/drawing/2014/main" id="{7F0E4250-322A-4C42-BA27-CEDE904D0F49}"/>
               </a:ext>
             </a:extLst>
           </p:cNvPr>
@@ -13718,7 +13540,7 @@
             <a:pPr>
               <a:defRPr sz="1050" b="0">
                 <a:solidFill>
-                  <a:srgbClr val="B7D8D5"/>
+                  <a:srgbClr val="526D75"/>
                 </a:solidFill>
                 <a:latin typeface="Arial"/>
                 <a:ea typeface="Arial"/>
@@ -13728,13 +13550,13 @@
             <a:r>
               <a:rPr sz="1050" b="0">
                 <a:solidFill>
-                  <a:srgbClr val="B7D8D5"/>
+                  <a:srgbClr val="526D75"/>
                 </a:solidFill>
                 <a:latin typeface="Arial"/>
                 <a:ea typeface="Arial"/>
                 <a:cs typeface="Arial"/>
               </a:rPr>
-              <a:t>Recht Medizinisch · Folie 7 · Seite 2/2</a:t>
+              <a:t>Recht Medizinisch · Folie 8 · Seite 1/2</a:t>
             </a:r>
           </a:p>
         </p:txBody>
@@ -13742,7 +13564,7 @@
     </p:spTree>
     <p:extLst>
       <p:ext uri="{BB962C8B-B14F-4D97-AF65-F5344CB8AC3E}">
-        <p14:creationId xmlns:p14="http://schemas.microsoft.com/office/powerpoint/2010/main" val="1688719257"/>
+        <p14:creationId xmlns:p14="http://schemas.microsoft.com/office/powerpoint/2010/main" val="1218129964"/>
       </p:ext>
     </p:extLst>
   </p:cSld>
